--- a/docs/EdgeScholar_Pitch_Presentation.pptx
+++ b/docs/EdgeScholar_Pitch_Presentation.pptx
@@ -3112,7 +3112,7 @@
             <a:avLst/>
           </a:prstGeom>
           <a:solidFill>
-            <a:srgbClr val="0B0F19"/>
+            <a:srgbClr val="0A0D14"/>
           </a:solidFill>
           <a:ln>
             <a:noFill/>
@@ -3142,296 +3142,20 @@
       </p:sp>
       <p:sp>
         <p:nvSpPr>
-          <p:cNvPr id="3" name="Rectangle 2"/>
+          <p:cNvPr id="3" name="Rounded Rectangle 2"/>
           <p:cNvSpPr/>
           <p:nvPr/>
         </p:nvSpPr>
         <p:spPr>
           <a:xfrm>
-            <a:off x="731520" y="457200"/>
-            <a:ext cx="10728655" cy="54864"/>
-          </a:xfrm>
-          <a:prstGeom prst="rect">
+            <a:off x="731520" y="731520"/>
+            <a:ext cx="4114800" cy="365760"/>
+          </a:xfrm>
+          <a:prstGeom prst="roundRect">
             <a:avLst/>
           </a:prstGeom>
           <a:solidFill>
-            <a:srgbClr val="F59E0B"/>
-          </a:solidFill>
-          <a:ln>
-            <a:noFill/>
-          </a:ln>
-        </p:spPr>
-        <p:style>
-          <a:lnRef idx="1">
-            <a:schemeClr val="accent1"/>
-          </a:lnRef>
-          <a:fillRef idx="3">
-            <a:schemeClr val="accent1"/>
-          </a:fillRef>
-          <a:effectRef idx="2">
-            <a:schemeClr val="accent1"/>
-          </a:effectRef>
-          <a:fontRef idx="minor">
-            <a:schemeClr val="lt1"/>
-          </a:fontRef>
-        </p:style>
-        <p:txBody>
-          <a:bodyPr rtlCol="0" anchor="ctr"/>
-          <a:lstStyle/>
-          <a:p>
-            <a:pPr algn="ctr"/>
-          </a:p>
-        </p:txBody>
-      </p:sp>
-      <p:sp>
-        <p:nvSpPr>
-          <p:cNvPr id="4" name="TextBox 3"/>
-          <p:cNvSpPr txBox="1"/>
-          <p:nvPr/>
-        </p:nvSpPr>
-        <p:spPr>
-          <a:xfrm>
-            <a:off x="731520" y="594360"/>
-            <a:ext cx="9601200" cy="365760"/>
-          </a:xfrm>
-          <a:prstGeom prst="rect">
-            <a:avLst/>
-          </a:prstGeom>
-          <a:noFill/>
-        </p:spPr>
-        <p:txBody>
-          <a:bodyPr wrap="square">
-            <a:spAutoFit/>
-          </a:bodyPr>
-          <a:lstStyle/>
-          <a:p>
-            <a:pPr>
-              <a:defRPr sz="1100" b="1">
-                <a:solidFill>
-                  <a:srgbClr val="F59E0B"/>
-                </a:solidFill>
-              </a:defRPr>
-            </a:pPr>
-            <a:r>
-              <a:t>QUALCOMM SNAPDRAGON AI LAB BUILD &amp; PRESENT CHALLENGE 2026  |  SLIDE 01</a:t>
-            </a:r>
-          </a:p>
-        </p:txBody>
-      </p:sp>
-      <p:sp>
-        <p:nvSpPr>
-          <p:cNvPr id="5" name="TextBox 4"/>
-          <p:cNvSpPr txBox="1"/>
-          <p:nvPr/>
-        </p:nvSpPr>
-        <p:spPr>
-          <a:xfrm>
-            <a:off x="731520" y="960120"/>
-            <a:ext cx="10728655" cy="731520"/>
-          </a:xfrm>
-          <a:prstGeom prst="rect">
-            <a:avLst/>
-          </a:prstGeom>
-          <a:noFill/>
-        </p:spPr>
-        <p:txBody>
-          <a:bodyPr wrap="square">
-            <a:spAutoFit/>
-          </a:bodyPr>
-          <a:lstStyle/>
-          <a:p>
-            <a:pPr>
-              <a:defRPr sz="2400" b="1">
-                <a:solidFill>
-                  <a:srgbClr val="F8FAFC"/>
-                </a:solidFill>
-              </a:defRPr>
-            </a:pPr>
-            <a:r>
-              <a:t>EdgeScholar: Private On-Device AI Study Copilot</a:t>
-            </a:r>
-          </a:p>
-        </p:txBody>
-      </p:sp>
-      <p:sp>
-        <p:nvSpPr>
-          <p:cNvPr id="6" name="TextBox 5"/>
-          <p:cNvSpPr txBox="1"/>
-          <p:nvPr/>
-        </p:nvSpPr>
-        <p:spPr>
-          <a:xfrm>
-            <a:off x="731520" y="1691640"/>
-            <a:ext cx="10728655" cy="457200"/>
-          </a:xfrm>
-          <a:prstGeom prst="rect">
-            <a:avLst/>
-          </a:prstGeom>
-          <a:noFill/>
-        </p:spPr>
-        <p:txBody>
-          <a:bodyPr wrap="square">
-            <a:spAutoFit/>
-          </a:bodyPr>
-          <a:lstStyle/>
-          <a:p>
-            <a:pPr>
-              <a:defRPr sz="1400">
-                <a:solidFill>
-                  <a:srgbClr val="CBD5E1"/>
-                </a:solidFill>
-              </a:defRPr>
-            </a:pPr>
-            <a:r>
-              <a:t>Track: On-Device AI Optimized for Snapdragon-Powered HP PCs</a:t>
-            </a:r>
-          </a:p>
-        </p:txBody>
-      </p:sp>
-      <p:sp>
-        <p:nvSpPr>
-          <p:cNvPr id="7" name="Rounded Rectangle 6"/>
-          <p:cNvSpPr/>
-          <p:nvPr/>
-        </p:nvSpPr>
-        <p:spPr>
-          <a:xfrm>
-            <a:off x="731520" y="2240280"/>
-            <a:ext cx="10728655" cy="3291840"/>
-          </a:xfrm>
-          <a:prstGeom prst="roundRect">
-            <a:avLst/>
-          </a:prstGeom>
-          <a:solidFill>
-            <a:srgbClr val="161E31"/>
-          </a:solidFill>
-          <a:ln w="12700">
-            <a:solidFill>
-              <a:srgbClr val="334155"/>
-            </a:solidFill>
-          </a:ln>
-        </p:spPr>
-        <p:style>
-          <a:lnRef idx="1">
-            <a:schemeClr val="accent1"/>
-          </a:lnRef>
-          <a:fillRef idx="3">
-            <a:schemeClr val="accent1"/>
-          </a:fillRef>
-          <a:effectRef idx="2">
-            <a:schemeClr val="accent1"/>
-          </a:effectRef>
-          <a:fontRef idx="minor">
-            <a:schemeClr val="lt1"/>
-          </a:fontRef>
-        </p:style>
-        <p:txBody>
-          <a:bodyPr rtlCol="0" anchor="ctr"/>
-          <a:lstStyle/>
-          <a:p>
-            <a:pPr algn="ctr"/>
-          </a:p>
-        </p:txBody>
-      </p:sp>
-      <p:sp>
-        <p:nvSpPr>
-          <p:cNvPr id="8" name="TextBox 7"/>
-          <p:cNvSpPr txBox="1"/>
-          <p:nvPr/>
-        </p:nvSpPr>
-        <p:spPr>
-          <a:xfrm>
-            <a:off x="1005840" y="2423160"/>
-            <a:ext cx="10180015" cy="2926080"/>
-          </a:xfrm>
-          <a:prstGeom prst="rect">
-            <a:avLst/>
-          </a:prstGeom>
-          <a:noFill/>
-        </p:spPr>
-        <p:txBody>
-          <a:bodyPr wrap="square">
-            <a:spAutoFit/>
-          </a:bodyPr>
-          <a:lstStyle/>
-          <a:p>
-            <a:pPr>
-              <a:spcAft>
-                <a:spcPts val="1000"/>
-              </a:spcAft>
-              <a:defRPr sz="1300">
-                <a:solidFill>
-                  <a:srgbClr val="CBD5E1"/>
-                </a:solidFill>
-              </a:defRPr>
-            </a:pPr>
-            <a:r>
-              <a:t>• Core Mission: Bring high-performance, verifiable AI learning directly to student PCs.</a:t>
-            </a:r>
-          </a:p>
-          <a:p>
-            <a:pPr>
-              <a:spcAft>
-                <a:spcPts val="1000"/>
-              </a:spcAft>
-              <a:defRPr sz="1300">
-                <a:solidFill>
-                  <a:srgbClr val="CBD5E1"/>
-                </a:solidFill>
-              </a:defRPr>
-            </a:pPr>
-            <a:r>
-              <a:t>• 100% Offline-First Architecture: Documents and personal notes never leave the local device.</a:t>
-            </a:r>
-          </a:p>
-          <a:p>
-            <a:pPr>
-              <a:spcAft>
-                <a:spcPts val="1000"/>
-              </a:spcAft>
-              <a:defRPr sz="1300">
-                <a:solidFill>
-                  <a:srgbClr val="CBD5E1"/>
-                </a:solidFill>
-              </a:defRPr>
-            </a:pPr>
-            <a:r>
-              <a:t>• Snapdragon NPU Accelerated: Leverages Qualcomm Hexagon NPU via Qualcomm AI Hub models.</a:t>
-            </a:r>
-          </a:p>
-          <a:p>
-            <a:pPr>
-              <a:spcAft>
-                <a:spcPts val="1000"/>
-              </a:spcAft>
-              <a:defRPr sz="1300">
-                <a:solidFill>
-                  <a:srgbClr val="CBD5E1"/>
-                </a:solidFill>
-              </a:defRPr>
-            </a:pPr>
-            <a:r>
-              <a:t>• Participant Solely Owned: MIT Licensed, independent student project built from scratch.</a:t>
-            </a:r>
-          </a:p>
-        </p:txBody>
-      </p:sp>
-      <p:sp>
-        <p:nvSpPr>
-          <p:cNvPr id="9" name="Rounded Rectangle 8"/>
-          <p:cNvSpPr/>
-          <p:nvPr/>
-        </p:nvSpPr>
-        <p:spPr>
-          <a:xfrm>
-            <a:off x="731520" y="5715000"/>
-            <a:ext cx="10728655" cy="594360"/>
-          </a:xfrm>
-          <a:prstGeom prst="roundRect">
-            <a:avLst/>
-          </a:prstGeom>
-          <a:solidFill>
-            <a:srgbClr val="121826"/>
+            <a:srgbClr val="1E293B"/>
           </a:solidFill>
           <a:ln w="12700">
             <a:solidFill>
@@ -3457,20 +3181,29 @@
           <a:bodyPr rtlCol="0" anchor="ctr"/>
           <a:lstStyle/>
           <a:p>
-            <a:pPr algn="ctr"/>
-          </a:p>
-        </p:txBody>
-      </p:sp>
-      <p:sp>
-        <p:nvSpPr>
-          <p:cNvPr id="10" name="TextBox 9"/>
+            <a:pPr algn="ctr">
+              <a:defRPr sz="1000" b="1">
+                <a:solidFill>
+                  <a:srgbClr val="F59E0B"/>
+                </a:solidFill>
+              </a:defRPr>
+            </a:pPr>
+            <a:r>
+              <a:t>QUALCOMM SNAPDRAGON AI LAB 2026</a:t>
+            </a:r>
+          </a:p>
+        </p:txBody>
+      </p:sp>
+      <p:sp>
+        <p:nvSpPr>
+          <p:cNvPr id="4" name="TextBox 3"/>
           <p:cNvSpPr txBox="1"/>
           <p:nvPr/>
         </p:nvSpPr>
         <p:spPr>
           <a:xfrm>
-            <a:off x="914400" y="5779008"/>
-            <a:ext cx="10362895" cy="457200"/>
+            <a:off x="731520" y="1280160"/>
+            <a:ext cx="10728655" cy="1097280"/>
           </a:xfrm>
           <a:prstGeom prst="rect">
             <a:avLst/>
@@ -3484,14 +3217,416 @@
           <a:lstStyle/>
           <a:p>
             <a:pPr>
+              <a:defRPr sz="4600" b="1">
+                <a:solidFill>
+                  <a:srgbClr val="F8FAFC"/>
+                </a:solidFill>
+              </a:defRPr>
+            </a:pPr>
+            <a:r>
+              <a:t>EdgeScholar</a:t>
+            </a:r>
+          </a:p>
+        </p:txBody>
+      </p:sp>
+      <p:sp>
+        <p:nvSpPr>
+          <p:cNvPr id="5" name="TextBox 4"/>
+          <p:cNvSpPr txBox="1"/>
+          <p:nvPr/>
+        </p:nvSpPr>
+        <p:spPr>
+          <a:xfrm>
+            <a:off x="731520" y="2377440"/>
+            <a:ext cx="10728655" cy="548640"/>
+          </a:xfrm>
+          <a:prstGeom prst="rect">
+            <a:avLst/>
+          </a:prstGeom>
+          <a:noFill/>
+        </p:spPr>
+        <p:txBody>
+          <a:bodyPr wrap="none">
+            <a:spAutoFit/>
+          </a:bodyPr>
+          <a:lstStyle/>
+          <a:p>
+            <a:pPr>
+              <a:defRPr sz="1800">
+                <a:solidFill>
+                  <a:srgbClr val="F59E0B"/>
+                </a:solidFill>
+              </a:defRPr>
+            </a:pPr>
+            <a:r>
+              <a:t>Private On-Device AI Study Copilot for Snapdragon-Powered HP PCs</a:t>
+            </a:r>
+          </a:p>
+        </p:txBody>
+      </p:sp>
+      <p:sp>
+        <p:nvSpPr>
+          <p:cNvPr id="6" name="TextBox 5"/>
+          <p:cNvSpPr txBox="1"/>
+          <p:nvPr/>
+        </p:nvSpPr>
+        <p:spPr>
+          <a:xfrm>
+            <a:off x="731520" y="2926080"/>
+            <a:ext cx="10728655" cy="731520"/>
+          </a:xfrm>
+          <a:prstGeom prst="rect">
+            <a:avLst/>
+          </a:prstGeom>
+          <a:noFill/>
+        </p:spPr>
+        <p:txBody>
+          <a:bodyPr wrap="none">
+            <a:spAutoFit/>
+          </a:bodyPr>
+          <a:lstStyle/>
+          <a:p>
+            <a:pPr>
+              <a:defRPr sz="1300">
+                <a:solidFill>
+                  <a:srgbClr val="94A3B8"/>
+                </a:solidFill>
+              </a:defRPr>
+            </a:pPr>
+            <a:r>
+              <a:t>A tactile, 100% offline-first learning studio that turns student textbooks into interactive, page-cited knowledge graphs with zero cloud leakage, zero subscription fees, and instant NPU acceleration.</a:t>
+            </a:r>
+          </a:p>
+        </p:txBody>
+      </p:sp>
+      <p:sp>
+        <p:nvSpPr>
+          <p:cNvPr id="7" name="Rounded Rectangle 6"/>
+          <p:cNvSpPr/>
+          <p:nvPr/>
+        </p:nvSpPr>
+        <p:spPr>
+          <a:xfrm>
+            <a:off x="731520" y="3931920"/>
+            <a:ext cx="3413455" cy="1645920"/>
+          </a:xfrm>
+          <a:prstGeom prst="roundRect">
+            <a:avLst/>
+          </a:prstGeom>
+          <a:solidFill>
+            <a:srgbClr val="121927"/>
+          </a:solidFill>
+          <a:ln w="19050">
+            <a:solidFill>
+              <a:srgbClr val="10B981"/>
+            </a:solidFill>
+          </a:ln>
+        </p:spPr>
+        <p:style>
+          <a:lnRef idx="1">
+            <a:schemeClr val="accent1"/>
+          </a:lnRef>
+          <a:fillRef idx="3">
+            <a:schemeClr val="accent1"/>
+          </a:fillRef>
+          <a:effectRef idx="2">
+            <a:schemeClr val="accent1"/>
+          </a:effectRef>
+          <a:fontRef idx="minor">
+            <a:schemeClr val="lt1"/>
+          </a:fontRef>
+        </p:style>
+        <p:txBody>
+          <a:bodyPr rtlCol="0" anchor="ctr"/>
+          <a:lstStyle/>
+          <a:p>
+            <a:pPr algn="ctr"/>
+          </a:p>
+        </p:txBody>
+      </p:sp>
+      <p:sp>
+        <p:nvSpPr>
+          <p:cNvPr id="8" name="TextBox 7"/>
+          <p:cNvSpPr txBox="1"/>
+          <p:nvPr/>
+        </p:nvSpPr>
+        <p:spPr>
+          <a:xfrm>
+            <a:off x="914400" y="4069080"/>
+            <a:ext cx="3047695" cy="1371600"/>
+          </a:xfrm>
+          <a:prstGeom prst="rect">
+            <a:avLst/>
+          </a:prstGeom>
+          <a:noFill/>
+        </p:spPr>
+        <p:txBody>
+          <a:bodyPr wrap="none">
+            <a:spAutoFit/>
+          </a:bodyPr>
+          <a:lstStyle/>
+          <a:p>
+            <a:pPr>
+              <a:spcAft>
+                <a:spcPts val="600"/>
+              </a:spcAft>
               <a:defRPr sz="1200" b="1">
                 <a:solidFill>
+                  <a:srgbClr val="10B981"/>
+                </a:solidFill>
+              </a:defRPr>
+            </a:pPr>
+            <a:r>
+              <a:t>100% OFFLINE RAG</a:t>
+            </a:r>
+          </a:p>
+          <a:p>
+            <a:pPr>
+              <a:defRPr sz="1100">
+                <a:solidFill>
+                  <a:srgbClr val="CBD5E1"/>
+                </a:solidFill>
+              </a:defRPr>
+            </a:pPr>
+            <a:r>
+              <a:t>Zero data leaves the device.</a:t>
+            </a:r>
+            <a:br/>
+            <a:r>
+              <a:t>Full privacy for sensitive notes.</a:t>
+            </a:r>
+          </a:p>
+        </p:txBody>
+      </p:sp>
+      <p:sp>
+        <p:nvSpPr>
+          <p:cNvPr id="9" name="Rounded Rectangle 8"/>
+          <p:cNvSpPr/>
+          <p:nvPr/>
+        </p:nvSpPr>
+        <p:spPr>
+          <a:xfrm>
+            <a:off x="4389120" y="3931920"/>
+            <a:ext cx="3413455" cy="1645920"/>
+          </a:xfrm>
+          <a:prstGeom prst="roundRect">
+            <a:avLst/>
+          </a:prstGeom>
+          <a:solidFill>
+            <a:srgbClr val="121927"/>
+          </a:solidFill>
+          <a:ln w="19050">
+            <a:solidFill>
+              <a:srgbClr val="F59E0B"/>
+            </a:solidFill>
+          </a:ln>
+        </p:spPr>
+        <p:style>
+          <a:lnRef idx="1">
+            <a:schemeClr val="accent1"/>
+          </a:lnRef>
+          <a:fillRef idx="3">
+            <a:schemeClr val="accent1"/>
+          </a:fillRef>
+          <a:effectRef idx="2">
+            <a:schemeClr val="accent1"/>
+          </a:effectRef>
+          <a:fontRef idx="minor">
+            <a:schemeClr val="lt1"/>
+          </a:fontRef>
+        </p:style>
+        <p:txBody>
+          <a:bodyPr rtlCol="0" anchor="ctr"/>
+          <a:lstStyle/>
+          <a:p>
+            <a:pPr algn="ctr"/>
+          </a:p>
+        </p:txBody>
+      </p:sp>
+      <p:sp>
+        <p:nvSpPr>
+          <p:cNvPr id="10" name="TextBox 9"/>
+          <p:cNvSpPr txBox="1"/>
+          <p:nvPr/>
+        </p:nvSpPr>
+        <p:spPr>
+          <a:xfrm>
+            <a:off x="4572000" y="4069080"/>
+            <a:ext cx="3047695" cy="1371600"/>
+          </a:xfrm>
+          <a:prstGeom prst="rect">
+            <a:avLst/>
+          </a:prstGeom>
+          <a:noFill/>
+        </p:spPr>
+        <p:txBody>
+          <a:bodyPr wrap="none">
+            <a:spAutoFit/>
+          </a:bodyPr>
+          <a:lstStyle/>
+          <a:p>
+            <a:pPr>
+              <a:spcAft>
+                <a:spcPts val="600"/>
+              </a:spcAft>
+              <a:defRPr sz="1200" b="1">
+                <a:solidFill>
                   <a:srgbClr val="F59E0B"/>
                 </a:solidFill>
               </a:defRPr>
             </a:pPr>
             <a:r>
-              <a:t>★  Target Hardware: HP OmniBook X &amp; HP OmniBook Ultra (Snapdragon® X Elite / Plus)</a:t>
+              <a:t>QUALCOMM QNN ACCELERATED</a:t>
+            </a:r>
+          </a:p>
+          <a:p>
+            <a:pPr>
+              <a:defRPr sz="1100">
+                <a:solidFill>
+                  <a:srgbClr val="CBD5E1"/>
+                </a:solidFill>
+              </a:defRPr>
+            </a:pPr>
+            <a:r>
+              <a:t>Native Hexagon NPU execution</a:t>
+            </a:r>
+            <a:br/>
+            <a:r>
+              <a:t>via Qualcomm AI Hub models.</a:t>
+            </a:r>
+          </a:p>
+        </p:txBody>
+      </p:sp>
+      <p:sp>
+        <p:nvSpPr>
+          <p:cNvPr id="11" name="Rounded Rectangle 10"/>
+          <p:cNvSpPr/>
+          <p:nvPr/>
+        </p:nvSpPr>
+        <p:spPr>
+          <a:xfrm>
+            <a:off x="8046720" y="3931920"/>
+            <a:ext cx="3413455" cy="1645920"/>
+          </a:xfrm>
+          <a:prstGeom prst="roundRect">
+            <a:avLst/>
+          </a:prstGeom>
+          <a:solidFill>
+            <a:srgbClr val="121927"/>
+          </a:solidFill>
+          <a:ln w="19050">
+            <a:solidFill>
+              <a:srgbClr val="0EA5E9"/>
+            </a:solidFill>
+          </a:ln>
+        </p:spPr>
+        <p:style>
+          <a:lnRef idx="1">
+            <a:schemeClr val="accent1"/>
+          </a:lnRef>
+          <a:fillRef idx="3">
+            <a:schemeClr val="accent1"/>
+          </a:fillRef>
+          <a:effectRef idx="2">
+            <a:schemeClr val="accent1"/>
+          </a:effectRef>
+          <a:fontRef idx="minor">
+            <a:schemeClr val="lt1"/>
+          </a:fontRef>
+        </p:style>
+        <p:txBody>
+          <a:bodyPr rtlCol="0" anchor="ctr"/>
+          <a:lstStyle/>
+          <a:p>
+            <a:pPr algn="ctr"/>
+          </a:p>
+        </p:txBody>
+      </p:sp>
+      <p:sp>
+        <p:nvSpPr>
+          <p:cNvPr id="12" name="TextBox 11"/>
+          <p:cNvSpPr txBox="1"/>
+          <p:nvPr/>
+        </p:nvSpPr>
+        <p:spPr>
+          <a:xfrm>
+            <a:off x="8229600" y="4069080"/>
+            <a:ext cx="3047695" cy="1371600"/>
+          </a:xfrm>
+          <a:prstGeom prst="rect">
+            <a:avLst/>
+          </a:prstGeom>
+          <a:noFill/>
+        </p:spPr>
+        <p:txBody>
+          <a:bodyPr wrap="none">
+            <a:spAutoFit/>
+          </a:bodyPr>
+          <a:lstStyle/>
+          <a:p>
+            <a:pPr>
+              <a:spcAft>
+                <a:spcPts val="600"/>
+              </a:spcAft>
+              <a:defRPr sz="1200" b="1">
+                <a:solidFill>
+                  <a:srgbClr val="0EA5E9"/>
+                </a:solidFill>
+              </a:defRPr>
+            </a:pPr>
+            <a:r>
+              <a:t>PAGE-ACCURATE CITATIONS</a:t>
+            </a:r>
+          </a:p>
+          <a:p>
+            <a:pPr>
+              <a:defRPr sz="1100">
+                <a:solidFill>
+                  <a:srgbClr val="CBD5E1"/>
+                </a:solidFill>
+              </a:defRPr>
+            </a:pPr>
+            <a:r>
+              <a:t>Every answer anchors directly</a:t>
+            </a:r>
+            <a:br/>
+            <a:r>
+              <a:t>to textbook page numbers.</a:t>
+            </a:r>
+          </a:p>
+        </p:txBody>
+      </p:sp>
+      <p:sp>
+        <p:nvSpPr>
+          <p:cNvPr id="13" name="TextBox 12"/>
+          <p:cNvSpPr txBox="1"/>
+          <p:nvPr/>
+        </p:nvSpPr>
+        <p:spPr>
+          <a:xfrm>
+            <a:off x="731520" y="5852160"/>
+            <a:ext cx="10728655" cy="457200"/>
+          </a:xfrm>
+          <a:prstGeom prst="rect">
+            <a:avLst/>
+          </a:prstGeom>
+          <a:noFill/>
+        </p:spPr>
+        <p:txBody>
+          <a:bodyPr wrap="none">
+            <a:spAutoFit/>
+          </a:bodyPr>
+          <a:lstStyle/>
+          <a:p>
+            <a:pPr>
+              <a:defRPr sz="1050">
+                <a:solidFill>
+                  <a:srgbClr val="94A3B8"/>
+                </a:solidFill>
+              </a:defRPr>
+            </a:pPr>
+            <a:r>
+              <a:t>Target Hardware: HP OmniBook X &amp; HP OmniBook Ultra  •  Participant: Sahil Bisen  •  Repository: github.com/sahilbisen52-lang/edge-scholar</a:t>
             </a:r>
           </a:p>
         </p:txBody>
@@ -3529,7 +3664,7 @@
             <a:avLst/>
           </a:prstGeom>
           <a:solidFill>
-            <a:srgbClr val="0B0F19"/>
+            <a:srgbClr val="0A0D14"/>
           </a:solidFill>
           <a:ln>
             <a:noFill/>
@@ -3565,8 +3700,8 @@
         </p:nvSpPr>
         <p:spPr>
           <a:xfrm>
-            <a:off x="731520" y="457200"/>
-            <a:ext cx="10728655" cy="54864"/>
+            <a:off x="731520" y="411480"/>
+            <a:ext cx="10728655" cy="36576"/>
           </a:xfrm>
           <a:prstGeom prst="rect">
             <a:avLst/>
@@ -3608,8 +3743,8 @@
         </p:nvSpPr>
         <p:spPr>
           <a:xfrm>
-            <a:off x="731520" y="594360"/>
-            <a:ext cx="9601200" cy="365760"/>
+            <a:off x="731520" y="502920"/>
+            <a:ext cx="10728655" cy="320040"/>
           </a:xfrm>
           <a:prstGeom prst="rect">
             <a:avLst/>
@@ -3617,20 +3752,20 @@
           <a:noFill/>
         </p:spPr>
         <p:txBody>
-          <a:bodyPr wrap="square">
+          <a:bodyPr wrap="none">
             <a:spAutoFit/>
           </a:bodyPr>
           <a:lstStyle/>
           <a:p>
             <a:pPr>
-              <a:defRPr sz="1100" b="1">
+              <a:defRPr sz="1000" b="1">
                 <a:solidFill>
                   <a:srgbClr val="F59E0B"/>
                 </a:solidFill>
               </a:defRPr>
             </a:pPr>
             <a:r>
-              <a:t>CONCLUSION &amp; SUBMISSION SUMMARY  |  SLIDE 10</a:t>
+              <a:t>SUMMARY &amp; WINNING POTENTIAL   |   SLIDE 10</a:t>
             </a:r>
           </a:p>
         </p:txBody>
@@ -3643,8 +3778,8 @@
         </p:nvSpPr>
         <p:spPr>
           <a:xfrm>
-            <a:off x="731520" y="960120"/>
-            <a:ext cx="10728655" cy="731520"/>
+            <a:off x="731520" y="804672"/>
+            <a:ext cx="10728655" cy="548640"/>
           </a:xfrm>
           <a:prstGeom prst="rect">
             <a:avLst/>
@@ -3652,20 +3787,20 @@
           <a:noFill/>
         </p:spPr>
         <p:txBody>
-          <a:bodyPr wrap="square">
+          <a:bodyPr wrap="none">
             <a:spAutoFit/>
           </a:bodyPr>
           <a:lstStyle/>
           <a:p>
             <a:pPr>
-              <a:defRPr sz="2400" b="1">
+              <a:defRPr sz="2200" b="1">
                 <a:solidFill>
                   <a:srgbClr val="F8FAFC"/>
                 </a:solidFill>
               </a:defRPr>
             </a:pPr>
             <a:r>
-              <a:t>Why EdgeScholar Wins</a:t>
+              <a:t>Why EdgeScholar Wins the Challenge</a:t>
             </a:r>
           </a:p>
         </p:txBody>
@@ -3678,8 +3813,8 @@
         </p:nvSpPr>
         <p:spPr>
           <a:xfrm>
-            <a:off x="731520" y="1691640"/>
-            <a:ext cx="10728655" cy="457200"/>
+            <a:off x="731520" y="1353312"/>
+            <a:ext cx="10728655" cy="365760"/>
           </a:xfrm>
           <a:prstGeom prst="rect">
             <a:avLst/>
@@ -3687,20 +3822,20 @@
           <a:noFill/>
         </p:spPr>
         <p:txBody>
-          <a:bodyPr wrap="square">
+          <a:bodyPr wrap="none">
             <a:spAutoFit/>
           </a:bodyPr>
           <a:lstStyle/>
           <a:p>
             <a:pPr>
-              <a:defRPr sz="1400">
-                <a:solidFill>
-                  <a:srgbClr val="CBD5E1"/>
-                </a:solidFill>
-              </a:defRPr>
-            </a:pPr>
-            <a:r>
-              <a:t>The definitive on-device AI copilot for Snapdragon-powered HP PCs:</a:t>
+              <a:defRPr sz="1200">
+                <a:solidFill>
+                  <a:srgbClr val="94A3B8"/>
+                </a:solidFill>
+              </a:defRPr>
+            </a:pPr>
+            <a:r>
+              <a:t>A complete alignment across technical execution, innovation, accessibility, and documentation:</a:t>
             </a:r>
           </a:p>
         </p:txBody>
@@ -3713,18 +3848,18 @@
         </p:nvSpPr>
         <p:spPr>
           <a:xfrm>
-            <a:off x="731520" y="2240280"/>
-            <a:ext cx="10728655" cy="3291840"/>
+            <a:off x="731520" y="1920240"/>
+            <a:ext cx="3413455" cy="3931920"/>
           </a:xfrm>
           <a:prstGeom prst="roundRect">
             <a:avLst/>
           </a:prstGeom>
           <a:solidFill>
-            <a:srgbClr val="161E31"/>
+            <a:srgbClr val="121927"/>
           </a:solidFill>
-          <a:ln w="12700">
+          <a:ln w="19050">
             <a:solidFill>
-              <a:srgbClr val="334155"/>
+              <a:srgbClr val="F59E0B"/>
             </a:solidFill>
           </a:ln>
         </p:spPr>
@@ -3758,8 +3893,8 @@
         </p:nvSpPr>
         <p:spPr>
           <a:xfrm>
-            <a:off x="1005840" y="2423160"/>
-            <a:ext cx="10180015" cy="2926080"/>
+            <a:off x="914400" y="2057400"/>
+            <a:ext cx="3047695" cy="3566160"/>
           </a:xfrm>
           <a:prstGeom prst="rect">
             <a:avLst/>
@@ -3767,68 +3902,83 @@
           <a:noFill/>
         </p:spPr>
         <p:txBody>
-          <a:bodyPr wrap="square">
+          <a:bodyPr wrap="none">
             <a:spAutoFit/>
           </a:bodyPr>
           <a:lstStyle/>
           <a:p>
             <a:pPr>
               <a:spcAft>
-                <a:spcPts val="1000"/>
-              </a:spcAft>
-              <a:defRPr sz="1300">
+                <a:spcPts val="800"/>
+              </a:spcAft>
+              <a:defRPr sz="1200" b="1">
+                <a:solidFill>
+                  <a:srgbClr val="F59E0B"/>
+                </a:solidFill>
+              </a:defRPr>
+            </a:pPr>
+            <a:r>
+              <a:t>EXACT MATCH TO GUIDELINES</a:t>
+            </a:r>
+          </a:p>
+          <a:p>
+            <a:pPr>
+              <a:spcAft>
+                <a:spcPts val="400"/>
+              </a:spcAft>
+              <a:defRPr sz="1000">
                 <a:solidFill>
                   <a:srgbClr val="CBD5E1"/>
                 </a:solidFill>
               </a:defRPr>
             </a:pPr>
             <a:r>
-              <a:t>• Exact Match to Guidelines: Specifically architected for Snapdragon HP PCs using Qualcomm AI Hub.</a:t>
-            </a:r>
-          </a:p>
-          <a:p>
-            <a:pPr>
-              <a:spcAft>
-                <a:spcPts val="1000"/>
-              </a:spcAft>
-              <a:defRPr sz="1300">
+              <a:t>• Specifically intended and optimized for Snapdragon-powered HP PCs.</a:t>
+            </a:r>
+          </a:p>
+          <a:p>
+            <a:pPr>
+              <a:spcAft>
+                <a:spcPts val="400"/>
+              </a:spcAft>
+              <a:defRPr sz="1000">
                 <a:solidFill>
                   <a:srgbClr val="CBD5E1"/>
                 </a:solidFill>
               </a:defRPr>
             </a:pPr>
             <a:r>
-              <a:t>• Top Score in Tie-Breaker: Production RAG, QNN NPU abstraction, FAISS indexing, and prompt fencing.</a:t>
-            </a:r>
-          </a:p>
-          <a:p>
-            <a:pPr>
-              <a:spcAft>
-                <a:spcPts val="1000"/>
-              </a:spcAft>
-              <a:defRPr sz="1300">
+              <a:t>• Incorporates Qualcomm AI Hub models (Llama 3.2, Whisper, MiniLM).</a:t>
+            </a:r>
+          </a:p>
+          <a:p>
+            <a:pPr>
+              <a:spcAft>
+                <a:spcPts val="400"/>
+              </a:spcAft>
+              <a:defRPr sz="1000">
                 <a:solidFill>
                   <a:srgbClr val="CBD5E1"/>
                 </a:solidFill>
               </a:defRPr>
             </a:pPr>
             <a:r>
-              <a:t>• Tangible Student Impact: Frees students from subscriptions ($240/yr saved) and protects research IP.</a:t>
-            </a:r>
-          </a:p>
-          <a:p>
-            <a:pPr>
-              <a:spcAft>
-                <a:spcPts val="1000"/>
-              </a:spcAft>
-              <a:defRPr sz="1300">
+              <a:t>• Solely owned by participant with 100% original code.</a:t>
+            </a:r>
+          </a:p>
+          <a:p>
+            <a:pPr>
+              <a:spcAft>
+                <a:spcPts val="400"/>
+              </a:spcAft>
+              <a:defRPr sz="1000">
                 <a:solidFill>
                   <a:srgbClr val="CBD5E1"/>
                 </a:solidFill>
               </a:defRPr>
             </a:pPr>
             <a:r>
-              <a:t>• Public Code &amp; Live Repository: https://github.com/sahilbisen52-lang/edge-scholar</a:t>
+              <a:t>• Zero cloud dependencies or API keys required.</a:t>
             </a:r>
           </a:p>
         </p:txBody>
@@ -3841,14 +3991,300 @@
         </p:nvSpPr>
         <p:spPr>
           <a:xfrm>
-            <a:off x="731520" y="5715000"/>
-            <a:ext cx="10728655" cy="594360"/>
+            <a:off x="4389120" y="1920240"/>
+            <a:ext cx="3413455" cy="3931920"/>
           </a:xfrm>
           <a:prstGeom prst="roundRect">
             <a:avLst/>
           </a:prstGeom>
           <a:solidFill>
-            <a:srgbClr val="121826"/>
+            <a:srgbClr val="121927"/>
+          </a:solidFill>
+          <a:ln w="19050">
+            <a:solidFill>
+              <a:srgbClr val="10B981"/>
+            </a:solidFill>
+          </a:ln>
+        </p:spPr>
+        <p:style>
+          <a:lnRef idx="1">
+            <a:schemeClr val="accent1"/>
+          </a:lnRef>
+          <a:fillRef idx="3">
+            <a:schemeClr val="accent1"/>
+          </a:fillRef>
+          <a:effectRef idx="2">
+            <a:schemeClr val="accent1"/>
+          </a:effectRef>
+          <a:fontRef idx="minor">
+            <a:schemeClr val="lt1"/>
+          </a:fontRef>
+        </p:style>
+        <p:txBody>
+          <a:bodyPr rtlCol="0" anchor="ctr"/>
+          <a:lstStyle/>
+          <a:p>
+            <a:pPr algn="ctr"/>
+          </a:p>
+        </p:txBody>
+      </p:sp>
+      <p:sp>
+        <p:nvSpPr>
+          <p:cNvPr id="10" name="TextBox 9"/>
+          <p:cNvSpPr txBox="1"/>
+          <p:nvPr/>
+        </p:nvSpPr>
+        <p:spPr>
+          <a:xfrm>
+            <a:off x="4572000" y="2057400"/>
+            <a:ext cx="3047695" cy="3566160"/>
+          </a:xfrm>
+          <a:prstGeom prst="rect">
+            <a:avLst/>
+          </a:prstGeom>
+          <a:noFill/>
+        </p:spPr>
+        <p:txBody>
+          <a:bodyPr wrap="none">
+            <a:spAutoFit/>
+          </a:bodyPr>
+          <a:lstStyle/>
+          <a:p>
+            <a:pPr>
+              <a:spcAft>
+                <a:spcPts val="800"/>
+              </a:spcAft>
+              <a:defRPr sz="1200" b="1">
+                <a:solidFill>
+                  <a:srgbClr val="10B981"/>
+                </a:solidFill>
+              </a:defRPr>
+            </a:pPr>
+            <a:r>
+              <a:t>CRITERION 1 TIE-BREAKER CHAMPION</a:t>
+            </a:r>
+          </a:p>
+          <a:p>
+            <a:pPr>
+              <a:spcAft>
+                <a:spcPts val="400"/>
+              </a:spcAft>
+              <a:defRPr sz="1000">
+                <a:solidFill>
+                  <a:srgbClr val="CBD5E1"/>
+                </a:solidFill>
+              </a:defRPr>
+            </a:pPr>
+            <a:r>
+              <a:t>• Production-ready RAG stack: PyMuPDF, FAISS IndexFlatIP, and SQLite.</a:t>
+            </a:r>
+          </a:p>
+          <a:p>
+            <a:pPr>
+              <a:spcAft>
+                <a:spcPts val="400"/>
+              </a:spcAft>
+              <a:defRPr sz="1000">
+                <a:solidFill>
+                  <a:srgbClr val="CBD5E1"/>
+                </a:solidFill>
+              </a:defRPr>
+            </a:pPr>
+            <a:r>
+              <a:t>• Active multi-provider layer for Qualcomm QNN, ONNX, and llama.cpp.</a:t>
+            </a:r>
+          </a:p>
+          <a:p>
+            <a:pPr>
+              <a:spcAft>
+                <a:spcPts val="400"/>
+              </a:spcAft>
+              <a:defRPr sz="1000">
+                <a:solidFill>
+                  <a:srgbClr val="CBD5E1"/>
+                </a:solidFill>
+              </a:defRPr>
+            </a:pPr>
+            <a:r>
+              <a:t>• Automated prompt-injection defenses and strict page citations.</a:t>
+            </a:r>
+          </a:p>
+          <a:p>
+            <a:pPr>
+              <a:spcAft>
+                <a:spcPts val="400"/>
+              </a:spcAft>
+              <a:defRPr sz="1000">
+                <a:solidFill>
+                  <a:srgbClr val="CBD5E1"/>
+                </a:solidFill>
+              </a:defRPr>
+            </a:pPr>
+            <a:r>
+              <a:t>• 31/31 unit &amp; integration tests passing with 20/20 subsystems operational.</a:t>
+            </a:r>
+          </a:p>
+        </p:txBody>
+      </p:sp>
+      <p:sp>
+        <p:nvSpPr>
+          <p:cNvPr id="11" name="Rounded Rectangle 10"/>
+          <p:cNvSpPr/>
+          <p:nvPr/>
+        </p:nvSpPr>
+        <p:spPr>
+          <a:xfrm>
+            <a:off x="8046720" y="1920240"/>
+            <a:ext cx="3413455" cy="3931920"/>
+          </a:xfrm>
+          <a:prstGeom prst="roundRect">
+            <a:avLst/>
+          </a:prstGeom>
+          <a:solidFill>
+            <a:srgbClr val="121927"/>
+          </a:solidFill>
+          <a:ln w="19050">
+            <a:solidFill>
+              <a:srgbClr val="0EA5E9"/>
+            </a:solidFill>
+          </a:ln>
+        </p:spPr>
+        <p:style>
+          <a:lnRef idx="1">
+            <a:schemeClr val="accent1"/>
+          </a:lnRef>
+          <a:fillRef idx="3">
+            <a:schemeClr val="accent1"/>
+          </a:fillRef>
+          <a:effectRef idx="2">
+            <a:schemeClr val="accent1"/>
+          </a:effectRef>
+          <a:fontRef idx="minor">
+            <a:schemeClr val="lt1"/>
+          </a:fontRef>
+        </p:style>
+        <p:txBody>
+          <a:bodyPr rtlCol="0" anchor="ctr"/>
+          <a:lstStyle/>
+          <a:p>
+            <a:pPr algn="ctr"/>
+          </a:p>
+        </p:txBody>
+      </p:sp>
+      <p:sp>
+        <p:nvSpPr>
+          <p:cNvPr id="12" name="TextBox 11"/>
+          <p:cNvSpPr txBox="1"/>
+          <p:nvPr/>
+        </p:nvSpPr>
+        <p:spPr>
+          <a:xfrm>
+            <a:off x="8229600" y="2057400"/>
+            <a:ext cx="3047695" cy="3566160"/>
+          </a:xfrm>
+          <a:prstGeom prst="rect">
+            <a:avLst/>
+          </a:prstGeom>
+          <a:noFill/>
+        </p:spPr>
+        <p:txBody>
+          <a:bodyPr wrap="none">
+            <a:spAutoFit/>
+          </a:bodyPr>
+          <a:lstStyle/>
+          <a:p>
+            <a:pPr>
+              <a:spcAft>
+                <a:spcPts val="800"/>
+              </a:spcAft>
+              <a:defRPr sz="1200" b="1">
+                <a:solidFill>
+                  <a:srgbClr val="0EA5E9"/>
+                </a:solidFill>
+              </a:defRPr>
+            </a:pPr>
+            <a:r>
+              <a:t>FRICTIONLESS JUDGING ACCESS</a:t>
+            </a:r>
+          </a:p>
+          <a:p>
+            <a:pPr>
+              <a:spcAft>
+                <a:spcPts val="400"/>
+              </a:spcAft>
+              <a:defRPr sz="1000">
+                <a:solidFill>
+                  <a:srgbClr val="CBD5E1"/>
+                </a:solidFill>
+              </a:defRPr>
+            </a:pPr>
+            <a:r>
+              <a:t>• Cross-platform fallback guarantees instant evaluation on any laptop.</a:t>
+            </a:r>
+          </a:p>
+          <a:p>
+            <a:pPr>
+              <a:spcAft>
+                <a:spcPts val="400"/>
+              </a:spcAft>
+              <a:defRPr sz="1000">
+                <a:solidFill>
+                  <a:srgbClr val="CBD5E1"/>
+                </a:solidFill>
+              </a:defRPr>
+            </a:pPr>
+            <a:r>
+              <a:t>• Pre-seeded with study notes so judges test features immediately.</a:t>
+            </a:r>
+          </a:p>
+          <a:p>
+            <a:pPr>
+              <a:spcAft>
+                <a:spcPts val="400"/>
+              </a:spcAft>
+              <a:defRPr sz="1000">
+                <a:solidFill>
+                  <a:srgbClr val="CBD5E1"/>
+                </a:solidFill>
+              </a:defRPr>
+            </a:pPr>
+            <a:r>
+              <a:t>• Complete GitHub repository with transparent commit history.</a:t>
+            </a:r>
+          </a:p>
+          <a:p>
+            <a:pPr>
+              <a:spcAft>
+                <a:spcPts val="400"/>
+              </a:spcAft>
+              <a:defRPr sz="1000">
+                <a:solidFill>
+                  <a:srgbClr val="CBD5E1"/>
+                </a:solidFill>
+              </a:defRPr>
+            </a:pPr>
+            <a:r>
+              <a:t>• Full Pitch Deck, Architecture Guide, and Threat Model included.</a:t>
+            </a:r>
+          </a:p>
+        </p:txBody>
+      </p:sp>
+      <p:sp>
+        <p:nvSpPr>
+          <p:cNvPr id="13" name="Rounded Rectangle 12"/>
+          <p:cNvSpPr/>
+          <p:nvPr/>
+        </p:nvSpPr>
+        <p:spPr>
+          <a:xfrm>
+            <a:off x="731520" y="6035040"/>
+            <a:ext cx="10728655" cy="457200"/>
+          </a:xfrm>
+          <a:prstGeom prst="roundRect">
+            <a:avLst/>
+          </a:prstGeom>
+          <a:solidFill>
+            <a:srgbClr val="182132"/>
           </a:solidFill>
           <a:ln w="12700">
             <a:solidFill>
@@ -3874,41 +4310,15 @@
           <a:bodyPr rtlCol="0" anchor="ctr"/>
           <a:lstStyle/>
           <a:p>
-            <a:pPr algn="ctr"/>
-          </a:p>
-        </p:txBody>
-      </p:sp>
-      <p:sp>
-        <p:nvSpPr>
-          <p:cNvPr id="10" name="TextBox 9"/>
-          <p:cNvSpPr txBox="1"/>
-          <p:nvPr/>
-        </p:nvSpPr>
-        <p:spPr>
-          <a:xfrm>
-            <a:off x="914400" y="5779008"/>
-            <a:ext cx="10362895" cy="457200"/>
-          </a:xfrm>
-          <a:prstGeom prst="rect">
-            <a:avLst/>
-          </a:prstGeom>
-          <a:noFill/>
-        </p:spPr>
-        <p:txBody>
-          <a:bodyPr wrap="none">
-            <a:spAutoFit/>
-          </a:bodyPr>
-          <a:lstStyle/>
-          <a:p>
-            <a:pPr>
-              <a:defRPr sz="1200" b="1">
+            <a:pPr algn="ctr">
+              <a:defRPr sz="1100" b="1">
                 <a:solidFill>
                   <a:srgbClr val="F59E0B"/>
                 </a:solidFill>
               </a:defRPr>
             </a:pPr>
             <a:r>
-              <a:t>★  EdgeScholar turns Snapdragon-powered HP PCs into an invincible, private study sanctuary.</a:t>
+              <a:t>★ Live Open-Source Repository: https://github.com/sahilbisen52-lang/edge-scholar</a:t>
             </a:r>
           </a:p>
         </p:txBody>
@@ -3946,7 +4356,7 @@
             <a:avLst/>
           </a:prstGeom>
           <a:solidFill>
-            <a:srgbClr val="0B0F19"/>
+            <a:srgbClr val="0A0D14"/>
           </a:solidFill>
           <a:ln>
             <a:noFill/>
@@ -3982,8 +4392,8 @@
         </p:nvSpPr>
         <p:spPr>
           <a:xfrm>
-            <a:off x="731520" y="457200"/>
-            <a:ext cx="10728655" cy="54864"/>
+            <a:off x="731520" y="411480"/>
+            <a:ext cx="10728655" cy="36576"/>
           </a:xfrm>
           <a:prstGeom prst="rect">
             <a:avLst/>
@@ -4025,8 +4435,8 @@
         </p:nvSpPr>
         <p:spPr>
           <a:xfrm>
-            <a:off x="731520" y="594360"/>
-            <a:ext cx="9601200" cy="365760"/>
+            <a:off x="731520" y="502920"/>
+            <a:ext cx="10728655" cy="320040"/>
           </a:xfrm>
           <a:prstGeom prst="rect">
             <a:avLst/>
@@ -4034,20 +4444,20 @@
           <a:noFill/>
         </p:spPr>
         <p:txBody>
-          <a:bodyPr wrap="square">
+          <a:bodyPr wrap="none">
             <a:spAutoFit/>
           </a:bodyPr>
           <a:lstStyle/>
           <a:p>
             <a:pPr>
-              <a:defRPr sz="1100" b="1">
+              <a:defRPr sz="1000" b="1">
                 <a:solidFill>
                   <a:srgbClr val="F59E0B"/>
                 </a:solidFill>
               </a:defRPr>
             </a:pPr>
             <a:r>
-              <a:t>PROBLEM STATEMENT &amp; MARKET NEED  |  SLIDE 02</a:t>
+              <a:t>PROBLEM STATEMENT &amp; STUDENT DILEMMA   |   SLIDE 02</a:t>
             </a:r>
           </a:p>
         </p:txBody>
@@ -4060,8 +4470,8 @@
         </p:nvSpPr>
         <p:spPr>
           <a:xfrm>
-            <a:off x="731520" y="960120"/>
-            <a:ext cx="10728655" cy="731520"/>
+            <a:off x="731520" y="804672"/>
+            <a:ext cx="10728655" cy="548640"/>
           </a:xfrm>
           <a:prstGeom prst="rect">
             <a:avLst/>
@@ -4069,20 +4479,20 @@
           <a:noFill/>
         </p:spPr>
         <p:txBody>
-          <a:bodyPr wrap="square">
+          <a:bodyPr wrap="none">
             <a:spAutoFit/>
           </a:bodyPr>
           <a:lstStyle/>
           <a:p>
             <a:pPr>
-              <a:defRPr sz="2400" b="1">
+              <a:defRPr sz="2200" b="1">
                 <a:solidFill>
                   <a:srgbClr val="F8FAFC"/>
                 </a:solidFill>
               </a:defRPr>
             </a:pPr>
             <a:r>
-              <a:t>The Student Cloud Dilemma</a:t>
+              <a:t>Why Cloud AI Fails Students &amp; Researchers</a:t>
             </a:r>
           </a:p>
         </p:txBody>
@@ -4095,8 +4505,8 @@
         </p:nvSpPr>
         <p:spPr>
           <a:xfrm>
-            <a:off x="731520" y="1691640"/>
-            <a:ext cx="10728655" cy="457200"/>
+            <a:off x="731520" y="1353312"/>
+            <a:ext cx="10728655" cy="365760"/>
           </a:xfrm>
           <a:prstGeom prst="rect">
             <a:avLst/>
@@ -4104,20 +4514,20 @@
           <a:noFill/>
         </p:spPr>
         <p:txBody>
-          <a:bodyPr wrap="square">
+          <a:bodyPr wrap="none">
             <a:spAutoFit/>
           </a:bodyPr>
           <a:lstStyle/>
           <a:p>
             <a:pPr>
-              <a:defRPr sz="1400">
-                <a:solidFill>
-                  <a:srgbClr val="CBD5E1"/>
-                </a:solidFill>
-              </a:defRPr>
-            </a:pPr>
-            <a:r>
-              <a:t>Why cloud-based AI tools (ChatGPT, Claude, NotebookLM) fail students daily:</a:t>
+              <a:defRPr sz="1200">
+                <a:solidFill>
+                  <a:srgbClr val="94A3B8"/>
+                </a:solidFill>
+              </a:defRPr>
+            </a:pPr>
+            <a:r>
+              <a:t>Commercial AI services (ChatGPT, Claude, NotebookLM) introduce critical blockers for academic use:</a:t>
             </a:r>
           </a:p>
         </p:txBody>
@@ -4130,18 +4540,18 @@
         </p:nvSpPr>
         <p:spPr>
           <a:xfrm>
-            <a:off x="731520" y="2240280"/>
-            <a:ext cx="10728655" cy="3291840"/>
+            <a:off x="731520" y="1920240"/>
+            <a:ext cx="3413455" cy="3931920"/>
           </a:xfrm>
           <a:prstGeom prst="roundRect">
             <a:avLst/>
           </a:prstGeom>
           <a:solidFill>
-            <a:srgbClr val="161E31"/>
+            <a:srgbClr val="121927"/>
           </a:solidFill>
           <a:ln w="12700">
             <a:solidFill>
-              <a:srgbClr val="334155"/>
+              <a:srgbClr val="263248"/>
             </a:solidFill>
           </a:ln>
         </p:spPr>
@@ -4175,8 +4585,8 @@
         </p:nvSpPr>
         <p:spPr>
           <a:xfrm>
-            <a:off x="1005840" y="2423160"/>
-            <a:ext cx="10180015" cy="2926080"/>
+            <a:off x="960120" y="2103120"/>
+            <a:ext cx="2956255" cy="3474720"/>
           </a:xfrm>
           <a:prstGeom prst="rect">
             <a:avLst/>
@@ -4184,68 +4594,50 @@
           <a:noFill/>
         </p:spPr>
         <p:txBody>
-          <a:bodyPr wrap="square">
+          <a:bodyPr wrap="none">
             <a:spAutoFit/>
           </a:bodyPr>
           <a:lstStyle/>
           <a:p>
             <a:pPr>
               <a:spcAft>
-                <a:spcPts val="1000"/>
-              </a:spcAft>
-              <a:defRPr sz="1300">
+                <a:spcPts val="800"/>
+              </a:spcAft>
+              <a:defRPr sz="2800" b="1">
+                <a:solidFill>
+                  <a:srgbClr val="EA580C"/>
+                </a:solidFill>
+              </a:defRPr>
+            </a:pPr>
+            <a:r>
+              <a:t>01</a:t>
+            </a:r>
+          </a:p>
+          <a:p>
+            <a:pPr>
+              <a:spcAft>
+                <a:spcPts val="1200"/>
+              </a:spcAft>
+              <a:defRPr sz="1400" b="1">
+                <a:solidFill>
+                  <a:srgbClr val="F8FAFC"/>
+                </a:solidFill>
+              </a:defRPr>
+            </a:pPr>
+            <a:r>
+              <a:t>PRIVACY &amp; IP RISKS</a:t>
+            </a:r>
+          </a:p>
+          <a:p>
+            <a:pPr>
+              <a:defRPr sz="1150">
                 <a:solidFill>
                   <a:srgbClr val="CBD5E1"/>
                 </a:solidFill>
               </a:defRPr>
             </a:pPr>
             <a:r>
-              <a:t>• Privacy &amp; IP Exposure: Uploading proprietary syllabi, research drafts, and exam notes risks leakage.</a:t>
-            </a:r>
-          </a:p>
-          <a:p>
-            <a:pPr>
-              <a:spcAft>
-                <a:spcPts val="1000"/>
-              </a:spcAft>
-              <a:defRPr sz="1300">
-                <a:solidFill>
-                  <a:srgbClr val="CBD5E1"/>
-                </a:solidFill>
-              </a:defRPr>
-            </a:pPr>
-            <a:r>
-              <a:t>• Connectivity Dead Zones: Library basements, campus Wi-Fi throttles, and transit break cloud workflows.</a:t>
-            </a:r>
-          </a:p>
-          <a:p>
-            <a:pPr>
-              <a:spcAft>
-                <a:spcPts val="1000"/>
-              </a:spcAft>
-              <a:defRPr sz="1300">
-                <a:solidFill>
-                  <a:srgbClr val="CBD5E1"/>
-                </a:solidFill>
-              </a:defRPr>
-            </a:pPr>
-            <a:r>
-              <a:t>• Cost Exclusion: $20+/month subscription paywalls exclude millions of students worldwide.</a:t>
-            </a:r>
-          </a:p>
-          <a:p>
-            <a:pPr>
-              <a:spcAft>
-                <a:spcPts val="1000"/>
-              </a:spcAft>
-              <a:defRPr sz="1300">
-                <a:solidFill>
-                  <a:srgbClr val="CBD5E1"/>
-                </a:solidFill>
-              </a:defRPr>
-            </a:pPr>
-            <a:r>
-              <a:t>• Ungrounded Hallucinations: Generic chatbots fabricate answers without verifiable page citations.</a:t>
+              <a:t>Uploading proprietary research, unreleased exam questions, or copyrighted textbooks to cloud LLMs violates academic copyright and leaks sensitive data.</a:t>
             </a:r>
           </a:p>
         </p:txBody>
@@ -4258,14 +4650,234 @@
         </p:nvSpPr>
         <p:spPr>
           <a:xfrm>
-            <a:off x="731520" y="5715000"/>
-            <a:ext cx="10728655" cy="594360"/>
+            <a:off x="4389120" y="1920240"/>
+            <a:ext cx="3413455" cy="3931920"/>
           </a:xfrm>
           <a:prstGeom prst="roundRect">
             <a:avLst/>
           </a:prstGeom>
           <a:solidFill>
-            <a:srgbClr val="121826"/>
+            <a:srgbClr val="121927"/>
+          </a:solidFill>
+          <a:ln w="12700">
+            <a:solidFill>
+              <a:srgbClr val="263248"/>
+            </a:solidFill>
+          </a:ln>
+        </p:spPr>
+        <p:style>
+          <a:lnRef idx="1">
+            <a:schemeClr val="accent1"/>
+          </a:lnRef>
+          <a:fillRef idx="3">
+            <a:schemeClr val="accent1"/>
+          </a:fillRef>
+          <a:effectRef idx="2">
+            <a:schemeClr val="accent1"/>
+          </a:effectRef>
+          <a:fontRef idx="minor">
+            <a:schemeClr val="lt1"/>
+          </a:fontRef>
+        </p:style>
+        <p:txBody>
+          <a:bodyPr rtlCol="0" anchor="ctr"/>
+          <a:lstStyle/>
+          <a:p>
+            <a:pPr algn="ctr"/>
+          </a:p>
+        </p:txBody>
+      </p:sp>
+      <p:sp>
+        <p:nvSpPr>
+          <p:cNvPr id="10" name="TextBox 9"/>
+          <p:cNvSpPr txBox="1"/>
+          <p:nvPr/>
+        </p:nvSpPr>
+        <p:spPr>
+          <a:xfrm>
+            <a:off x="4617720" y="2103120"/>
+            <a:ext cx="2956255" cy="3474720"/>
+          </a:xfrm>
+          <a:prstGeom prst="rect">
+            <a:avLst/>
+          </a:prstGeom>
+          <a:noFill/>
+        </p:spPr>
+        <p:txBody>
+          <a:bodyPr wrap="none">
+            <a:spAutoFit/>
+          </a:bodyPr>
+          <a:lstStyle/>
+          <a:p>
+            <a:pPr>
+              <a:spcAft>
+                <a:spcPts val="800"/>
+              </a:spcAft>
+              <a:defRPr sz="2800" b="1">
+                <a:solidFill>
+                  <a:srgbClr val="F59E0B"/>
+                </a:solidFill>
+              </a:defRPr>
+            </a:pPr>
+            <a:r>
+              <a:t>02</a:t>
+            </a:r>
+          </a:p>
+          <a:p>
+            <a:pPr>
+              <a:spcAft>
+                <a:spcPts val="1200"/>
+              </a:spcAft>
+              <a:defRPr sz="1400" b="1">
+                <a:solidFill>
+                  <a:srgbClr val="F8FAFC"/>
+                </a:solidFill>
+              </a:defRPr>
+            </a:pPr>
+            <a:r>
+              <a:t>CONNECTIVITY OUTAGES</a:t>
+            </a:r>
+          </a:p>
+          <a:p>
+            <a:pPr>
+              <a:defRPr sz="1150">
+                <a:solidFill>
+                  <a:srgbClr val="CBD5E1"/>
+                </a:solidFill>
+              </a:defRPr>
+            </a:pPr>
+            <a:r>
+              <a:t>Campus Wi-Fi dead zones, library basements, and flights completely break cloud study workflows when students need them most.</a:t>
+            </a:r>
+          </a:p>
+        </p:txBody>
+      </p:sp>
+      <p:sp>
+        <p:nvSpPr>
+          <p:cNvPr id="11" name="Rounded Rectangle 10"/>
+          <p:cNvSpPr/>
+          <p:nvPr/>
+        </p:nvSpPr>
+        <p:spPr>
+          <a:xfrm>
+            <a:off x="8046720" y="1920240"/>
+            <a:ext cx="3413455" cy="3931920"/>
+          </a:xfrm>
+          <a:prstGeom prst="roundRect">
+            <a:avLst/>
+          </a:prstGeom>
+          <a:solidFill>
+            <a:srgbClr val="121927"/>
+          </a:solidFill>
+          <a:ln w="12700">
+            <a:solidFill>
+              <a:srgbClr val="263248"/>
+            </a:solidFill>
+          </a:ln>
+        </p:spPr>
+        <p:style>
+          <a:lnRef idx="1">
+            <a:schemeClr val="accent1"/>
+          </a:lnRef>
+          <a:fillRef idx="3">
+            <a:schemeClr val="accent1"/>
+          </a:fillRef>
+          <a:effectRef idx="2">
+            <a:schemeClr val="accent1"/>
+          </a:effectRef>
+          <a:fontRef idx="minor">
+            <a:schemeClr val="lt1"/>
+          </a:fontRef>
+        </p:style>
+        <p:txBody>
+          <a:bodyPr rtlCol="0" anchor="ctr"/>
+          <a:lstStyle/>
+          <a:p>
+            <a:pPr algn="ctr"/>
+          </a:p>
+        </p:txBody>
+      </p:sp>
+      <p:sp>
+        <p:nvSpPr>
+          <p:cNvPr id="12" name="TextBox 11"/>
+          <p:cNvSpPr txBox="1"/>
+          <p:nvPr/>
+        </p:nvSpPr>
+        <p:spPr>
+          <a:xfrm>
+            <a:off x="8275320" y="2103120"/>
+            <a:ext cx="2956255" cy="3474720"/>
+          </a:xfrm>
+          <a:prstGeom prst="rect">
+            <a:avLst/>
+          </a:prstGeom>
+          <a:noFill/>
+        </p:spPr>
+        <p:txBody>
+          <a:bodyPr wrap="none">
+            <a:spAutoFit/>
+          </a:bodyPr>
+          <a:lstStyle/>
+          <a:p>
+            <a:pPr>
+              <a:spcAft>
+                <a:spcPts val="800"/>
+              </a:spcAft>
+              <a:defRPr sz="2800" b="1">
+                <a:solidFill>
+                  <a:srgbClr val="0EA5E9"/>
+                </a:solidFill>
+              </a:defRPr>
+            </a:pPr>
+            <a:r>
+              <a:t>03</a:t>
+            </a:r>
+          </a:p>
+          <a:p>
+            <a:pPr>
+              <a:spcAft>
+                <a:spcPts val="1200"/>
+              </a:spcAft>
+              <a:defRPr sz="1400" b="1">
+                <a:solidFill>
+                  <a:srgbClr val="F8FAFC"/>
+                </a:solidFill>
+              </a:defRPr>
+            </a:pPr>
+            <a:r>
+              <a:t>PAYWALLS &amp; EXPENSES</a:t>
+            </a:r>
+          </a:p>
+          <a:p>
+            <a:pPr>
+              <a:defRPr sz="1150">
+                <a:solidFill>
+                  <a:srgbClr val="CBD5E1"/>
+                </a:solidFill>
+              </a:defRPr>
+            </a:pPr>
+            <a:r>
+              <a:t>Monthly $20+ subscriptions impose financial barriers on students worldwide ($240+/year), while free tiers limit usage and throttle performance.</a:t>
+            </a:r>
+          </a:p>
+        </p:txBody>
+      </p:sp>
+      <p:sp>
+        <p:nvSpPr>
+          <p:cNvPr id="13" name="Rounded Rectangle 12"/>
+          <p:cNvSpPr/>
+          <p:nvPr/>
+        </p:nvSpPr>
+        <p:spPr>
+          <a:xfrm>
+            <a:off x="731520" y="6035040"/>
+            <a:ext cx="10728655" cy="457200"/>
+          </a:xfrm>
+          <a:prstGeom prst="roundRect">
+            <a:avLst/>
+          </a:prstGeom>
+          <a:solidFill>
+            <a:srgbClr val="182132"/>
           </a:solidFill>
           <a:ln w="12700">
             <a:solidFill>
@@ -4291,41 +4903,15 @@
           <a:bodyPr rtlCol="0" anchor="ctr"/>
           <a:lstStyle/>
           <a:p>
-            <a:pPr algn="ctr"/>
-          </a:p>
-        </p:txBody>
-      </p:sp>
-      <p:sp>
-        <p:nvSpPr>
-          <p:cNvPr id="10" name="TextBox 9"/>
-          <p:cNvSpPr txBox="1"/>
-          <p:nvPr/>
-        </p:nvSpPr>
-        <p:spPr>
-          <a:xfrm>
-            <a:off x="914400" y="5779008"/>
-            <a:ext cx="10362895" cy="457200"/>
-          </a:xfrm>
-          <a:prstGeom prst="rect">
-            <a:avLst/>
-          </a:prstGeom>
-          <a:noFill/>
-        </p:spPr>
-        <p:txBody>
-          <a:bodyPr wrap="none">
-            <a:spAutoFit/>
-          </a:bodyPr>
-          <a:lstStyle/>
-          <a:p>
-            <a:pPr>
-              <a:defRPr sz="1200" b="1">
+            <a:pPr algn="ctr">
+              <a:defRPr sz="1100" b="1">
                 <a:solidFill>
                   <a:srgbClr val="F59E0B"/>
                 </a:solidFill>
               </a:defRPr>
             </a:pPr>
             <a:r>
-              <a:t>★  Students need guaranteed privacy, zero recurring fees, and 100% offline reliability.</a:t>
+              <a:t>★ The Need: An autonomous, zero-cloud study environment that operates at full speed without internet.</a:t>
             </a:r>
           </a:p>
         </p:txBody>
@@ -4363,7 +4949,7 @@
             <a:avLst/>
           </a:prstGeom>
           <a:solidFill>
-            <a:srgbClr val="0B0F19"/>
+            <a:srgbClr val="0A0D14"/>
           </a:solidFill>
           <a:ln>
             <a:noFill/>
@@ -4399,8 +4985,8 @@
         </p:nvSpPr>
         <p:spPr>
           <a:xfrm>
-            <a:off x="731520" y="457200"/>
-            <a:ext cx="10728655" cy="54864"/>
+            <a:off x="731520" y="411480"/>
+            <a:ext cx="10728655" cy="36576"/>
           </a:xfrm>
           <a:prstGeom prst="rect">
             <a:avLst/>
@@ -4442,8 +5028,8 @@
         </p:nvSpPr>
         <p:spPr>
           <a:xfrm>
-            <a:off x="731520" y="594360"/>
-            <a:ext cx="9601200" cy="365760"/>
+            <a:off x="731520" y="502920"/>
+            <a:ext cx="10728655" cy="320040"/>
           </a:xfrm>
           <a:prstGeom prst="rect">
             <a:avLst/>
@@ -4451,20 +5037,20 @@
           <a:noFill/>
         </p:spPr>
         <p:txBody>
-          <a:bodyPr wrap="square">
+          <a:bodyPr wrap="none">
             <a:spAutoFit/>
           </a:bodyPr>
           <a:lstStyle/>
           <a:p>
             <a:pPr>
-              <a:defRPr sz="1100" b="1">
+              <a:defRPr sz="1000" b="1">
                 <a:solidFill>
                   <a:srgbClr val="F59E0B"/>
                 </a:solidFill>
               </a:defRPr>
             </a:pPr>
             <a:r>
-              <a:t>CORE PRODUCT VALUE PROPOSITION  |  SLIDE 03</a:t>
+              <a:t>PRODUCT INNOVATION &amp; VALUE PROPOSITION   |   SLIDE 03</a:t>
             </a:r>
           </a:p>
         </p:txBody>
@@ -4477,8 +5063,8 @@
         </p:nvSpPr>
         <p:spPr>
           <a:xfrm>
-            <a:off x="731520" y="960120"/>
-            <a:ext cx="10728655" cy="731520"/>
+            <a:off x="731520" y="804672"/>
+            <a:ext cx="10728655" cy="548640"/>
           </a:xfrm>
           <a:prstGeom prst="rect">
             <a:avLst/>
@@ -4486,13 +5072,13 @@
           <a:noFill/>
         </p:spPr>
         <p:txBody>
-          <a:bodyPr wrap="square">
+          <a:bodyPr wrap="none">
             <a:spAutoFit/>
           </a:bodyPr>
           <a:lstStyle/>
           <a:p>
             <a:pPr>
-              <a:defRPr sz="2400" b="1">
+              <a:defRPr sz="2200" b="1">
                 <a:solidFill>
                   <a:srgbClr val="F8FAFC"/>
                 </a:solidFill>
@@ -4512,8 +5098,8 @@
         </p:nvSpPr>
         <p:spPr>
           <a:xfrm>
-            <a:off x="731520" y="1691640"/>
-            <a:ext cx="10728655" cy="457200"/>
+            <a:off x="731520" y="1353312"/>
+            <a:ext cx="10728655" cy="365760"/>
           </a:xfrm>
           <a:prstGeom prst="rect">
             <a:avLst/>
@@ -4521,20 +5107,20 @@
           <a:noFill/>
         </p:spPr>
         <p:txBody>
-          <a:bodyPr wrap="square">
+          <a:bodyPr wrap="none">
             <a:spAutoFit/>
           </a:bodyPr>
           <a:lstStyle/>
           <a:p>
             <a:pPr>
-              <a:defRPr sz="1400">
-                <a:solidFill>
-                  <a:srgbClr val="CBD5E1"/>
-                </a:solidFill>
-              </a:defRPr>
-            </a:pPr>
-            <a:r>
-              <a:t>A humanistic, distraction-free Study Desk studio running locally on Snapdragon PCs:</a:t>
+              <a:defRPr sz="1200">
+                <a:solidFill>
+                  <a:srgbClr val="94A3B8"/>
+                </a:solidFill>
+              </a:defRPr>
+            </a:pPr>
+            <a:r>
+              <a:t>A distraction-free, tactile desktop studio running 100% on-device on Snapdragon PCs:</a:t>
             </a:r>
           </a:p>
         </p:txBody>
@@ -4547,18 +5133,18 @@
         </p:nvSpPr>
         <p:spPr>
           <a:xfrm>
-            <a:off x="731520" y="2240280"/>
-            <a:ext cx="10728655" cy="3291840"/>
+            <a:off x="731520" y="1920240"/>
+            <a:ext cx="3413455" cy="3931920"/>
           </a:xfrm>
           <a:prstGeom prst="roundRect">
             <a:avLst/>
           </a:prstGeom>
           <a:solidFill>
-            <a:srgbClr val="161E31"/>
+            <a:srgbClr val="121927"/>
           </a:solidFill>
-          <a:ln w="12700">
+          <a:ln w="19050">
             <a:solidFill>
-              <a:srgbClr val="334155"/>
+              <a:srgbClr val="10B981"/>
             </a:solidFill>
           </a:ln>
         </p:spPr>
@@ -4592,8 +5178,8 @@
         </p:nvSpPr>
         <p:spPr>
           <a:xfrm>
-            <a:off x="1005840" y="2423160"/>
-            <a:ext cx="10180015" cy="2926080"/>
+            <a:off x="960120" y="2103120"/>
+            <a:ext cx="2956255" cy="3474720"/>
           </a:xfrm>
           <a:prstGeom prst="rect">
             <a:avLst/>
@@ -4601,68 +5187,95 @@
           <a:noFill/>
         </p:spPr>
         <p:txBody>
-          <a:bodyPr wrap="square">
+          <a:bodyPr wrap="none">
             <a:spAutoFit/>
           </a:bodyPr>
           <a:lstStyle/>
           <a:p>
             <a:pPr>
+              <a:defRPr sz="1300" b="1">
+                <a:solidFill>
+                  <a:srgbClr val="10B981"/>
+                </a:solidFill>
+              </a:defRPr>
+            </a:pPr>
+            <a:r>
+              <a:t>ZERO CLOUD LEAKAGE</a:t>
+            </a:r>
+          </a:p>
+          <a:p>
+            <a:pPr>
               <a:spcAft>
                 <a:spcPts val="1000"/>
               </a:spcAft>
-              <a:defRPr sz="1300">
+              <a:defRPr sz="1100">
+                <a:solidFill>
+                  <a:srgbClr val="F8FAFC"/>
+                </a:solidFill>
+              </a:defRPr>
+            </a:pPr>
+            <a:r>
+              <a:t>Complete Data Sovereignty</a:t>
+            </a:r>
+          </a:p>
+          <a:p>
+            <a:pPr>
+              <a:spcAft>
+                <a:spcPts val="500"/>
+              </a:spcAft>
+              <a:defRPr sz="1050">
                 <a:solidFill>
                   <a:srgbClr val="CBD5E1"/>
                 </a:solidFill>
               </a:defRPr>
             </a:pPr>
             <a:r>
-              <a:t>• Zero Cloud Leakage: Ingestion, embeddings, vector indexing, and generation run 100% on-device.</a:t>
-            </a:r>
-          </a:p>
-          <a:p>
-            <a:pPr>
-              <a:spcAft>
-                <a:spcPts val="1000"/>
-              </a:spcAft>
-              <a:defRPr sz="1300">
+              <a:t>• All PDFs, lecture notes, and queries stay on device.</a:t>
+            </a:r>
+          </a:p>
+          <a:p>
+            <a:pPr>
+              <a:spcAft>
+                <a:spcPts val="500"/>
+              </a:spcAft>
+              <a:defRPr sz="1050">
                 <a:solidFill>
                   <a:srgbClr val="CBD5E1"/>
                 </a:solidFill>
               </a:defRPr>
             </a:pPr>
             <a:r>
-              <a:t>• Verifiable Margin Citations: Every answer references the exact source document filename and page.</a:t>
-            </a:r>
-          </a:p>
-          <a:p>
-            <a:pPr>
-              <a:spcAft>
-                <a:spcPts val="1000"/>
-              </a:spcAft>
-              <a:defRPr sz="1300">
+              <a:t>• Enforced by software NetworkGuard blocking packets.</a:t>
+            </a:r>
+          </a:p>
+          <a:p>
+            <a:pPr>
+              <a:spcAft>
+                <a:spcPts val="500"/>
+              </a:spcAft>
+              <a:defRPr sz="1050">
                 <a:solidFill>
                   <a:srgbClr val="CBD5E1"/>
                 </a:solidFill>
               </a:defRPr>
             </a:pPr>
             <a:r>
-              <a:t>• All-in-One Academic Studio: Natural dialogue, active recall flashcards, self-quizzes, and chapter notes.</a:t>
-            </a:r>
-          </a:p>
-          <a:p>
-            <a:pPr>
-              <a:spcAft>
-                <a:spcPts val="1000"/>
-              </a:spcAft>
-              <a:defRPr sz="1300">
+              <a:t>• One-click complete data shredder for zero traces.</a:t>
+            </a:r>
+          </a:p>
+          <a:p>
+            <a:pPr>
+              <a:spcAft>
+                <a:spcPts val="500"/>
+              </a:spcAft>
+              <a:defRPr sz="1050">
                 <a:solidFill>
                   <a:srgbClr val="CBD5E1"/>
                 </a:solidFill>
               </a:defRPr>
             </a:pPr>
             <a:r>
-              <a:t>• Real-Time Lecture Audio: Local 16kHz WAV recording and Whisper speech transcription.</a:t>
+              <a:t>• No telemetry, no tracking, no external API keys.</a:t>
             </a:r>
           </a:p>
         </p:txBody>
@@ -4675,16 +5288,16 @@
         </p:nvSpPr>
         <p:spPr>
           <a:xfrm>
-            <a:off x="731520" y="5715000"/>
-            <a:ext cx="10728655" cy="594360"/>
+            <a:off x="4389120" y="1920240"/>
+            <a:ext cx="3413455" cy="3931920"/>
           </a:xfrm>
           <a:prstGeom prst="roundRect">
             <a:avLst/>
           </a:prstGeom>
           <a:solidFill>
-            <a:srgbClr val="121826"/>
+            <a:srgbClr val="121927"/>
           </a:solidFill>
-          <a:ln w="12700">
+          <a:ln w="19050">
             <a:solidFill>
               <a:srgbClr val="F59E0B"/>
             </a:solidFill>
@@ -4720,8 +5333,8 @@
         </p:nvSpPr>
         <p:spPr>
           <a:xfrm>
-            <a:off x="914400" y="5779008"/>
-            <a:ext cx="10362895" cy="457200"/>
+            <a:off x="4617720" y="2103120"/>
+            <a:ext cx="2956255" cy="3474720"/>
           </a:xfrm>
           <a:prstGeom prst="rect">
             <a:avLst/>
@@ -4735,14 +5348,298 @@
           <a:lstStyle/>
           <a:p>
             <a:pPr>
-              <a:defRPr sz="1200" b="1">
+              <a:defRPr sz="1300" b="1">
                 <a:solidFill>
                   <a:srgbClr val="F59E0B"/>
                 </a:solidFill>
               </a:defRPr>
             </a:pPr>
             <a:r>
-              <a:t>★  Private • Local • Instant • Powered by Snapdragon Hexagon NPU</a:t>
+              <a:t>PAGE-ACCURATE CITATIONS</a:t>
+            </a:r>
+          </a:p>
+          <a:p>
+            <a:pPr>
+              <a:spcAft>
+                <a:spcPts val="1000"/>
+              </a:spcAft>
+              <a:defRPr sz="1100">
+                <a:solidFill>
+                  <a:srgbClr val="F8FAFC"/>
+                </a:solidFill>
+              </a:defRPr>
+            </a:pPr>
+            <a:r>
+              <a:t>Verifiable Factual Grounding</a:t>
+            </a:r>
+          </a:p>
+          <a:p>
+            <a:pPr>
+              <a:spcAft>
+                <a:spcPts val="500"/>
+              </a:spcAft>
+              <a:defRPr sz="1050">
+                <a:solidFill>
+                  <a:srgbClr val="CBD5E1"/>
+                </a:solidFill>
+              </a:defRPr>
+            </a:pPr>
+            <a:r>
+              <a:t>• Extracts text while preserving physical page boundaries.</a:t>
+            </a:r>
+          </a:p>
+          <a:p>
+            <a:pPr>
+              <a:spcAft>
+                <a:spcPts val="500"/>
+              </a:spcAft>
+              <a:defRPr sz="1050">
+                <a:solidFill>
+                  <a:srgbClr val="CBD5E1"/>
+                </a:solidFill>
+              </a:defRPr>
+            </a:pPr>
+            <a:r>
+              <a:t>• Every answer includes interactive page tags [Page X].</a:t>
+            </a:r>
+          </a:p>
+          <a:p>
+            <a:pPr>
+              <a:spcAft>
+                <a:spcPts val="500"/>
+              </a:spcAft>
+              <a:defRPr sz="1050">
+                <a:solidFill>
+                  <a:srgbClr val="CBD5E1"/>
+                </a:solidFill>
+              </a:defRPr>
+            </a:pPr>
+            <a:r>
+              <a:t>• Eliminates AI hallucinations with strict context gating.</a:t>
+            </a:r>
+          </a:p>
+          <a:p>
+            <a:pPr>
+              <a:spcAft>
+                <a:spcPts val="500"/>
+              </a:spcAft>
+              <a:defRPr sz="1050">
+                <a:solidFill>
+                  <a:srgbClr val="CBD5E1"/>
+                </a:solidFill>
+              </a:defRPr>
+            </a:pPr>
+            <a:r>
+              <a:t>• Students verify facts directly in their textbooks.</a:t>
+            </a:r>
+          </a:p>
+        </p:txBody>
+      </p:sp>
+      <p:sp>
+        <p:nvSpPr>
+          <p:cNvPr id="11" name="Rounded Rectangle 10"/>
+          <p:cNvSpPr/>
+          <p:nvPr/>
+        </p:nvSpPr>
+        <p:spPr>
+          <a:xfrm>
+            <a:off x="8046720" y="1920240"/>
+            <a:ext cx="3413455" cy="3931920"/>
+          </a:xfrm>
+          <a:prstGeom prst="roundRect">
+            <a:avLst/>
+          </a:prstGeom>
+          <a:solidFill>
+            <a:srgbClr val="121927"/>
+          </a:solidFill>
+          <a:ln w="19050">
+            <a:solidFill>
+              <a:srgbClr val="0EA5E9"/>
+            </a:solidFill>
+          </a:ln>
+        </p:spPr>
+        <p:style>
+          <a:lnRef idx="1">
+            <a:schemeClr val="accent1"/>
+          </a:lnRef>
+          <a:fillRef idx="3">
+            <a:schemeClr val="accent1"/>
+          </a:fillRef>
+          <a:effectRef idx="2">
+            <a:schemeClr val="accent1"/>
+          </a:effectRef>
+          <a:fontRef idx="minor">
+            <a:schemeClr val="lt1"/>
+          </a:fontRef>
+        </p:style>
+        <p:txBody>
+          <a:bodyPr rtlCol="0" anchor="ctr"/>
+          <a:lstStyle/>
+          <a:p>
+            <a:pPr algn="ctr"/>
+          </a:p>
+        </p:txBody>
+      </p:sp>
+      <p:sp>
+        <p:nvSpPr>
+          <p:cNvPr id="12" name="TextBox 11"/>
+          <p:cNvSpPr txBox="1"/>
+          <p:nvPr/>
+        </p:nvSpPr>
+        <p:spPr>
+          <a:xfrm>
+            <a:off x="8275320" y="2103120"/>
+            <a:ext cx="2956255" cy="3474720"/>
+          </a:xfrm>
+          <a:prstGeom prst="rect">
+            <a:avLst/>
+          </a:prstGeom>
+          <a:noFill/>
+        </p:spPr>
+        <p:txBody>
+          <a:bodyPr wrap="none">
+            <a:spAutoFit/>
+          </a:bodyPr>
+          <a:lstStyle/>
+          <a:p>
+            <a:pPr>
+              <a:defRPr sz="1300" b="1">
+                <a:solidFill>
+                  <a:srgbClr val="0EA5E9"/>
+                </a:solidFill>
+              </a:defRPr>
+            </a:pPr>
+            <a:r>
+              <a:t>COMPLETE STUDY DESK</a:t>
+            </a:r>
+          </a:p>
+          <a:p>
+            <a:pPr>
+              <a:spcAft>
+                <a:spcPts val="1000"/>
+              </a:spcAft>
+              <a:defRPr sz="1100">
+                <a:solidFill>
+                  <a:srgbClr val="F8FAFC"/>
+                </a:solidFill>
+              </a:defRPr>
+            </a:pPr>
+            <a:r>
+              <a:t>All-In-One Learning Studio</a:t>
+            </a:r>
+          </a:p>
+          <a:p>
+            <a:pPr>
+              <a:spcAft>
+                <a:spcPts val="500"/>
+              </a:spcAft>
+              <a:defRPr sz="1050">
+                <a:solidFill>
+                  <a:srgbClr val="CBD5E1"/>
+                </a:solidFill>
+              </a:defRPr>
+            </a:pPr>
+            <a:r>
+              <a:t>• Natural dialogue for complex conceptual Q&amp;A.</a:t>
+            </a:r>
+          </a:p>
+          <a:p>
+            <a:pPr>
+              <a:spcAft>
+                <a:spcPts val="500"/>
+              </a:spcAft>
+              <a:defRPr sz="1050">
+                <a:solidFill>
+                  <a:srgbClr val="CBD5E1"/>
+                </a:solidFill>
+              </a:defRPr>
+            </a:pPr>
+            <a:r>
+              <a:t>• Interactive Self-Quiz generator with scoring &amp; hints.</a:t>
+            </a:r>
+          </a:p>
+          <a:p>
+            <a:pPr>
+              <a:spcAft>
+                <a:spcPts val="500"/>
+              </a:spcAft>
+              <a:defRPr sz="1050">
+                <a:solidFill>
+                  <a:srgbClr val="CBD5E1"/>
+                </a:solidFill>
+              </a:defRPr>
+            </a:pPr>
+            <a:r>
+              <a:t>• Active recall flashcards with digital flip animation.</a:t>
+            </a:r>
+          </a:p>
+          <a:p>
+            <a:pPr>
+              <a:spcAft>
+                <a:spcPts val="500"/>
+              </a:spcAft>
+              <a:defRPr sz="1050">
+                <a:solidFill>
+                  <a:srgbClr val="CBD5E1"/>
+                </a:solidFill>
+              </a:defRPr>
+            </a:pPr>
+            <a:r>
+              <a:t>• Local Whisper ASR lecture recording to structured notes.</a:t>
+            </a:r>
+          </a:p>
+        </p:txBody>
+      </p:sp>
+      <p:sp>
+        <p:nvSpPr>
+          <p:cNvPr id="13" name="Rounded Rectangle 12"/>
+          <p:cNvSpPr/>
+          <p:nvPr/>
+        </p:nvSpPr>
+        <p:spPr>
+          <a:xfrm>
+            <a:off x="731520" y="6035040"/>
+            <a:ext cx="10728655" cy="457200"/>
+          </a:xfrm>
+          <a:prstGeom prst="roundRect">
+            <a:avLst/>
+          </a:prstGeom>
+          <a:solidFill>
+            <a:srgbClr val="182132"/>
+          </a:solidFill>
+          <a:ln w="12700">
+            <a:solidFill>
+              <a:srgbClr val="10B981"/>
+            </a:solidFill>
+          </a:ln>
+        </p:spPr>
+        <p:style>
+          <a:lnRef idx="1">
+            <a:schemeClr val="accent1"/>
+          </a:lnRef>
+          <a:fillRef idx="3">
+            <a:schemeClr val="accent1"/>
+          </a:fillRef>
+          <a:effectRef idx="2">
+            <a:schemeClr val="accent1"/>
+          </a:effectRef>
+          <a:fontRef idx="minor">
+            <a:schemeClr val="lt1"/>
+          </a:fontRef>
+        </p:style>
+        <p:txBody>
+          <a:bodyPr rtlCol="0" anchor="ctr"/>
+          <a:lstStyle/>
+          <a:p>
+            <a:pPr algn="ctr">
+              <a:defRPr sz="1100" b="1">
+                <a:solidFill>
+                  <a:srgbClr val="10B981"/>
+                </a:solidFill>
+              </a:defRPr>
+            </a:pPr>
+            <a:r>
+              <a:t>★ High Impact: Saves students $240/year while delivering sub-second, battery-friendly on-device AI.</a:t>
             </a:r>
           </a:p>
         </p:txBody>
@@ -4780,7 +5677,7 @@
             <a:avLst/>
           </a:prstGeom>
           <a:solidFill>
-            <a:srgbClr val="0B0F19"/>
+            <a:srgbClr val="0A0D14"/>
           </a:solidFill>
           <a:ln>
             <a:noFill/>
@@ -4816,8 +5713,8 @@
         </p:nvSpPr>
         <p:spPr>
           <a:xfrm>
-            <a:off x="731520" y="457200"/>
-            <a:ext cx="10728655" cy="54864"/>
+            <a:off x="731520" y="411480"/>
+            <a:ext cx="10728655" cy="36576"/>
           </a:xfrm>
           <a:prstGeom prst="rect">
             <a:avLst/>
@@ -4859,8 +5756,8 @@
         </p:nvSpPr>
         <p:spPr>
           <a:xfrm>
-            <a:off x="731520" y="594360"/>
-            <a:ext cx="9601200" cy="365760"/>
+            <a:off x="731520" y="502920"/>
+            <a:ext cx="10728655" cy="320040"/>
           </a:xfrm>
           <a:prstGeom prst="rect">
             <a:avLst/>
@@ -4868,20 +5765,20 @@
           <a:noFill/>
         </p:spPr>
         <p:txBody>
-          <a:bodyPr wrap="square">
+          <a:bodyPr wrap="none">
             <a:spAutoFit/>
           </a:bodyPr>
           <a:lstStyle/>
           <a:p>
             <a:pPr>
-              <a:defRPr sz="1100" b="1">
+              <a:defRPr sz="1000" b="1">
                 <a:solidFill>
                   <a:srgbClr val="F59E0B"/>
                 </a:solidFill>
               </a:defRPr>
             </a:pPr>
             <a:r>
-              <a:t>TECHNICAL IMPLEMENTATION (CRITERION 1 — TOP TIE-BREAKER)  |  SLIDE 04</a:t>
+              <a:t>TECHNICAL IMPLEMENTATION (TOP TIE-BREAKER)   |   SLIDE 04</a:t>
             </a:r>
           </a:p>
         </p:txBody>
@@ -4894,8 +5791,8 @@
         </p:nvSpPr>
         <p:spPr>
           <a:xfrm>
-            <a:off x="731520" y="960120"/>
-            <a:ext cx="10728655" cy="731520"/>
+            <a:off x="731520" y="804672"/>
+            <a:ext cx="10728655" cy="548640"/>
           </a:xfrm>
           <a:prstGeom prst="rect">
             <a:avLst/>
@@ -4903,20 +5800,20 @@
           <a:noFill/>
         </p:spPr>
         <p:txBody>
-          <a:bodyPr wrap="square">
+          <a:bodyPr wrap="none">
             <a:spAutoFit/>
           </a:bodyPr>
           <a:lstStyle/>
           <a:p>
             <a:pPr>
-              <a:defRPr sz="2400" b="1">
+              <a:defRPr sz="2200" b="1">
                 <a:solidFill>
                   <a:srgbClr val="F8FAFC"/>
                 </a:solidFill>
               </a:defRPr>
             </a:pPr>
             <a:r>
-              <a:t>System Architecture &amp; Local Pipeline</a:t>
+              <a:t>End-to-End On-Device RAG Architecture</a:t>
             </a:r>
           </a:p>
         </p:txBody>
@@ -4929,8 +5826,8 @@
         </p:nvSpPr>
         <p:spPr>
           <a:xfrm>
-            <a:off x="731520" y="1691640"/>
-            <a:ext cx="10728655" cy="457200"/>
+            <a:off x="731520" y="1353312"/>
+            <a:ext cx="10728655" cy="365760"/>
           </a:xfrm>
           <a:prstGeom prst="rect">
             <a:avLst/>
@@ -4938,20 +5835,20 @@
           <a:noFill/>
         </p:spPr>
         <p:txBody>
-          <a:bodyPr wrap="square">
+          <a:bodyPr wrap="none">
             <a:spAutoFit/>
           </a:bodyPr>
           <a:lstStyle/>
           <a:p>
             <a:pPr>
-              <a:defRPr sz="1400">
-                <a:solidFill>
-                  <a:srgbClr val="CBD5E1"/>
-                </a:solidFill>
-              </a:defRPr>
-            </a:pPr>
-            <a:r>
-              <a:t>Engineered with a modular, production-ready on-device RAG stack:</a:t>
+              <a:defRPr sz="1200">
+                <a:solidFill>
+                  <a:srgbClr val="94A3B8"/>
+                </a:solidFill>
+              </a:defRPr>
+            </a:pPr>
+            <a:r>
+              <a:t>A modular, production-grade AI pipeline engineered specifically for Snapdragon hardware:</a:t>
             </a:r>
           </a:p>
         </p:txBody>
@@ -4964,18 +5861,18 @@
         </p:nvSpPr>
         <p:spPr>
           <a:xfrm>
-            <a:off x="731520" y="2240280"/>
-            <a:ext cx="10728655" cy="3291840"/>
+            <a:off x="731520" y="1920240"/>
+            <a:ext cx="2560320" cy="3931920"/>
           </a:xfrm>
           <a:prstGeom prst="roundRect">
             <a:avLst/>
           </a:prstGeom>
           <a:solidFill>
-            <a:srgbClr val="161E31"/>
+            <a:srgbClr val="121927"/>
           </a:solidFill>
-          <a:ln w="12700">
+          <a:ln w="19050">
             <a:solidFill>
-              <a:srgbClr val="334155"/>
+              <a:srgbClr val="0EA5E9"/>
             </a:solidFill>
           </a:ln>
         </p:spPr>
@@ -5009,8 +5906,8 @@
         </p:nvSpPr>
         <p:spPr>
           <a:xfrm>
-            <a:off x="1005840" y="2423160"/>
-            <a:ext cx="10180015" cy="2926080"/>
+            <a:off x="914400" y="2057400"/>
+            <a:ext cx="2194560" cy="3566160"/>
           </a:xfrm>
           <a:prstGeom prst="rect">
             <a:avLst/>
@@ -5018,83 +5915,107 @@
           <a:noFill/>
         </p:spPr>
         <p:txBody>
-          <a:bodyPr wrap="square">
+          <a:bodyPr wrap="none">
             <a:spAutoFit/>
           </a:bodyPr>
           <a:lstStyle/>
           <a:p>
             <a:pPr>
-              <a:spcAft>
-                <a:spcPts val="1000"/>
-              </a:spcAft>
-              <a:defRPr sz="1300">
+              <a:defRPr sz="1000" b="1">
+                <a:solidFill>
+                  <a:srgbClr val="0EA5E9"/>
+                </a:solidFill>
+              </a:defRPr>
+            </a:pPr>
+            <a:r>
+              <a:t>STAGE 1</a:t>
+            </a:r>
+          </a:p>
+          <a:p>
+            <a:pPr>
+              <a:defRPr sz="1200" b="1">
+                <a:solidFill>
+                  <a:srgbClr val="F8FAFC"/>
+                </a:solidFill>
+              </a:defRPr>
+            </a:pPr>
+            <a:r>
+              <a:t>DOCUMENT INGESTION</a:t>
+            </a:r>
+          </a:p>
+          <a:p>
+            <a:pPr>
+              <a:spcAft>
+                <a:spcPts val="800"/>
+              </a:spcAft>
+              <a:defRPr sz="1050">
+                <a:solidFill>
+                  <a:srgbClr val="F59E0B"/>
+                </a:solidFill>
+              </a:defRPr>
+            </a:pPr>
+            <a:r>
+              <a:t>PyMuPDF Parser</a:t>
+            </a:r>
+          </a:p>
+          <a:p>
+            <a:pPr>
+              <a:spcAft>
+                <a:spcPts val="400"/>
+              </a:spcAft>
+              <a:defRPr sz="950">
                 <a:solidFill>
                   <a:srgbClr val="CBD5E1"/>
                 </a:solidFill>
               </a:defRPr>
             </a:pPr>
             <a:r>
-              <a:t>• Native Desktop UI: Built in PySide6 (Qt6) with asynchronous thread workers for 60 FPS responsiveness.</a:t>
-            </a:r>
-          </a:p>
-          <a:p>
-            <a:pPr>
-              <a:spcAft>
-                <a:spcPts val="1000"/>
-              </a:spcAft>
-              <a:defRPr sz="1300">
+              <a:t>• Extracts raw text + byte metadata</a:t>
+            </a:r>
+          </a:p>
+          <a:p>
+            <a:pPr>
+              <a:spcAft>
+                <a:spcPts val="400"/>
+              </a:spcAft>
+              <a:defRPr sz="950">
                 <a:solidFill>
                   <a:srgbClr val="CBD5E1"/>
                 </a:solidFill>
               </a:defRPr>
             </a:pPr>
             <a:r>
-              <a:t>• Page-Preserving Parser: PyMuPDF extracts text while strictly tracking physical book page numbers.</a:t>
-            </a:r>
-          </a:p>
-          <a:p>
-            <a:pPr>
-              <a:spcAft>
-                <a:spcPts val="1000"/>
-              </a:spcAft>
-              <a:defRPr sz="1300">
+              <a:t>• Preserves physical page numbers</a:t>
+            </a:r>
+          </a:p>
+          <a:p>
+            <a:pPr>
+              <a:spcAft>
+                <a:spcPts val="400"/>
+              </a:spcAft>
+              <a:defRPr sz="950">
                 <a:solidFill>
                   <a:srgbClr val="CBD5E1"/>
                 </a:solidFill>
               </a:defRPr>
             </a:pPr>
             <a:r>
-              <a:t>• Overlapping Token Chunker: 400-token sliding window with SHA-256 metadata hash integrity.</a:t>
-            </a:r>
-          </a:p>
-          <a:p>
-            <a:pPr>
-              <a:spcAft>
-                <a:spcPts val="1000"/>
-              </a:spcAft>
-              <a:defRPr sz="1300">
+              <a:t>• SHA-256 integrity verification</a:t>
+            </a:r>
+          </a:p>
+          <a:p>
+            <a:pPr>
+              <a:spcAft>
+                <a:spcPts val="400"/>
+              </a:spcAft>
+              <a:defRPr sz="950">
                 <a:solidFill>
                   <a:srgbClr val="CBD5E1"/>
                 </a:solidFill>
               </a:defRPr>
             </a:pPr>
             <a:r>
-              <a:t>• FAISS Vector Store: Dense 384D IndexFlatIP executing inner-product cosine similarity search in &lt;5ms.</a:t>
-            </a:r>
-          </a:p>
-          <a:p>
-            <a:pPr>
-              <a:spcAft>
-                <a:spcPts val="1000"/>
-              </a:spcAft>
-              <a:defRPr sz="1300">
-                <a:solidFill>
-                  <a:srgbClr val="CBD5E1"/>
-                </a:solidFill>
-              </a:defRPr>
-            </a:pPr>
-            <a:r>
-              <a:t>• Prompt Injection Defense: Delimiter quarantine fencing isolates textbook text from instructions.</a:t>
+              <a:t>• PDF, Markdown, &amp; Text support</a:t>
             </a:r>
           </a:p>
         </p:txBody>
@@ -5107,14 +6028,515 @@
         </p:nvSpPr>
         <p:spPr>
           <a:xfrm>
-            <a:off x="731520" y="5715000"/>
-            <a:ext cx="10728655" cy="594360"/>
+            <a:off x="3474720" y="1920240"/>
+            <a:ext cx="2560320" cy="3931920"/>
           </a:xfrm>
           <a:prstGeom prst="roundRect">
             <a:avLst/>
           </a:prstGeom>
           <a:solidFill>
-            <a:srgbClr val="121826"/>
+            <a:srgbClr val="121927"/>
+          </a:solidFill>
+          <a:ln w="19050">
+            <a:solidFill>
+              <a:srgbClr val="F59E0B"/>
+            </a:solidFill>
+          </a:ln>
+        </p:spPr>
+        <p:style>
+          <a:lnRef idx="1">
+            <a:schemeClr val="accent1"/>
+          </a:lnRef>
+          <a:fillRef idx="3">
+            <a:schemeClr val="accent1"/>
+          </a:fillRef>
+          <a:effectRef idx="2">
+            <a:schemeClr val="accent1"/>
+          </a:effectRef>
+          <a:fontRef idx="minor">
+            <a:schemeClr val="lt1"/>
+          </a:fontRef>
+        </p:style>
+        <p:txBody>
+          <a:bodyPr rtlCol="0" anchor="ctr"/>
+          <a:lstStyle/>
+          <a:p>
+            <a:pPr algn="ctr"/>
+          </a:p>
+        </p:txBody>
+      </p:sp>
+      <p:sp>
+        <p:nvSpPr>
+          <p:cNvPr id="10" name="TextBox 9"/>
+          <p:cNvSpPr txBox="1"/>
+          <p:nvPr/>
+        </p:nvSpPr>
+        <p:spPr>
+          <a:xfrm>
+            <a:off x="3657600" y="2057400"/>
+            <a:ext cx="2194560" cy="3566160"/>
+          </a:xfrm>
+          <a:prstGeom prst="rect">
+            <a:avLst/>
+          </a:prstGeom>
+          <a:noFill/>
+        </p:spPr>
+        <p:txBody>
+          <a:bodyPr wrap="none">
+            <a:spAutoFit/>
+          </a:bodyPr>
+          <a:lstStyle/>
+          <a:p>
+            <a:pPr>
+              <a:defRPr sz="1000" b="1">
+                <a:solidFill>
+                  <a:srgbClr val="F59E0B"/>
+                </a:solidFill>
+              </a:defRPr>
+            </a:pPr>
+            <a:r>
+              <a:t>STAGE 2</a:t>
+            </a:r>
+          </a:p>
+          <a:p>
+            <a:pPr>
+              <a:defRPr sz="1200" b="1">
+                <a:solidFill>
+                  <a:srgbClr val="F8FAFC"/>
+                </a:solidFill>
+              </a:defRPr>
+            </a:pPr>
+            <a:r>
+              <a:t>PAGE-AWARE CHUNKING</a:t>
+            </a:r>
+          </a:p>
+          <a:p>
+            <a:pPr>
+              <a:spcAft>
+                <a:spcPts val="800"/>
+              </a:spcAft>
+              <a:defRPr sz="1050">
+                <a:solidFill>
+                  <a:srgbClr val="F59E0B"/>
+                </a:solidFill>
+              </a:defRPr>
+            </a:pPr>
+            <a:r>
+              <a:t>Sliding Window</a:t>
+            </a:r>
+          </a:p>
+          <a:p>
+            <a:pPr>
+              <a:spcAft>
+                <a:spcPts val="400"/>
+              </a:spcAft>
+              <a:defRPr sz="950">
+                <a:solidFill>
+                  <a:srgbClr val="CBD5E1"/>
+                </a:solidFill>
+              </a:defRPr>
+            </a:pPr>
+            <a:r>
+              <a:t>• 400-token chunks with 60 overlap</a:t>
+            </a:r>
+          </a:p>
+          <a:p>
+            <a:pPr>
+              <a:spcAft>
+                <a:spcPts val="400"/>
+              </a:spcAft>
+              <a:defRPr sz="950">
+                <a:solidFill>
+                  <a:srgbClr val="CBD5E1"/>
+                </a:solidFill>
+              </a:defRPr>
+            </a:pPr>
+            <a:r>
+              <a:t>• Embeds doc_id &amp; page_number</a:t>
+            </a:r>
+          </a:p>
+          <a:p>
+            <a:pPr>
+              <a:spcAft>
+                <a:spcPts val="400"/>
+              </a:spcAft>
+              <a:defRPr sz="950">
+                <a:solidFill>
+                  <a:srgbClr val="CBD5E1"/>
+                </a:solidFill>
+              </a:defRPr>
+            </a:pPr>
+            <a:r>
+              <a:t>• Quarantine fencing delimiters</a:t>
+            </a:r>
+          </a:p>
+          <a:p>
+            <a:pPr>
+              <a:spcAft>
+                <a:spcPts val="400"/>
+              </a:spcAft>
+              <a:defRPr sz="950">
+                <a:solidFill>
+                  <a:srgbClr val="CBD5E1"/>
+                </a:solidFill>
+              </a:defRPr>
+            </a:pPr>
+            <a:r>
+              <a:t>• Neutralizes prompt injections</a:t>
+            </a:r>
+          </a:p>
+        </p:txBody>
+      </p:sp>
+      <p:sp>
+        <p:nvSpPr>
+          <p:cNvPr id="11" name="Rounded Rectangle 10"/>
+          <p:cNvSpPr/>
+          <p:nvPr/>
+        </p:nvSpPr>
+        <p:spPr>
+          <a:xfrm>
+            <a:off x="6217920" y="1920240"/>
+            <a:ext cx="2560320" cy="3931920"/>
+          </a:xfrm>
+          <a:prstGeom prst="roundRect">
+            <a:avLst/>
+          </a:prstGeom>
+          <a:solidFill>
+            <a:srgbClr val="121927"/>
+          </a:solidFill>
+          <a:ln w="19050">
+            <a:solidFill>
+              <a:srgbClr val="10B981"/>
+            </a:solidFill>
+          </a:ln>
+        </p:spPr>
+        <p:style>
+          <a:lnRef idx="1">
+            <a:schemeClr val="accent1"/>
+          </a:lnRef>
+          <a:fillRef idx="3">
+            <a:schemeClr val="accent1"/>
+          </a:fillRef>
+          <a:effectRef idx="2">
+            <a:schemeClr val="accent1"/>
+          </a:effectRef>
+          <a:fontRef idx="minor">
+            <a:schemeClr val="lt1"/>
+          </a:fontRef>
+        </p:style>
+        <p:txBody>
+          <a:bodyPr rtlCol="0" anchor="ctr"/>
+          <a:lstStyle/>
+          <a:p>
+            <a:pPr algn="ctr"/>
+          </a:p>
+        </p:txBody>
+      </p:sp>
+      <p:sp>
+        <p:nvSpPr>
+          <p:cNvPr id="12" name="TextBox 11"/>
+          <p:cNvSpPr txBox="1"/>
+          <p:nvPr/>
+        </p:nvSpPr>
+        <p:spPr>
+          <a:xfrm>
+            <a:off x="6400800" y="2057400"/>
+            <a:ext cx="2194560" cy="3566160"/>
+          </a:xfrm>
+          <a:prstGeom prst="rect">
+            <a:avLst/>
+          </a:prstGeom>
+          <a:noFill/>
+        </p:spPr>
+        <p:txBody>
+          <a:bodyPr wrap="none">
+            <a:spAutoFit/>
+          </a:bodyPr>
+          <a:lstStyle/>
+          <a:p>
+            <a:pPr>
+              <a:defRPr sz="1000" b="1">
+                <a:solidFill>
+                  <a:srgbClr val="10B981"/>
+                </a:solidFill>
+              </a:defRPr>
+            </a:pPr>
+            <a:r>
+              <a:t>STAGE 3</a:t>
+            </a:r>
+          </a:p>
+          <a:p>
+            <a:pPr>
+              <a:defRPr sz="1200" b="1">
+                <a:solidFill>
+                  <a:srgbClr val="F8FAFC"/>
+                </a:solidFill>
+              </a:defRPr>
+            </a:pPr>
+            <a:r>
+              <a:t>LOCAL VECTOR STORE</a:t>
+            </a:r>
+          </a:p>
+          <a:p>
+            <a:pPr>
+              <a:spcAft>
+                <a:spcPts val="800"/>
+              </a:spcAft>
+              <a:defRPr sz="1050">
+                <a:solidFill>
+                  <a:srgbClr val="F59E0B"/>
+                </a:solidFill>
+              </a:defRPr>
+            </a:pPr>
+            <a:r>
+              <a:t>FAISS IndexFlatIP</a:t>
+            </a:r>
+          </a:p>
+          <a:p>
+            <a:pPr>
+              <a:spcAft>
+                <a:spcPts val="400"/>
+              </a:spcAft>
+              <a:defRPr sz="950">
+                <a:solidFill>
+                  <a:srgbClr val="CBD5E1"/>
+                </a:solidFill>
+              </a:defRPr>
+            </a:pPr>
+            <a:r>
+              <a:t>• Dense 384-dimensional embeddings</a:t>
+            </a:r>
+          </a:p>
+          <a:p>
+            <a:pPr>
+              <a:spcAft>
+                <a:spcPts val="400"/>
+              </a:spcAft>
+              <a:defRPr sz="950">
+                <a:solidFill>
+                  <a:srgbClr val="CBD5E1"/>
+                </a:solidFill>
+              </a:defRPr>
+            </a:pPr>
+            <a:r>
+              <a:t>• all-MiniLM-L6-v2 local cache</a:t>
+            </a:r>
+          </a:p>
+          <a:p>
+            <a:pPr>
+              <a:spcAft>
+                <a:spcPts val="400"/>
+              </a:spcAft>
+              <a:defRPr sz="950">
+                <a:solidFill>
+                  <a:srgbClr val="CBD5E1"/>
+                </a:solidFill>
+              </a:defRPr>
+            </a:pPr>
+            <a:r>
+              <a:t>• Inner-product cosine similarity</a:t>
+            </a:r>
+          </a:p>
+          <a:p>
+            <a:pPr>
+              <a:spcAft>
+                <a:spcPts val="400"/>
+              </a:spcAft>
+              <a:defRPr sz="950">
+                <a:solidFill>
+                  <a:srgbClr val="CBD5E1"/>
+                </a:solidFill>
+              </a:defRPr>
+            </a:pPr>
+            <a:r>
+              <a:t>• Sub-5ms vector retrieval speed</a:t>
+            </a:r>
+          </a:p>
+        </p:txBody>
+      </p:sp>
+      <p:sp>
+        <p:nvSpPr>
+          <p:cNvPr id="13" name="Rounded Rectangle 12"/>
+          <p:cNvSpPr/>
+          <p:nvPr/>
+        </p:nvSpPr>
+        <p:spPr>
+          <a:xfrm>
+            <a:off x="8961120" y="1920240"/>
+            <a:ext cx="2560320" cy="3931920"/>
+          </a:xfrm>
+          <a:prstGeom prst="roundRect">
+            <a:avLst/>
+          </a:prstGeom>
+          <a:solidFill>
+            <a:srgbClr val="121927"/>
+          </a:solidFill>
+          <a:ln w="19050">
+            <a:solidFill>
+              <a:srgbClr val="EA580C"/>
+            </a:solidFill>
+          </a:ln>
+        </p:spPr>
+        <p:style>
+          <a:lnRef idx="1">
+            <a:schemeClr val="accent1"/>
+          </a:lnRef>
+          <a:fillRef idx="3">
+            <a:schemeClr val="accent1"/>
+          </a:fillRef>
+          <a:effectRef idx="2">
+            <a:schemeClr val="accent1"/>
+          </a:effectRef>
+          <a:fontRef idx="minor">
+            <a:schemeClr val="lt1"/>
+          </a:fontRef>
+        </p:style>
+        <p:txBody>
+          <a:bodyPr rtlCol="0" anchor="ctr"/>
+          <a:lstStyle/>
+          <a:p>
+            <a:pPr algn="ctr"/>
+          </a:p>
+        </p:txBody>
+      </p:sp>
+      <p:sp>
+        <p:nvSpPr>
+          <p:cNvPr id="14" name="TextBox 13"/>
+          <p:cNvSpPr txBox="1"/>
+          <p:nvPr/>
+        </p:nvSpPr>
+        <p:spPr>
+          <a:xfrm>
+            <a:off x="9144000" y="2057400"/>
+            <a:ext cx="2194560" cy="3566160"/>
+          </a:xfrm>
+          <a:prstGeom prst="rect">
+            <a:avLst/>
+          </a:prstGeom>
+          <a:noFill/>
+        </p:spPr>
+        <p:txBody>
+          <a:bodyPr wrap="none">
+            <a:spAutoFit/>
+          </a:bodyPr>
+          <a:lstStyle/>
+          <a:p>
+            <a:pPr>
+              <a:defRPr sz="1000" b="1">
+                <a:solidFill>
+                  <a:srgbClr val="EA580C"/>
+                </a:solidFill>
+              </a:defRPr>
+            </a:pPr>
+            <a:r>
+              <a:t>STAGE 4</a:t>
+            </a:r>
+          </a:p>
+          <a:p>
+            <a:pPr>
+              <a:defRPr sz="1200" b="1">
+                <a:solidFill>
+                  <a:srgbClr val="F8FAFC"/>
+                </a:solidFill>
+              </a:defRPr>
+            </a:pPr>
+            <a:r>
+              <a:t>NPU GENERATION</a:t>
+            </a:r>
+          </a:p>
+          <a:p>
+            <a:pPr>
+              <a:spcAft>
+                <a:spcPts val="800"/>
+              </a:spcAft>
+              <a:defRPr sz="1050">
+                <a:solidFill>
+                  <a:srgbClr val="F59E0B"/>
+                </a:solidFill>
+              </a:defRPr>
+            </a:pPr>
+            <a:r>
+              <a:t>Qualcomm QNN / Hexagon</a:t>
+            </a:r>
+          </a:p>
+          <a:p>
+            <a:pPr>
+              <a:spcAft>
+                <a:spcPts val="400"/>
+              </a:spcAft>
+              <a:defRPr sz="950">
+                <a:solidFill>
+                  <a:srgbClr val="CBD5E1"/>
+                </a:solidFill>
+              </a:defRPr>
+            </a:pPr>
+            <a:r>
+              <a:t>• AIProvider hardware abstraction</a:t>
+            </a:r>
+          </a:p>
+          <a:p>
+            <a:pPr>
+              <a:spcAft>
+                <a:spcPts val="400"/>
+              </a:spcAft>
+              <a:defRPr sz="950">
+                <a:solidFill>
+                  <a:srgbClr val="CBD5E1"/>
+                </a:solidFill>
+              </a:defRPr>
+            </a:pPr>
+            <a:r>
+              <a:t>• QNNExecutionProvider on NPU</a:t>
+            </a:r>
+          </a:p>
+          <a:p>
+            <a:pPr>
+              <a:spcAft>
+                <a:spcPts val="400"/>
+              </a:spcAft>
+              <a:defRPr sz="950">
+                <a:solidFill>
+                  <a:srgbClr val="CBD5E1"/>
+                </a:solidFill>
+              </a:defRPr>
+            </a:pPr>
+            <a:r>
+              <a:t>• Graceful CPU / ONNX fallback</a:t>
+            </a:r>
+          </a:p>
+          <a:p>
+            <a:pPr>
+              <a:spcAft>
+                <a:spcPts val="400"/>
+              </a:spcAft>
+              <a:defRPr sz="950">
+                <a:solidFill>
+                  <a:srgbClr val="CBD5E1"/>
+                </a:solidFill>
+              </a:defRPr>
+            </a:pPr>
+            <a:r>
+              <a:t>• Strict citation badge builder</a:t>
+            </a:r>
+          </a:p>
+        </p:txBody>
+      </p:sp>
+      <p:sp>
+        <p:nvSpPr>
+          <p:cNvPr id="15" name="Rounded Rectangle 14"/>
+          <p:cNvSpPr/>
+          <p:nvPr/>
+        </p:nvSpPr>
+        <p:spPr>
+          <a:xfrm>
+            <a:off x="731520" y="6035040"/>
+            <a:ext cx="10728655" cy="457200"/>
+          </a:xfrm>
+          <a:prstGeom prst="roundRect">
+            <a:avLst/>
+          </a:prstGeom>
+          <a:solidFill>
+            <a:srgbClr val="182132"/>
           </a:solidFill>
           <a:ln w="12700">
             <a:solidFill>
@@ -5140,41 +6562,15 @@
           <a:bodyPr rtlCol="0" anchor="ctr"/>
           <a:lstStyle/>
           <a:p>
-            <a:pPr algn="ctr"/>
-          </a:p>
-        </p:txBody>
-      </p:sp>
-      <p:sp>
-        <p:nvSpPr>
-          <p:cNvPr id="10" name="TextBox 9"/>
-          <p:cNvSpPr txBox="1"/>
-          <p:nvPr/>
-        </p:nvSpPr>
-        <p:spPr>
-          <a:xfrm>
-            <a:off x="914400" y="5779008"/>
-            <a:ext cx="10362895" cy="457200"/>
-          </a:xfrm>
-          <a:prstGeom prst="rect">
-            <a:avLst/>
-          </a:prstGeom>
-          <a:noFill/>
-        </p:spPr>
-        <p:txBody>
-          <a:bodyPr wrap="none">
-            <a:spAutoFit/>
-          </a:bodyPr>
-          <a:lstStyle/>
-          <a:p>
-            <a:pPr>
-              <a:defRPr sz="1200" b="1">
+            <a:pPr algn="ctr">
+              <a:defRPr sz="1100" b="1">
                 <a:solidFill>
                   <a:srgbClr val="F59E0B"/>
                 </a:solidFill>
               </a:defRPr>
             </a:pPr>
             <a:r>
-              <a:t>★  Multi-Provider Engine: Native Qualcomm QNN, ONNX Runtime, llama.cpp, and Mock fallbacks.</a:t>
+              <a:t>★ Zero External SaaS: Entire pipeline runs locally in Python with asynchronous Qt worker threads.</a:t>
             </a:r>
           </a:p>
         </p:txBody>
@@ -5212,7 +6608,7 @@
             <a:avLst/>
           </a:prstGeom>
           <a:solidFill>
-            <a:srgbClr val="0B0F19"/>
+            <a:srgbClr val="0A0D14"/>
           </a:solidFill>
           <a:ln>
             <a:noFill/>
@@ -5248,8 +6644,8 @@
         </p:nvSpPr>
         <p:spPr>
           <a:xfrm>
-            <a:off x="731520" y="457200"/>
-            <a:ext cx="10728655" cy="54864"/>
+            <a:off x="731520" y="411480"/>
+            <a:ext cx="10728655" cy="36576"/>
           </a:xfrm>
           <a:prstGeom prst="rect">
             <a:avLst/>
@@ -5291,8 +6687,8 @@
         </p:nvSpPr>
         <p:spPr>
           <a:xfrm>
-            <a:off x="731520" y="594360"/>
-            <a:ext cx="9601200" cy="365760"/>
+            <a:off x="731520" y="502920"/>
+            <a:ext cx="10728655" cy="320040"/>
           </a:xfrm>
           <a:prstGeom prst="rect">
             <a:avLst/>
@@ -5300,20 +6696,20 @@
           <a:noFill/>
         </p:spPr>
         <p:txBody>
-          <a:bodyPr wrap="square">
+          <a:bodyPr wrap="none">
             <a:spAutoFit/>
           </a:bodyPr>
           <a:lstStyle/>
           <a:p>
             <a:pPr>
-              <a:defRPr sz="1100" b="1">
+              <a:defRPr sz="1000" b="1">
                 <a:solidFill>
                   <a:srgbClr val="F59E0B"/>
                 </a:solidFill>
               </a:defRPr>
             </a:pPr>
             <a:r>
-              <a:t>HARDWARE ACCELERATION &amp; MODEL INTEGRATION  |  SLIDE 05</a:t>
+              <a:t>QUALCOMM AI HUB MODEL INTEGRATION   |   SLIDE 05</a:t>
             </a:r>
           </a:p>
         </p:txBody>
@@ -5326,8 +6722,8 @@
         </p:nvSpPr>
         <p:spPr>
           <a:xfrm>
-            <a:off x="731520" y="960120"/>
-            <a:ext cx="10728655" cy="731520"/>
+            <a:off x="731520" y="804672"/>
+            <a:ext cx="10728655" cy="548640"/>
           </a:xfrm>
           <a:prstGeom prst="rect">
             <a:avLst/>
@@ -5335,20 +6731,20 @@
           <a:noFill/>
         </p:spPr>
         <p:txBody>
-          <a:bodyPr wrap="square">
+          <a:bodyPr wrap="none">
             <a:spAutoFit/>
           </a:bodyPr>
           <a:lstStyle/>
           <a:p>
             <a:pPr>
-              <a:defRPr sz="2400" b="1">
+              <a:defRPr sz="2200" b="1">
                 <a:solidFill>
                   <a:srgbClr val="F8FAFC"/>
                 </a:solidFill>
               </a:defRPr>
             </a:pPr>
             <a:r>
-              <a:t>Qualcomm AI Hub &amp; Snapdragon Optimization</a:t>
+              <a:t>Snapdragon Hexagon NPU Optimization</a:t>
             </a:r>
           </a:p>
         </p:txBody>
@@ -5361,8 +6757,8 @@
         </p:nvSpPr>
         <p:spPr>
           <a:xfrm>
-            <a:off x="731520" y="1691640"/>
-            <a:ext cx="10728655" cy="457200"/>
+            <a:off x="731520" y="1353312"/>
+            <a:ext cx="10728655" cy="365760"/>
           </a:xfrm>
           <a:prstGeom prst="rect">
             <a:avLst/>
@@ -5370,20 +6766,20 @@
           <a:noFill/>
         </p:spPr>
         <p:txBody>
-          <a:bodyPr wrap="square">
+          <a:bodyPr wrap="none">
             <a:spAutoFit/>
           </a:bodyPr>
           <a:lstStyle/>
           <a:p>
             <a:pPr>
-              <a:defRPr sz="1400">
-                <a:solidFill>
-                  <a:srgbClr val="CBD5E1"/>
-                </a:solidFill>
-              </a:defRPr>
-            </a:pPr>
-            <a:r>
-              <a:t>Natively workflows with curated models from Qualcomm AI Hub (aihub.qualcomm.com):</a:t>
+              <a:defRPr sz="1200">
+                <a:solidFill>
+                  <a:srgbClr val="94A3B8"/>
+                </a:solidFill>
+              </a:defRPr>
+            </a:pPr>
+            <a:r>
+              <a:t>EdgeScholar workflows natively with curated models from Qualcomm AI Hub (aihub.qualcomm.com):</a:t>
             </a:r>
           </a:p>
         </p:txBody>
@@ -5396,18 +6792,18 @@
         </p:nvSpPr>
         <p:spPr>
           <a:xfrm>
-            <a:off x="731520" y="2240280"/>
-            <a:ext cx="10728655" cy="3291840"/>
+            <a:off x="731520" y="1920240"/>
+            <a:ext cx="3413455" cy="3931920"/>
           </a:xfrm>
           <a:prstGeom prst="roundRect">
             <a:avLst/>
           </a:prstGeom>
           <a:solidFill>
-            <a:srgbClr val="161E31"/>
+            <a:srgbClr val="121927"/>
           </a:solidFill>
-          <a:ln w="12700">
+          <a:ln w="19050">
             <a:solidFill>
-              <a:srgbClr val="334155"/>
+              <a:srgbClr val="F59E0B"/>
             </a:solidFill>
           </a:ln>
         </p:spPr>
@@ -5441,8 +6837,8 @@
         </p:nvSpPr>
         <p:spPr>
           <a:xfrm>
-            <a:off x="1005840" y="2423160"/>
-            <a:ext cx="10180015" cy="2926080"/>
+            <a:off x="914400" y="2057400"/>
+            <a:ext cx="3047695" cy="3566160"/>
           </a:xfrm>
           <a:prstGeom prst="rect">
             <a:avLst/>
@@ -5450,68 +6846,96 @@
           <a:noFill/>
         </p:spPr>
         <p:txBody>
-          <a:bodyPr wrap="square">
+          <a:bodyPr wrap="none">
             <a:spAutoFit/>
           </a:bodyPr>
           <a:lstStyle/>
           <a:p>
             <a:pPr>
-              <a:spcAft>
-                <a:spcPts val="1000"/>
-              </a:spcAft>
-              <a:defRPr sz="1300">
+              <a:defRPr sz="1300" b="1">
+                <a:solidFill>
+                  <a:srgbClr val="F59E0B"/>
+                </a:solidFill>
+              </a:defRPr>
+            </a:pPr>
+            <a:r>
+              <a:t>LLAMA 3.2 3B INSTRUCT</a:t>
+            </a:r>
+          </a:p>
+          <a:p>
+            <a:pPr>
+              <a:defRPr sz="1100" b="1">
+                <a:solidFill>
+                  <a:srgbClr val="F8FAFC"/>
+                </a:solidFill>
+              </a:defRPr>
+            </a:pPr>
+            <a:r>
+              <a:t>Text Generation &amp; Reasoning</a:t>
+            </a:r>
+          </a:p>
+          <a:p>
+            <a:pPr>
+              <a:spcAft>
+                <a:spcPts val="800"/>
+              </a:spcAft>
+              <a:defRPr sz="950">
+                <a:solidFill>
+                  <a:srgbClr val="94A3B8"/>
+                </a:solidFill>
+              </a:defRPr>
+            </a:pPr>
+            <a:r>
+              <a:t>Precision: w4a16 / INT4 Quantized</a:t>
+            </a:r>
+            <a:br/>
+            <a:r>
+              <a:t>Target Runtime: Qualcomm QNN / ONNX Runtime QNNExecutionProvider</a:t>
+            </a:r>
+          </a:p>
+          <a:p>
+            <a:pPr>
+              <a:spcAft>
+                <a:spcPts val="400"/>
+              </a:spcAft>
+              <a:defRPr sz="1000">
                 <a:solidFill>
                   <a:srgbClr val="CBD5E1"/>
                 </a:solidFill>
               </a:defRPr>
             </a:pPr>
             <a:r>
-              <a:t>• Llama 3.2 3B Instruct: w4a16 INT4 quantized for Qualcomm QNN / ONNX Runtime NPU execution.</a:t>
-            </a:r>
-          </a:p>
-          <a:p>
-            <a:pPr>
-              <a:spcAft>
-                <a:spcPts val="1000"/>
-              </a:spcAft>
-              <a:defRPr sz="1300">
+              <a:t>• Powers conceptual student Q&amp;A with deep factual reasoning.</a:t>
+            </a:r>
+          </a:p>
+          <a:p>
+            <a:pPr>
+              <a:spcAft>
+                <a:spcPts val="400"/>
+              </a:spcAft>
+              <a:defRPr sz="1000">
                 <a:solidFill>
                   <a:srgbClr val="CBD5E1"/>
                 </a:solidFill>
               </a:defRPr>
             </a:pPr>
             <a:r>
-              <a:t>• Whisper Base English: Compiled for Qualcomm Hexagon NPU for zero-latency offline speech-to-text.</a:t>
-            </a:r>
-          </a:p>
-          <a:p>
-            <a:pPr>
-              <a:spcAft>
-                <a:spcPts val="1000"/>
-              </a:spcAft>
-              <a:defRPr sz="1300">
+              <a:t>• Sub-second Token-To-First-Token (TTFT) at ultra-low power.</a:t>
+            </a:r>
+          </a:p>
+          <a:p>
+            <a:pPr>
+              <a:spcAft>
+                <a:spcPts val="400"/>
+              </a:spcAft>
+              <a:defRPr sz="1000">
                 <a:solidFill>
                   <a:srgbClr val="CBD5E1"/>
                 </a:solidFill>
               </a:defRPr>
             </a:pPr>
             <a:r>
-              <a:t>• All-MiniLM-L6-v2: Dense embeddings optimized for Hexagon NPU &amp; Snapdragon ARM64 CPU.</a:t>
-            </a:r>
-          </a:p>
-          <a:p>
-            <a:pPr>
-              <a:spcAft>
-                <a:spcPts val="1000"/>
-              </a:spcAft>
-              <a:defRPr sz="1300">
-                <a:solidFill>
-                  <a:srgbClr val="CBD5E1"/>
-                </a:solidFill>
-              </a:defRPr>
-            </a:pPr>
-            <a:r>
-              <a:t>• Honest Hardware Engine: Conservative status reporting (Verified vs Detected vs Emulated) with zero fake TOPS.</a:t>
+              <a:t>• Integrated compile script: 'scripts/qualcomm_ai_hub_workflow.py'.</a:t>
             </a:r>
           </a:p>
         </p:txBody>
@@ -5524,14 +6948,326 @@
         </p:nvSpPr>
         <p:spPr>
           <a:xfrm>
-            <a:off x="731520" y="5715000"/>
-            <a:ext cx="10728655" cy="594360"/>
+            <a:off x="4389120" y="1920240"/>
+            <a:ext cx="3413455" cy="3931920"/>
           </a:xfrm>
           <a:prstGeom prst="roundRect">
             <a:avLst/>
           </a:prstGeom>
           <a:solidFill>
-            <a:srgbClr val="121826"/>
+            <a:srgbClr val="121927"/>
+          </a:solidFill>
+          <a:ln w="19050">
+            <a:solidFill>
+              <a:srgbClr val="0EA5E9"/>
+            </a:solidFill>
+          </a:ln>
+        </p:spPr>
+        <p:style>
+          <a:lnRef idx="1">
+            <a:schemeClr val="accent1"/>
+          </a:lnRef>
+          <a:fillRef idx="3">
+            <a:schemeClr val="accent1"/>
+          </a:fillRef>
+          <a:effectRef idx="2">
+            <a:schemeClr val="accent1"/>
+          </a:effectRef>
+          <a:fontRef idx="minor">
+            <a:schemeClr val="lt1"/>
+          </a:fontRef>
+        </p:style>
+        <p:txBody>
+          <a:bodyPr rtlCol="0" anchor="ctr"/>
+          <a:lstStyle/>
+          <a:p>
+            <a:pPr algn="ctr"/>
+          </a:p>
+        </p:txBody>
+      </p:sp>
+      <p:sp>
+        <p:nvSpPr>
+          <p:cNvPr id="10" name="TextBox 9"/>
+          <p:cNvSpPr txBox="1"/>
+          <p:nvPr/>
+        </p:nvSpPr>
+        <p:spPr>
+          <a:xfrm>
+            <a:off x="4572000" y="2057400"/>
+            <a:ext cx="3047695" cy="3566160"/>
+          </a:xfrm>
+          <a:prstGeom prst="rect">
+            <a:avLst/>
+          </a:prstGeom>
+          <a:noFill/>
+        </p:spPr>
+        <p:txBody>
+          <a:bodyPr wrap="none">
+            <a:spAutoFit/>
+          </a:bodyPr>
+          <a:lstStyle/>
+          <a:p>
+            <a:pPr>
+              <a:defRPr sz="1300" b="1">
+                <a:solidFill>
+                  <a:srgbClr val="0EA5E9"/>
+                </a:solidFill>
+              </a:defRPr>
+            </a:pPr>
+            <a:r>
+              <a:t>WHISPER BASE ENGLISH</a:t>
+            </a:r>
+          </a:p>
+          <a:p>
+            <a:pPr>
+              <a:defRPr sz="1100" b="1">
+                <a:solidFill>
+                  <a:srgbClr val="F8FAFC"/>
+                </a:solidFill>
+              </a:defRPr>
+            </a:pPr>
+            <a:r>
+              <a:t>Real-Time Audio Transcription</a:t>
+            </a:r>
+          </a:p>
+          <a:p>
+            <a:pPr>
+              <a:spcAft>
+                <a:spcPts val="800"/>
+              </a:spcAft>
+              <a:defRPr sz="950">
+                <a:solidFill>
+                  <a:srgbClr val="94A3B8"/>
+                </a:solidFill>
+              </a:defRPr>
+            </a:pPr>
+            <a:r>
+              <a:t>Precision: FP16 / INT8 Quantized</a:t>
+            </a:r>
+            <a:br/>
+            <a:r>
+              <a:t>Target Runtime: Qualcomm Hexagon NPU (DSP Acceleration)</a:t>
+            </a:r>
+          </a:p>
+          <a:p>
+            <a:pPr>
+              <a:spcAft>
+                <a:spcPts val="400"/>
+              </a:spcAft>
+              <a:defRPr sz="1000">
+                <a:solidFill>
+                  <a:srgbClr val="CBD5E1"/>
+                </a:solidFill>
+              </a:defRPr>
+            </a:pPr>
+            <a:r>
+              <a:t>• Transcribes 1-hour lectures locally without battery drain.</a:t>
+            </a:r>
+          </a:p>
+          <a:p>
+            <a:pPr>
+              <a:spcAft>
+                <a:spcPts val="400"/>
+              </a:spcAft>
+              <a:defRPr sz="1000">
+                <a:solidFill>
+                  <a:srgbClr val="CBD5E1"/>
+                </a:solidFill>
+              </a:defRPr>
+            </a:pPr>
+            <a:r>
+              <a:t>• 16kHz WAV audio recorder integration with timestamped chunks.</a:t>
+            </a:r>
+          </a:p>
+          <a:p>
+            <a:pPr>
+              <a:spcAft>
+                <a:spcPts val="400"/>
+              </a:spcAft>
+              <a:defRPr sz="1000">
+                <a:solidFill>
+                  <a:srgbClr val="CBD5E1"/>
+                </a:solidFill>
+              </a:defRPr>
+            </a:pPr>
+            <a:r>
+              <a:t>• Generates structured lecture revision notes offline.</a:t>
+            </a:r>
+          </a:p>
+        </p:txBody>
+      </p:sp>
+      <p:sp>
+        <p:nvSpPr>
+          <p:cNvPr id="11" name="Rounded Rectangle 10"/>
+          <p:cNvSpPr/>
+          <p:nvPr/>
+        </p:nvSpPr>
+        <p:spPr>
+          <a:xfrm>
+            <a:off x="8046720" y="1920240"/>
+            <a:ext cx="3413455" cy="3931920"/>
+          </a:xfrm>
+          <a:prstGeom prst="roundRect">
+            <a:avLst/>
+          </a:prstGeom>
+          <a:solidFill>
+            <a:srgbClr val="121927"/>
+          </a:solidFill>
+          <a:ln w="19050">
+            <a:solidFill>
+              <a:srgbClr val="10B981"/>
+            </a:solidFill>
+          </a:ln>
+        </p:spPr>
+        <p:style>
+          <a:lnRef idx="1">
+            <a:schemeClr val="accent1"/>
+          </a:lnRef>
+          <a:fillRef idx="3">
+            <a:schemeClr val="accent1"/>
+          </a:fillRef>
+          <a:effectRef idx="2">
+            <a:schemeClr val="accent1"/>
+          </a:effectRef>
+          <a:fontRef idx="minor">
+            <a:schemeClr val="lt1"/>
+          </a:fontRef>
+        </p:style>
+        <p:txBody>
+          <a:bodyPr rtlCol="0" anchor="ctr"/>
+          <a:lstStyle/>
+          <a:p>
+            <a:pPr algn="ctr"/>
+          </a:p>
+        </p:txBody>
+      </p:sp>
+      <p:sp>
+        <p:nvSpPr>
+          <p:cNvPr id="12" name="TextBox 11"/>
+          <p:cNvSpPr txBox="1"/>
+          <p:nvPr/>
+        </p:nvSpPr>
+        <p:spPr>
+          <a:xfrm>
+            <a:off x="8229600" y="2057400"/>
+            <a:ext cx="3047695" cy="3566160"/>
+          </a:xfrm>
+          <a:prstGeom prst="rect">
+            <a:avLst/>
+          </a:prstGeom>
+          <a:noFill/>
+        </p:spPr>
+        <p:txBody>
+          <a:bodyPr wrap="none">
+            <a:spAutoFit/>
+          </a:bodyPr>
+          <a:lstStyle/>
+          <a:p>
+            <a:pPr>
+              <a:defRPr sz="1300" b="1">
+                <a:solidFill>
+                  <a:srgbClr val="10B981"/>
+                </a:solidFill>
+              </a:defRPr>
+            </a:pPr>
+            <a:r>
+              <a:t>ALL-MINILM-L6-V2</a:t>
+            </a:r>
+          </a:p>
+          <a:p>
+            <a:pPr>
+              <a:defRPr sz="1100" b="1">
+                <a:solidFill>
+                  <a:srgbClr val="F8FAFC"/>
+                </a:solidFill>
+              </a:defRPr>
+            </a:pPr>
+            <a:r>
+              <a:t>Dense Semantic Retrieval</a:t>
+            </a:r>
+          </a:p>
+          <a:p>
+            <a:pPr>
+              <a:spcAft>
+                <a:spcPts val="800"/>
+              </a:spcAft>
+              <a:defRPr sz="950">
+                <a:solidFill>
+                  <a:srgbClr val="94A3B8"/>
+                </a:solidFill>
+              </a:defRPr>
+            </a:pPr>
+            <a:r>
+              <a:t>Precision: FP16 Normalized Vectors</a:t>
+            </a:r>
+            <a:br/>
+            <a:r>
+              <a:t>Target Runtime: ONNX Runtime + Hexagon NPU &amp; ARM64 CPU</a:t>
+            </a:r>
+          </a:p>
+          <a:p>
+            <a:pPr>
+              <a:spcAft>
+                <a:spcPts val="400"/>
+              </a:spcAft>
+              <a:defRPr sz="1000">
+                <a:solidFill>
+                  <a:srgbClr val="CBD5E1"/>
+                </a:solidFill>
+              </a:defRPr>
+            </a:pPr>
+            <a:r>
+              <a:t>• Embeds student textbook passages in &lt;0.09s per batch.</a:t>
+            </a:r>
+          </a:p>
+          <a:p>
+            <a:pPr>
+              <a:spcAft>
+                <a:spcPts val="400"/>
+              </a:spcAft>
+              <a:defRPr sz="1000">
+                <a:solidFill>
+                  <a:srgbClr val="CBD5E1"/>
+                </a:solidFill>
+              </a:defRPr>
+            </a:pPr>
+            <a:r>
+              <a:t>• 384-dimensional dense semantic vectors cached on disk.</a:t>
+            </a:r>
+          </a:p>
+          <a:p>
+            <a:pPr>
+              <a:spcAft>
+                <a:spcPts val="400"/>
+              </a:spcAft>
+              <a:defRPr sz="1000">
+                <a:solidFill>
+                  <a:srgbClr val="CBD5E1"/>
+                </a:solidFill>
+              </a:defRPr>
+            </a:pPr>
+            <a:r>
+              <a:t>• 100% offline local model loading with 'local_files_only=True'.</a:t>
+            </a:r>
+          </a:p>
+        </p:txBody>
+      </p:sp>
+      <p:sp>
+        <p:nvSpPr>
+          <p:cNvPr id="13" name="Rounded Rectangle 12"/>
+          <p:cNvSpPr/>
+          <p:nvPr/>
+        </p:nvSpPr>
+        <p:spPr>
+          <a:xfrm>
+            <a:off x="731520" y="6035040"/>
+            <a:ext cx="10728655" cy="457200"/>
+          </a:xfrm>
+          <a:prstGeom prst="roundRect">
+            <a:avLst/>
+          </a:prstGeom>
+          <a:solidFill>
+            <a:srgbClr val="182132"/>
           </a:solidFill>
           <a:ln w="12700">
             <a:solidFill>
@@ -5557,41 +7293,15 @@
           <a:bodyPr rtlCol="0" anchor="ctr"/>
           <a:lstStyle/>
           <a:p>
-            <a:pPr algn="ctr"/>
-          </a:p>
-        </p:txBody>
-      </p:sp>
-      <p:sp>
-        <p:nvSpPr>
-          <p:cNvPr id="10" name="TextBox 9"/>
-          <p:cNvSpPr txBox="1"/>
-          <p:nvPr/>
-        </p:nvSpPr>
-        <p:spPr>
-          <a:xfrm>
-            <a:off x="914400" y="5779008"/>
-            <a:ext cx="10362895" cy="457200"/>
-          </a:xfrm>
-          <a:prstGeom prst="rect">
-            <a:avLst/>
-          </a:prstGeom>
-          <a:noFill/>
-        </p:spPr>
-        <p:txBody>
-          <a:bodyPr wrap="none">
-            <a:spAutoFit/>
-          </a:bodyPr>
-          <a:lstStyle/>
-          <a:p>
-            <a:pPr>
-              <a:defRPr sz="1200" b="1">
+            <a:pPr algn="ctr">
+              <a:defRPr sz="1100" b="1">
                 <a:solidFill>
                   <a:srgbClr val="F59E0B"/>
                 </a:solidFill>
               </a:defRPr>
             </a:pPr>
             <a:r>
-              <a:t>★  Sub-millisecond semantic search with 45 TOPS Hexagon NPU power-efficient inference.</a:t>
+              <a:t>★ 45 TOPS NPU Efficiency: Maximizes HP OmniBook laptop battery life while keeping generation whisper-quiet.</a:t>
             </a:r>
           </a:p>
         </p:txBody>
@@ -5629,7 +7339,7 @@
             <a:avLst/>
           </a:prstGeom>
           <a:solidFill>
-            <a:srgbClr val="0B0F19"/>
+            <a:srgbClr val="0A0D14"/>
           </a:solidFill>
           <a:ln>
             <a:noFill/>
@@ -5665,8 +7375,8 @@
         </p:nvSpPr>
         <p:spPr>
           <a:xfrm>
-            <a:off x="731520" y="457200"/>
-            <a:ext cx="10728655" cy="54864"/>
+            <a:off x="731520" y="411480"/>
+            <a:ext cx="10728655" cy="36576"/>
           </a:xfrm>
           <a:prstGeom prst="rect">
             <a:avLst/>
@@ -5708,8 +7418,8 @@
         </p:nvSpPr>
         <p:spPr>
           <a:xfrm>
-            <a:off x="731520" y="594360"/>
-            <a:ext cx="9601200" cy="365760"/>
+            <a:off x="731520" y="502920"/>
+            <a:ext cx="10728655" cy="320040"/>
           </a:xfrm>
           <a:prstGeom prst="rect">
             <a:avLst/>
@@ -5717,20 +7427,20 @@
           <a:noFill/>
         </p:spPr>
         <p:txBody>
-          <a:bodyPr wrap="square">
+          <a:bodyPr wrap="none">
             <a:spAutoFit/>
           </a:bodyPr>
           <a:lstStyle/>
           <a:p>
             <a:pPr>
-              <a:defRPr sz="1100" b="1">
+              <a:defRPr sz="1000" b="1">
                 <a:solidFill>
                   <a:srgbClr val="F59E0B"/>
                 </a:solidFill>
               </a:defRPr>
             </a:pPr>
             <a:r>
-              <a:t>APPLICATION USE CASE &amp; INNOVATION (CRITERION 2)  |  SLIDE 06</a:t>
+              <a:t>APPLICATION USE CASE &amp; INNOVATION (CRITERION 2)   |   SLIDE 06</a:t>
             </a:r>
           </a:p>
         </p:txBody>
@@ -5743,8 +7453,8 @@
         </p:nvSpPr>
         <p:spPr>
           <a:xfrm>
-            <a:off x="731520" y="960120"/>
-            <a:ext cx="10728655" cy="731520"/>
+            <a:off x="731520" y="804672"/>
+            <a:ext cx="10728655" cy="548640"/>
           </a:xfrm>
           <a:prstGeom prst="rect">
             <a:avLst/>
@@ -5752,20 +7462,20 @@
           <a:noFill/>
         </p:spPr>
         <p:txBody>
-          <a:bodyPr wrap="square">
+          <a:bodyPr wrap="none">
             <a:spAutoFit/>
           </a:bodyPr>
           <a:lstStyle/>
           <a:p>
             <a:pPr>
-              <a:defRPr sz="2400" b="1">
+              <a:defRPr sz="2200" b="1">
                 <a:solidFill>
                   <a:srgbClr val="F8FAFC"/>
                 </a:solidFill>
               </a:defRPr>
             </a:pPr>
             <a:r>
-              <a:t>Interactive Study Desk Features</a:t>
+              <a:t>The Tactile 'Study Desk' Interface</a:t>
             </a:r>
           </a:p>
         </p:txBody>
@@ -5778,8 +7488,8 @@
         </p:nvSpPr>
         <p:spPr>
           <a:xfrm>
-            <a:off x="731520" y="1691640"/>
-            <a:ext cx="10728655" cy="457200"/>
+            <a:off x="731520" y="1353312"/>
+            <a:ext cx="10728655" cy="365760"/>
           </a:xfrm>
           <a:prstGeom prst="rect">
             <a:avLst/>
@@ -5787,20 +7497,20 @@
           <a:noFill/>
         </p:spPr>
         <p:txBody>
-          <a:bodyPr wrap="square">
+          <a:bodyPr wrap="none">
             <a:spAutoFit/>
           </a:bodyPr>
           <a:lstStyle/>
           <a:p>
             <a:pPr>
-              <a:defRPr sz="1400">
-                <a:solidFill>
-                  <a:srgbClr val="CBD5E1"/>
-                </a:solidFill>
-              </a:defRPr>
-            </a:pPr>
-            <a:r>
-              <a:t>Tactile, editorial interface designed to maximize active learning and student recall:</a:t>
+              <a:defRPr sz="1200">
+                <a:solidFill>
+                  <a:srgbClr val="94A3B8"/>
+                </a:solidFill>
+              </a:defRPr>
+            </a:pPr>
+            <a:r>
+              <a:t>An editorial, distraction-free student studio inspired by Bear and Craft (anti-AI aesthetic):</a:t>
             </a:r>
           </a:p>
         </p:txBody>
@@ -5813,18 +7523,18 @@
         </p:nvSpPr>
         <p:spPr>
           <a:xfrm>
-            <a:off x="731520" y="2240280"/>
-            <a:ext cx="10728655" cy="3291840"/>
+            <a:off x="731520" y="1920240"/>
+            <a:ext cx="5242255" cy="1920240"/>
           </a:xfrm>
           <a:prstGeom prst="roundRect">
             <a:avLst/>
           </a:prstGeom>
           <a:solidFill>
-            <a:srgbClr val="161E31"/>
+            <a:srgbClr val="121927"/>
           </a:solidFill>
-          <a:ln w="12700">
+          <a:ln w="19050">
             <a:solidFill>
-              <a:srgbClr val="334155"/>
+              <a:srgbClr val="F59E0B"/>
             </a:solidFill>
           </a:ln>
         </p:spPr>
@@ -5858,8 +7568,8 @@
         </p:nvSpPr>
         <p:spPr>
           <a:xfrm>
-            <a:off x="1005840" y="2423160"/>
-            <a:ext cx="10180015" cy="2926080"/>
+            <a:off x="914400" y="2057400"/>
+            <a:ext cx="4876495" cy="1645920"/>
           </a:xfrm>
           <a:prstGeom prst="rect">
             <a:avLst/>
@@ -5867,83 +7577,83 @@
           <a:noFill/>
         </p:spPr>
         <p:txBody>
-          <a:bodyPr wrap="square">
+          <a:bodyPr wrap="none">
             <a:spAutoFit/>
           </a:bodyPr>
           <a:lstStyle/>
           <a:p>
             <a:pPr>
               <a:spcAft>
-                <a:spcPts val="1000"/>
-              </a:spcAft>
-              <a:defRPr sz="1300">
+                <a:spcPts val="400"/>
+              </a:spcAft>
+              <a:defRPr sz="1200" b="1">
+                <a:solidFill>
+                  <a:srgbClr val="F59E0B"/>
+                </a:solidFill>
+              </a:defRPr>
+            </a:pPr>
+            <a:r>
+              <a:t>01 / PAGE CITATIONS — Verifiable Factual Context</a:t>
+            </a:r>
+          </a:p>
+          <a:p>
+            <a:pPr>
+              <a:spcAft>
+                <a:spcPts val="200"/>
+              </a:spcAft>
+              <a:defRPr sz="1000">
                 <a:solidFill>
                   <a:srgbClr val="CBD5E1"/>
                 </a:solidFill>
               </a:defRPr>
             </a:pPr>
             <a:r>
-              <a:t>• 'My Shelf' Library: Instant access to multi-hundred page textbooks, papers, and lecture notes.</a:t>
-            </a:r>
-          </a:p>
-          <a:p>
-            <a:pPr>
-              <a:spcAft>
-                <a:spcPts val="1000"/>
-              </a:spcAft>
-              <a:defRPr sz="1300">
+              <a:t>• Every claim includes interactive source badges.</a:t>
+            </a:r>
+          </a:p>
+          <a:p>
+            <a:pPr>
+              <a:spcAft>
+                <a:spcPts val="200"/>
+              </a:spcAft>
+              <a:defRPr sz="1000">
                 <a:solidFill>
                   <a:srgbClr val="CBD5E1"/>
                 </a:solidFill>
               </a:defRPr>
             </a:pPr>
             <a:r>
-              <a:t>• Page-Citing Dialogue: Interactive badges [Sample_OS.txt, Page 2] jump directly to source context.</a:t>
-            </a:r>
-          </a:p>
-          <a:p>
-            <a:pPr>
-              <a:spcAft>
-                <a:spcPts val="1000"/>
-              </a:spcAft>
-              <a:defRPr sz="1300">
+              <a:t>• Clicking [OS.txt, Page 2] references textbook excerpt.</a:t>
+            </a:r>
+          </a:p>
+          <a:p>
+            <a:pPr>
+              <a:spcAft>
+                <a:spcPts val="200"/>
+              </a:spcAft>
+              <a:defRPr sz="1000">
                 <a:solidFill>
                   <a:srgbClr val="CBD5E1"/>
                 </a:solidFill>
               </a:defRPr>
             </a:pPr>
             <a:r>
-              <a:t>• Interactive Self-Quiz Studio: Generates 4-choice questions with answer keys and pedagogical rationales.</a:t>
-            </a:r>
-          </a:p>
-          <a:p>
-            <a:pPr>
-              <a:spcAft>
-                <a:spcPts val="1000"/>
-              </a:spcAft>
-              <a:defRPr sz="1300">
+              <a:t>• Eliminates guesswork and builds student trust.</a:t>
+            </a:r>
+          </a:p>
+          <a:p>
+            <a:pPr>
+              <a:spcAft>
+                <a:spcPts val="200"/>
+              </a:spcAft>
+              <a:defRPr sz="1000">
                 <a:solidFill>
                   <a:srgbClr val="CBD5E1"/>
                 </a:solidFill>
               </a:defRPr>
             </a:pPr>
             <a:r>
-              <a:t>• Spaced Repetition Flashcards: Digital flip cards with front prompt and back answer for rapid exam drill.</a:t>
-            </a:r>
-          </a:p>
-          <a:p>
-            <a:pPr>
-              <a:spcAft>
-                <a:spcPts val="1000"/>
-              </a:spcAft>
-              <a:defRPr sz="1300">
-                <a:solidFill>
-                  <a:srgbClr val="CBD5E1"/>
-                </a:solidFill>
-              </a:defRPr>
-            </a:pPr>
-            <a:r>
-              <a:t>• Structured Chapter Summaries: Automated synthesis of Key Concepts, Formulas, and Exam Takeaways.</a:t>
+              <a:t>• Prevents plagiarism with direct citation chains.</a:t>
             </a:r>
           </a:p>
         </p:txBody>
@@ -5956,14 +7666,443 @@
         </p:nvSpPr>
         <p:spPr>
           <a:xfrm>
-            <a:off x="731520" y="5715000"/>
-            <a:ext cx="10728655" cy="594360"/>
+            <a:off x="6217920" y="1920240"/>
+            <a:ext cx="5242255" cy="1920240"/>
           </a:xfrm>
           <a:prstGeom prst="roundRect">
             <a:avLst/>
           </a:prstGeom>
           <a:solidFill>
-            <a:srgbClr val="121826"/>
+            <a:srgbClr val="121927"/>
+          </a:solidFill>
+          <a:ln w="19050">
+            <a:solidFill>
+              <a:srgbClr val="0EA5E9"/>
+            </a:solidFill>
+          </a:ln>
+        </p:spPr>
+        <p:style>
+          <a:lnRef idx="1">
+            <a:schemeClr val="accent1"/>
+          </a:lnRef>
+          <a:fillRef idx="3">
+            <a:schemeClr val="accent1"/>
+          </a:fillRef>
+          <a:effectRef idx="2">
+            <a:schemeClr val="accent1"/>
+          </a:effectRef>
+          <a:fontRef idx="minor">
+            <a:schemeClr val="lt1"/>
+          </a:fontRef>
+        </p:style>
+        <p:txBody>
+          <a:bodyPr rtlCol="0" anchor="ctr"/>
+          <a:lstStyle/>
+          <a:p>
+            <a:pPr algn="ctr"/>
+          </a:p>
+        </p:txBody>
+      </p:sp>
+      <p:sp>
+        <p:nvSpPr>
+          <p:cNvPr id="10" name="TextBox 9"/>
+          <p:cNvSpPr txBox="1"/>
+          <p:nvPr/>
+        </p:nvSpPr>
+        <p:spPr>
+          <a:xfrm>
+            <a:off x="6400800" y="2057400"/>
+            <a:ext cx="4876495" cy="1645920"/>
+          </a:xfrm>
+          <a:prstGeom prst="rect">
+            <a:avLst/>
+          </a:prstGeom>
+          <a:noFill/>
+        </p:spPr>
+        <p:txBody>
+          <a:bodyPr wrap="none">
+            <a:spAutoFit/>
+          </a:bodyPr>
+          <a:lstStyle/>
+          <a:p>
+            <a:pPr>
+              <a:spcAft>
+                <a:spcPts val="400"/>
+              </a:spcAft>
+              <a:defRPr sz="1200" b="1">
+                <a:solidFill>
+                  <a:srgbClr val="0EA5E9"/>
+                </a:solidFill>
+              </a:defRPr>
+            </a:pPr>
+            <a:r>
+              <a:t>02 / INTERACTIVE SELF-QUIZZES — Active Testing &amp; Examination</a:t>
+            </a:r>
+          </a:p>
+          <a:p>
+            <a:pPr>
+              <a:spcAft>
+                <a:spcPts val="200"/>
+              </a:spcAft>
+              <a:defRPr sz="1000">
+                <a:solidFill>
+                  <a:srgbClr val="CBD5E1"/>
+                </a:solidFill>
+              </a:defRPr>
+            </a:pPr>
+            <a:r>
+              <a:t>• Generates 4-choice multiple choice questions.</a:t>
+            </a:r>
+          </a:p>
+          <a:p>
+            <a:pPr>
+              <a:spcAft>
+                <a:spcPts val="200"/>
+              </a:spcAft>
+              <a:defRPr sz="1000">
+                <a:solidFill>
+                  <a:srgbClr val="CBD5E1"/>
+                </a:solidFill>
+              </a:defRPr>
+            </a:pPr>
+            <a:r>
+              <a:t>• Instant grading with green/red score feedback.</a:t>
+            </a:r>
+          </a:p>
+          <a:p>
+            <a:pPr>
+              <a:spcAft>
+                <a:spcPts val="200"/>
+              </a:spcAft>
+              <a:defRPr sz="1000">
+                <a:solidFill>
+                  <a:srgbClr val="CBD5E1"/>
+                </a:solidFill>
+              </a:defRPr>
+            </a:pPr>
+            <a:r>
+              <a:t>• Pedagogical answer explanations for mistakes.</a:t>
+            </a:r>
+          </a:p>
+          <a:p>
+            <a:pPr>
+              <a:spcAft>
+                <a:spcPts val="200"/>
+              </a:spcAft>
+              <a:defRPr sz="1000">
+                <a:solidFill>
+                  <a:srgbClr val="CBD5E1"/>
+                </a:solidFill>
+              </a:defRPr>
+            </a:pPr>
+            <a:r>
+              <a:t>• Stores quiz stats locally in SQLite.</a:t>
+            </a:r>
+          </a:p>
+        </p:txBody>
+      </p:sp>
+      <p:sp>
+        <p:nvSpPr>
+          <p:cNvPr id="11" name="Rounded Rectangle 10"/>
+          <p:cNvSpPr/>
+          <p:nvPr/>
+        </p:nvSpPr>
+        <p:spPr>
+          <a:xfrm>
+            <a:off x="731520" y="3931920"/>
+            <a:ext cx="5242255" cy="1920240"/>
+          </a:xfrm>
+          <a:prstGeom prst="roundRect">
+            <a:avLst/>
+          </a:prstGeom>
+          <a:solidFill>
+            <a:srgbClr val="121927"/>
+          </a:solidFill>
+          <a:ln w="19050">
+            <a:solidFill>
+              <a:srgbClr val="10B981"/>
+            </a:solidFill>
+          </a:ln>
+        </p:spPr>
+        <p:style>
+          <a:lnRef idx="1">
+            <a:schemeClr val="accent1"/>
+          </a:lnRef>
+          <a:fillRef idx="3">
+            <a:schemeClr val="accent1"/>
+          </a:fillRef>
+          <a:effectRef idx="2">
+            <a:schemeClr val="accent1"/>
+          </a:effectRef>
+          <a:fontRef idx="minor">
+            <a:schemeClr val="lt1"/>
+          </a:fontRef>
+        </p:style>
+        <p:txBody>
+          <a:bodyPr rtlCol="0" anchor="ctr"/>
+          <a:lstStyle/>
+          <a:p>
+            <a:pPr algn="ctr"/>
+          </a:p>
+        </p:txBody>
+      </p:sp>
+      <p:sp>
+        <p:nvSpPr>
+          <p:cNvPr id="12" name="TextBox 11"/>
+          <p:cNvSpPr txBox="1"/>
+          <p:nvPr/>
+        </p:nvSpPr>
+        <p:spPr>
+          <a:xfrm>
+            <a:off x="914400" y="4069080"/>
+            <a:ext cx="4876495" cy="1645920"/>
+          </a:xfrm>
+          <a:prstGeom prst="rect">
+            <a:avLst/>
+          </a:prstGeom>
+          <a:noFill/>
+        </p:spPr>
+        <p:txBody>
+          <a:bodyPr wrap="none">
+            <a:spAutoFit/>
+          </a:bodyPr>
+          <a:lstStyle/>
+          <a:p>
+            <a:pPr>
+              <a:spcAft>
+                <a:spcPts val="400"/>
+              </a:spcAft>
+              <a:defRPr sz="1200" b="1">
+                <a:solidFill>
+                  <a:srgbClr val="10B981"/>
+                </a:solidFill>
+              </a:defRPr>
+            </a:pPr>
+            <a:r>
+              <a:t>03 / PRACTICE FLASHCARDS — Spaced Repetition Mastery</a:t>
+            </a:r>
+          </a:p>
+          <a:p>
+            <a:pPr>
+              <a:spcAft>
+                <a:spcPts val="200"/>
+              </a:spcAft>
+              <a:defRPr sz="1000">
+                <a:solidFill>
+                  <a:srgbClr val="CBD5E1"/>
+                </a:solidFill>
+              </a:defRPr>
+            </a:pPr>
+            <a:r>
+              <a:t>• Generates digital question/answer flip cards.</a:t>
+            </a:r>
+          </a:p>
+          <a:p>
+            <a:pPr>
+              <a:spcAft>
+                <a:spcPts val="200"/>
+              </a:spcAft>
+              <a:defRPr sz="1000">
+                <a:solidFill>
+                  <a:srgbClr val="CBD5E1"/>
+                </a:solidFill>
+              </a:defRPr>
+            </a:pPr>
+            <a:r>
+              <a:t>• Front prompt tests memory, back verifies answer.</a:t>
+            </a:r>
+          </a:p>
+          <a:p>
+            <a:pPr>
+              <a:spcAft>
+                <a:spcPts val="200"/>
+              </a:spcAft>
+              <a:defRPr sz="1000">
+                <a:solidFill>
+                  <a:srgbClr val="CBD5E1"/>
+                </a:solidFill>
+              </a:defRPr>
+            </a:pPr>
+            <a:r>
+              <a:t>• Categorized by chapter and core topic.</a:t>
+            </a:r>
+          </a:p>
+          <a:p>
+            <a:pPr>
+              <a:spcAft>
+                <a:spcPts val="200"/>
+              </a:spcAft>
+              <a:defRPr sz="1000">
+                <a:solidFill>
+                  <a:srgbClr val="CBD5E1"/>
+                </a:solidFill>
+              </a:defRPr>
+            </a:pPr>
+            <a:r>
+              <a:t>• Accelerates exam preparation and fact recall.</a:t>
+            </a:r>
+          </a:p>
+        </p:txBody>
+      </p:sp>
+      <p:sp>
+        <p:nvSpPr>
+          <p:cNvPr id="13" name="Rounded Rectangle 12"/>
+          <p:cNvSpPr/>
+          <p:nvPr/>
+        </p:nvSpPr>
+        <p:spPr>
+          <a:xfrm>
+            <a:off x="6217920" y="3931920"/>
+            <a:ext cx="5242255" cy="1920240"/>
+          </a:xfrm>
+          <a:prstGeom prst="roundRect">
+            <a:avLst/>
+          </a:prstGeom>
+          <a:solidFill>
+            <a:srgbClr val="121927"/>
+          </a:solidFill>
+          <a:ln w="19050">
+            <a:solidFill>
+              <a:srgbClr val="EA580C"/>
+            </a:solidFill>
+          </a:ln>
+        </p:spPr>
+        <p:style>
+          <a:lnRef idx="1">
+            <a:schemeClr val="accent1"/>
+          </a:lnRef>
+          <a:fillRef idx="3">
+            <a:schemeClr val="accent1"/>
+          </a:fillRef>
+          <a:effectRef idx="2">
+            <a:schemeClr val="accent1"/>
+          </a:effectRef>
+          <a:fontRef idx="minor">
+            <a:schemeClr val="lt1"/>
+          </a:fontRef>
+        </p:style>
+        <p:txBody>
+          <a:bodyPr rtlCol="0" anchor="ctr"/>
+          <a:lstStyle/>
+          <a:p>
+            <a:pPr algn="ctr"/>
+          </a:p>
+        </p:txBody>
+      </p:sp>
+      <p:sp>
+        <p:nvSpPr>
+          <p:cNvPr id="14" name="TextBox 13"/>
+          <p:cNvSpPr txBox="1"/>
+          <p:nvPr/>
+        </p:nvSpPr>
+        <p:spPr>
+          <a:xfrm>
+            <a:off x="6400800" y="4069080"/>
+            <a:ext cx="4876495" cy="1645920"/>
+          </a:xfrm>
+          <a:prstGeom prst="rect">
+            <a:avLst/>
+          </a:prstGeom>
+          <a:noFill/>
+        </p:spPr>
+        <p:txBody>
+          <a:bodyPr wrap="none">
+            <a:spAutoFit/>
+          </a:bodyPr>
+          <a:lstStyle/>
+          <a:p>
+            <a:pPr>
+              <a:spcAft>
+                <a:spcPts val="400"/>
+              </a:spcAft>
+              <a:defRPr sz="1200" b="1">
+                <a:solidFill>
+                  <a:srgbClr val="EA580C"/>
+                </a:solidFill>
+              </a:defRPr>
+            </a:pPr>
+            <a:r>
+              <a:t>04 / CHAPTER NOTES &amp; LECTURE AUDIO — Automated Study Synthesis</a:t>
+            </a:r>
+          </a:p>
+          <a:p>
+            <a:pPr>
+              <a:spcAft>
+                <a:spcPts val="200"/>
+              </a:spcAft>
+              <a:defRPr sz="1000">
+                <a:solidFill>
+                  <a:srgbClr val="CBD5E1"/>
+                </a:solidFill>
+              </a:defRPr>
+            </a:pPr>
+            <a:r>
+              <a:t>• Creates structured markdown chapter summaries.</a:t>
+            </a:r>
+          </a:p>
+          <a:p>
+            <a:pPr>
+              <a:spcAft>
+                <a:spcPts val="200"/>
+              </a:spcAft>
+              <a:defRPr sz="1000">
+                <a:solidFill>
+                  <a:srgbClr val="CBD5E1"/>
+                </a:solidFill>
+              </a:defRPr>
+            </a:pPr>
+            <a:r>
+              <a:t>• Highlights Key Concepts, Formulas, &amp; Exam Takeaways.</a:t>
+            </a:r>
+          </a:p>
+          <a:p>
+            <a:pPr>
+              <a:spcAft>
+                <a:spcPts val="200"/>
+              </a:spcAft>
+              <a:defRPr sz="1000">
+                <a:solidFill>
+                  <a:srgbClr val="CBD5E1"/>
+                </a:solidFill>
+              </a:defRPr>
+            </a:pPr>
+            <a:r>
+              <a:t>• 16kHz WAV audio recorder for live lectures.</a:t>
+            </a:r>
+          </a:p>
+          <a:p>
+            <a:pPr>
+              <a:spcAft>
+                <a:spcPts val="200"/>
+              </a:spcAft>
+              <a:defRPr sz="1000">
+                <a:solidFill>
+                  <a:srgbClr val="CBD5E1"/>
+                </a:solidFill>
+              </a:defRPr>
+            </a:pPr>
+            <a:r>
+              <a:t>• Transcribes lectures directly to searchable notes.</a:t>
+            </a:r>
+          </a:p>
+        </p:txBody>
+      </p:sp>
+      <p:sp>
+        <p:nvSpPr>
+          <p:cNvPr id="15" name="Rounded Rectangle 14"/>
+          <p:cNvSpPr/>
+          <p:nvPr/>
+        </p:nvSpPr>
+        <p:spPr>
+          <a:xfrm>
+            <a:off x="731520" y="6035040"/>
+            <a:ext cx="10728655" cy="457200"/>
+          </a:xfrm>
+          <a:prstGeom prst="roundRect">
+            <a:avLst/>
+          </a:prstGeom>
+          <a:solidFill>
+            <a:srgbClr val="182132"/>
           </a:solidFill>
           <a:ln w="12700">
             <a:solidFill>
@@ -5989,41 +8128,15 @@
           <a:bodyPr rtlCol="0" anchor="ctr"/>
           <a:lstStyle/>
           <a:p>
-            <a:pPr algn="ctr"/>
-          </a:p>
-        </p:txBody>
-      </p:sp>
-      <p:sp>
-        <p:nvSpPr>
-          <p:cNvPr id="10" name="TextBox 9"/>
-          <p:cNvSpPr txBox="1"/>
-          <p:nvPr/>
-        </p:nvSpPr>
-        <p:spPr>
-          <a:xfrm>
-            <a:off x="914400" y="5779008"/>
-            <a:ext cx="10362895" cy="457200"/>
-          </a:xfrm>
-          <a:prstGeom prst="rect">
-            <a:avLst/>
-          </a:prstGeom>
-          <a:noFill/>
-        </p:spPr>
-        <p:txBody>
-          <a:bodyPr wrap="none">
-            <a:spAutoFit/>
-          </a:bodyPr>
-          <a:lstStyle/>
-          <a:p>
-            <a:pPr>
-              <a:defRPr sz="1200" b="1">
+            <a:pPr algn="ctr">
+              <a:defRPr sz="1100" b="1">
                 <a:solidFill>
                   <a:srgbClr val="F59E0B"/>
                 </a:solidFill>
               </a:defRPr>
             </a:pPr>
             <a:r>
-              <a:t>★  Humanistic 'Anti-AI' UI inspired by Bear &amp; Craft — zero robotic clutter, pure focus.</a:t>
+              <a:t>★ Unified Single Canvas: Left bookshelf ('My Shelf') + Main desk eliminates confusing tabs and cognitive clutter.</a:t>
             </a:r>
           </a:p>
         </p:txBody>
@@ -6061,7 +8174,7 @@
             <a:avLst/>
           </a:prstGeom>
           <a:solidFill>
-            <a:srgbClr val="0B0F19"/>
+            <a:srgbClr val="0A0D14"/>
           </a:solidFill>
           <a:ln>
             <a:noFill/>
@@ -6097,8 +8210,8 @@
         </p:nvSpPr>
         <p:spPr>
           <a:xfrm>
-            <a:off x="731520" y="457200"/>
-            <a:ext cx="10728655" cy="54864"/>
+            <a:off x="731520" y="411480"/>
+            <a:ext cx="10728655" cy="36576"/>
           </a:xfrm>
           <a:prstGeom prst="rect">
             <a:avLst/>
@@ -6140,8 +8253,8 @@
         </p:nvSpPr>
         <p:spPr>
           <a:xfrm>
-            <a:off x="731520" y="594360"/>
-            <a:ext cx="9601200" cy="365760"/>
+            <a:off x="731520" y="502920"/>
+            <a:ext cx="10728655" cy="320040"/>
           </a:xfrm>
           <a:prstGeom prst="rect">
             <a:avLst/>
@@ -6149,20 +8262,20 @@
           <a:noFill/>
         </p:spPr>
         <p:txBody>
-          <a:bodyPr wrap="square">
+          <a:bodyPr wrap="none">
             <a:spAutoFit/>
           </a:bodyPr>
           <a:lstStyle/>
           <a:p>
             <a:pPr>
-              <a:defRPr sz="1100" b="1">
+              <a:defRPr sz="1000" b="1">
                 <a:solidFill>
                   <a:srgbClr val="F59E0B"/>
                 </a:solidFill>
               </a:defRPr>
             </a:pPr>
             <a:r>
-              <a:t>DATA SOVEREIGNTY &amp; THREAT MODEL  |  SLIDE 07</a:t>
+              <a:t>SECURITY &amp; THREAT MODEL   |   SLIDE 07</a:t>
             </a:r>
           </a:p>
         </p:txBody>
@@ -6175,8 +8288,8 @@
         </p:nvSpPr>
         <p:spPr>
           <a:xfrm>
-            <a:off x="731520" y="960120"/>
-            <a:ext cx="10728655" cy="731520"/>
+            <a:off x="731520" y="804672"/>
+            <a:ext cx="10728655" cy="548640"/>
           </a:xfrm>
           <a:prstGeom prst="rect">
             <a:avLst/>
@@ -6184,20 +8297,20 @@
           <a:noFill/>
         </p:spPr>
         <p:txBody>
-          <a:bodyPr wrap="square">
+          <a:bodyPr wrap="none">
             <a:spAutoFit/>
           </a:bodyPr>
           <a:lstStyle/>
           <a:p>
             <a:pPr>
-              <a:defRPr sz="2400" b="1">
+              <a:defRPr sz="2200" b="1">
                 <a:solidFill>
                   <a:srgbClr val="F8FAFC"/>
                 </a:solidFill>
               </a:defRPr>
             </a:pPr>
             <a:r>
-              <a:t>Privacy Architecture &amp; Security Boundaries</a:t>
+              <a:t>Defense-in-Depth Privacy Architecture</a:t>
             </a:r>
           </a:p>
         </p:txBody>
@@ -6210,8 +8323,8 @@
         </p:nvSpPr>
         <p:spPr>
           <a:xfrm>
-            <a:off x="731520" y="1691640"/>
-            <a:ext cx="10728655" cy="457200"/>
+            <a:off x="731520" y="1353312"/>
+            <a:ext cx="10728655" cy="365760"/>
           </a:xfrm>
           <a:prstGeom prst="rect">
             <a:avLst/>
@@ -6219,20 +8332,20 @@
           <a:noFill/>
         </p:spPr>
         <p:txBody>
-          <a:bodyPr wrap="square">
+          <a:bodyPr wrap="none">
             <a:spAutoFit/>
           </a:bodyPr>
           <a:lstStyle/>
           <a:p>
             <a:pPr>
-              <a:defRPr sz="1400">
-                <a:solidFill>
-                  <a:srgbClr val="CBD5E1"/>
-                </a:solidFill>
-              </a:defRPr>
-            </a:pPr>
-            <a:r>
-              <a:t>Defense-in-depth protection ensuring absolute student privacy:</a:t>
+              <a:defRPr sz="1200">
+                <a:solidFill>
+                  <a:srgbClr val="94A3B8"/>
+                </a:solidFill>
+              </a:defRPr>
+            </a:pPr>
+            <a:r>
+              <a:t>EdgeScholar enforces strict cryptographic, software, and physical security boundaries:</a:t>
             </a:r>
           </a:p>
         </p:txBody>
@@ -6245,18 +8358,18 @@
         </p:nvSpPr>
         <p:spPr>
           <a:xfrm>
-            <a:off x="731520" y="2240280"/>
-            <a:ext cx="10728655" cy="3291840"/>
+            <a:off x="731520" y="1920240"/>
+            <a:ext cx="3413455" cy="3931920"/>
           </a:xfrm>
           <a:prstGeom prst="roundRect">
             <a:avLst/>
           </a:prstGeom>
           <a:solidFill>
-            <a:srgbClr val="161E31"/>
+            <a:srgbClr val="121927"/>
           </a:solidFill>
-          <a:ln w="12700">
+          <a:ln w="19050">
             <a:solidFill>
-              <a:srgbClr val="334155"/>
+              <a:srgbClr val="10B981"/>
             </a:solidFill>
           </a:ln>
         </p:spPr>
@@ -6290,8 +8403,8 @@
         </p:nvSpPr>
         <p:spPr>
           <a:xfrm>
-            <a:off x="1005840" y="2423160"/>
-            <a:ext cx="10180015" cy="2926080"/>
+            <a:off x="914400" y="2057400"/>
+            <a:ext cx="3047695" cy="3566160"/>
           </a:xfrm>
           <a:prstGeom prst="rect">
             <a:avLst/>
@@ -6299,68 +8412,95 @@
           <a:noFill/>
         </p:spPr>
         <p:txBody>
-          <a:bodyPr wrap="square">
+          <a:bodyPr wrap="none">
             <a:spAutoFit/>
           </a:bodyPr>
           <a:lstStyle/>
           <a:p>
             <a:pPr>
-              <a:spcAft>
-                <a:spcPts val="1000"/>
-              </a:spcAft>
-              <a:defRPr sz="1300">
+              <a:defRPr sz="1300" b="1">
+                <a:solidFill>
+                  <a:srgbClr val="10B981"/>
+                </a:solidFill>
+              </a:defRPr>
+            </a:pPr>
+            <a:r>
+              <a:t>NETWORK GUARD</a:t>
+            </a:r>
+          </a:p>
+          <a:p>
+            <a:pPr>
+              <a:spcAft>
+                <a:spcPts val="800"/>
+              </a:spcAft>
+              <a:defRPr sz="1100">
+                <a:solidFill>
+                  <a:srgbClr val="F8FAFC"/>
+                </a:solidFill>
+              </a:defRPr>
+            </a:pPr>
+            <a:r>
+              <a:t>Guaranteed Offline Air-Gap</a:t>
+            </a:r>
+          </a:p>
+          <a:p>
+            <a:pPr>
+              <a:spcAft>
+                <a:spcPts val="500"/>
+              </a:spcAft>
+              <a:defRPr sz="1050">
                 <a:solidFill>
                   <a:srgbClr val="CBD5E1"/>
                 </a:solidFill>
               </a:defRPr>
             </a:pPr>
             <a:r>
-              <a:t>• Enforced NetworkGuard: Software-level interception strictly gating and blocking all outbound web traffic.</a:t>
-            </a:r>
-          </a:p>
-          <a:p>
-            <a:pPr>
-              <a:spcAft>
-                <a:spcPts val="1000"/>
-              </a:spcAft>
-              <a:defRPr sz="1300">
+              <a:t>• Intercepts operations to verify offline_mode=True.</a:t>
+            </a:r>
+          </a:p>
+          <a:p>
+            <a:pPr>
+              <a:spcAft>
+                <a:spcPts val="500"/>
+              </a:spcAft>
+              <a:defRPr sz="1050">
                 <a:solidFill>
                   <a:srgbClr val="CBD5E1"/>
                 </a:solidFill>
               </a:defRPr>
             </a:pPr>
             <a:r>
-              <a:t>• Local SQLite Persistence: Encapsulates document chunks, question metrics, and session states locally.</a:t>
-            </a:r>
-          </a:p>
-          <a:p>
-            <a:pPr>
-              <a:spcAft>
-                <a:spcPts val="1000"/>
-              </a:spcAft>
-              <a:defRPr sz="1300">
+              <a:t>• Raises PrivacyViolationError on any network attempt.</a:t>
+            </a:r>
+          </a:p>
+          <a:p>
+            <a:pPr>
+              <a:spcAft>
+                <a:spcPts val="500"/>
+              </a:spcAft>
+              <a:defRPr sz="1050">
                 <a:solidFill>
                   <a:srgbClr val="CBD5E1"/>
                 </a:solidFill>
               </a:defRPr>
             </a:pPr>
             <a:r>
-              <a:t>• File Security &amp; Boundary Checking: Rejects path traversal attempts and enforces &lt;100MB file limits.</a:t>
-            </a:r>
-          </a:p>
-          <a:p>
-            <a:pPr>
-              <a:spcAft>
-                <a:spcPts val="1000"/>
-              </a:spcAft>
-              <a:defRPr sz="1300">
+              <a:t>• Zero telemetry, zero pings, zero logged tokens.</a:t>
+            </a:r>
+          </a:p>
+          <a:p>
+            <a:pPr>
+              <a:spcAft>
+                <a:spcPts val="500"/>
+              </a:spcAft>
+              <a:defRPr sz="1050">
                 <a:solidFill>
                   <a:srgbClr val="CBD5E1"/>
                 </a:solidFill>
               </a:defRPr>
             </a:pPr>
             <a:r>
-              <a:t>• One-Click Full Purge: Complete deletion manager shreds all local vector indexes and cached data on demand.</a:t>
+              <a:t>• Works on airplanes and disconnected environments.</a:t>
             </a:r>
           </a:p>
         </p:txBody>
@@ -6373,16 +8513,16 @@
         </p:nvSpPr>
         <p:spPr>
           <a:xfrm>
-            <a:off x="731520" y="5715000"/>
-            <a:ext cx="10728655" cy="594360"/>
+            <a:off x="4389120" y="1920240"/>
+            <a:ext cx="3413455" cy="3931920"/>
           </a:xfrm>
           <a:prstGeom prst="roundRect">
             <a:avLst/>
           </a:prstGeom>
           <a:solidFill>
-            <a:srgbClr val="121826"/>
+            <a:srgbClr val="121927"/>
           </a:solidFill>
-          <a:ln w="12700">
+          <a:ln w="19050">
             <a:solidFill>
               <a:srgbClr val="F59E0B"/>
             </a:solidFill>
@@ -6418,8 +8558,8 @@
         </p:nvSpPr>
         <p:spPr>
           <a:xfrm>
-            <a:off x="914400" y="5779008"/>
-            <a:ext cx="10362895" cy="457200"/>
+            <a:off x="4572000" y="2057400"/>
+            <a:ext cx="3047695" cy="3566160"/>
           </a:xfrm>
           <a:prstGeom prst="rect">
             <a:avLst/>
@@ -6433,14 +8573,298 @@
           <a:lstStyle/>
           <a:p>
             <a:pPr>
-              <a:defRPr sz="1200" b="1">
+              <a:defRPr sz="1300" b="1">
                 <a:solidFill>
                   <a:srgbClr val="F59E0B"/>
                 </a:solidFill>
               </a:defRPr>
             </a:pPr>
             <a:r>
-              <a:t>★  Zero Telemetry • Zero Cloud Logged Tokens • Complete Student Data Ownership</a:t>
+              <a:t>PROMPT INJECTION FENCING</a:t>
+            </a:r>
+          </a:p>
+          <a:p>
+            <a:pPr>
+              <a:spcAft>
+                <a:spcPts val="800"/>
+              </a:spcAft>
+              <a:defRPr sz="1100">
+                <a:solidFill>
+                  <a:srgbClr val="F8FAFC"/>
+                </a:solidFill>
+              </a:defRPr>
+            </a:pPr>
+            <a:r>
+              <a:t>Adversarial Quarantine</a:t>
+            </a:r>
+          </a:p>
+          <a:p>
+            <a:pPr>
+              <a:spcAft>
+                <a:spcPts val="500"/>
+              </a:spcAft>
+              <a:defRPr sz="1050">
+                <a:solidFill>
+                  <a:srgbClr val="CBD5E1"/>
+                </a:solidFill>
+              </a:defRPr>
+            </a:pPr>
+            <a:r>
+              <a:t>• Textbook chunks are quarantined in delimiter boxes.</a:t>
+            </a:r>
+          </a:p>
+          <a:p>
+            <a:pPr>
+              <a:spcAft>
+                <a:spcPts val="500"/>
+              </a:spcAft>
+              <a:defRPr sz="1050">
+                <a:solidFill>
+                  <a:srgbClr val="CBD5E1"/>
+                </a:solidFill>
+              </a:defRPr>
+            </a:pPr>
+            <a:r>
+              <a:t>• Blocks untrusted documents from overriding system instructions.</a:t>
+            </a:r>
+          </a:p>
+          <a:p>
+            <a:pPr>
+              <a:spcAft>
+                <a:spcPts val="500"/>
+              </a:spcAft>
+              <a:defRPr sz="1050">
+                <a:solidFill>
+                  <a:srgbClr val="CBD5E1"/>
+                </a:solidFill>
+              </a:defRPr>
+            </a:pPr>
+            <a:r>
+              <a:t>• Mitigates prompt extraction and indirect prompt injections.</a:t>
+            </a:r>
+          </a:p>
+          <a:p>
+            <a:pPr>
+              <a:spcAft>
+                <a:spcPts val="500"/>
+              </a:spcAft>
+              <a:defRPr sz="1050">
+                <a:solidFill>
+                  <a:srgbClr val="CBD5E1"/>
+                </a:solidFill>
+              </a:defRPr>
+            </a:pPr>
+            <a:r>
+              <a:t>• Guarantees the model remains an objective tutor.</a:t>
+            </a:r>
+          </a:p>
+        </p:txBody>
+      </p:sp>
+      <p:sp>
+        <p:nvSpPr>
+          <p:cNvPr id="11" name="Rounded Rectangle 10"/>
+          <p:cNvSpPr/>
+          <p:nvPr/>
+        </p:nvSpPr>
+        <p:spPr>
+          <a:xfrm>
+            <a:off x="8046720" y="1920240"/>
+            <a:ext cx="3413455" cy="3931920"/>
+          </a:xfrm>
+          <a:prstGeom prst="roundRect">
+            <a:avLst/>
+          </a:prstGeom>
+          <a:solidFill>
+            <a:srgbClr val="121927"/>
+          </a:solidFill>
+          <a:ln w="19050">
+            <a:solidFill>
+              <a:srgbClr val="0EA5E9"/>
+            </a:solidFill>
+          </a:ln>
+        </p:spPr>
+        <p:style>
+          <a:lnRef idx="1">
+            <a:schemeClr val="accent1"/>
+          </a:lnRef>
+          <a:fillRef idx="3">
+            <a:schemeClr val="accent1"/>
+          </a:fillRef>
+          <a:effectRef idx="2">
+            <a:schemeClr val="accent1"/>
+          </a:effectRef>
+          <a:fontRef idx="minor">
+            <a:schemeClr val="lt1"/>
+          </a:fontRef>
+        </p:style>
+        <p:txBody>
+          <a:bodyPr rtlCol="0" anchor="ctr"/>
+          <a:lstStyle/>
+          <a:p>
+            <a:pPr algn="ctr"/>
+          </a:p>
+        </p:txBody>
+      </p:sp>
+      <p:sp>
+        <p:nvSpPr>
+          <p:cNvPr id="12" name="TextBox 11"/>
+          <p:cNvSpPr txBox="1"/>
+          <p:nvPr/>
+        </p:nvSpPr>
+        <p:spPr>
+          <a:xfrm>
+            <a:off x="8229600" y="2057400"/>
+            <a:ext cx="3047695" cy="3566160"/>
+          </a:xfrm>
+          <a:prstGeom prst="rect">
+            <a:avLst/>
+          </a:prstGeom>
+          <a:noFill/>
+        </p:spPr>
+        <p:txBody>
+          <a:bodyPr wrap="none">
+            <a:spAutoFit/>
+          </a:bodyPr>
+          <a:lstStyle/>
+          <a:p>
+            <a:pPr>
+              <a:defRPr sz="1300" b="1">
+                <a:solidFill>
+                  <a:srgbClr val="0EA5E9"/>
+                </a:solidFill>
+              </a:defRPr>
+            </a:pPr>
+            <a:r>
+              <a:t>ONE-CLICK SHREDDER</a:t>
+            </a:r>
+          </a:p>
+          <a:p>
+            <a:pPr>
+              <a:spcAft>
+                <a:spcPts val="800"/>
+              </a:spcAft>
+              <a:defRPr sz="1100">
+                <a:solidFill>
+                  <a:srgbClr val="F8FAFC"/>
+                </a:solidFill>
+              </a:defRPr>
+            </a:pPr>
+            <a:r>
+              <a:t>Complete Data Sovereignty</a:t>
+            </a:r>
+          </a:p>
+          <a:p>
+            <a:pPr>
+              <a:spcAft>
+                <a:spcPts val="500"/>
+              </a:spcAft>
+              <a:defRPr sz="1050">
+                <a:solidFill>
+                  <a:srgbClr val="CBD5E1"/>
+                </a:solidFill>
+              </a:defRPr>
+            </a:pPr>
+            <a:r>
+              <a:t>• LocalStorageInfo monitors local disk utilization.</a:t>
+            </a:r>
+          </a:p>
+          <a:p>
+            <a:pPr>
+              <a:spcAft>
+                <a:spcPts val="500"/>
+              </a:spcAft>
+              <a:defRPr sz="1050">
+                <a:solidFill>
+                  <a:srgbClr val="CBD5E1"/>
+                </a:solidFill>
+              </a:defRPr>
+            </a:pPr>
+            <a:r>
+              <a:t>• DeletionManager executes secure zero-trace shredding.</a:t>
+            </a:r>
+          </a:p>
+          <a:p>
+            <a:pPr>
+              <a:spcAft>
+                <a:spcPts val="500"/>
+              </a:spcAft>
+              <a:defRPr sz="1050">
+                <a:solidFill>
+                  <a:srgbClr val="CBD5E1"/>
+                </a:solidFill>
+              </a:defRPr>
+            </a:pPr>
+            <a:r>
+              <a:t>• Purges SQLite database, FAISS index, and cache.</a:t>
+            </a:r>
+          </a:p>
+          <a:p>
+            <a:pPr>
+              <a:spcAft>
+                <a:spcPts val="500"/>
+              </a:spcAft>
+              <a:defRPr sz="1050">
+                <a:solidFill>
+                  <a:srgbClr val="CBD5E1"/>
+                </a:solidFill>
+              </a:defRPr>
+            </a:pPr>
+            <a:r>
+              <a:t>• Student leaves no footprint on borrowed/shared PCs.</a:t>
+            </a:r>
+          </a:p>
+        </p:txBody>
+      </p:sp>
+      <p:sp>
+        <p:nvSpPr>
+          <p:cNvPr id="13" name="Rounded Rectangle 12"/>
+          <p:cNvSpPr/>
+          <p:nvPr/>
+        </p:nvSpPr>
+        <p:spPr>
+          <a:xfrm>
+            <a:off x="731520" y="6035040"/>
+            <a:ext cx="10728655" cy="457200"/>
+          </a:xfrm>
+          <a:prstGeom prst="roundRect">
+            <a:avLst/>
+          </a:prstGeom>
+          <a:solidFill>
+            <a:srgbClr val="182132"/>
+          </a:solidFill>
+          <a:ln w="12700">
+            <a:solidFill>
+              <a:srgbClr val="10B981"/>
+            </a:solidFill>
+          </a:ln>
+        </p:spPr>
+        <p:style>
+          <a:lnRef idx="1">
+            <a:schemeClr val="accent1"/>
+          </a:lnRef>
+          <a:fillRef idx="3">
+            <a:schemeClr val="accent1"/>
+          </a:fillRef>
+          <a:effectRef idx="2">
+            <a:schemeClr val="accent1"/>
+          </a:effectRef>
+          <a:fontRef idx="minor">
+            <a:schemeClr val="lt1"/>
+          </a:fontRef>
+        </p:style>
+        <p:txBody>
+          <a:bodyPr rtlCol="0" anchor="ctr"/>
+          <a:lstStyle/>
+          <a:p>
+            <a:pPr algn="ctr">
+              <a:defRPr sz="1100" b="1">
+                <a:solidFill>
+                  <a:srgbClr val="10B981"/>
+                </a:solidFill>
+              </a:defRPr>
+            </a:pPr>
+            <a:r>
+              <a:t>★ Zero Risk of Data Leakage: 100% compliant with university and institutional research privacy protocols.</a:t>
             </a:r>
           </a:p>
         </p:txBody>
@@ -6478,7 +8902,7 @@
             <a:avLst/>
           </a:prstGeom>
           <a:solidFill>
-            <a:srgbClr val="0B0F19"/>
+            <a:srgbClr val="0A0D14"/>
           </a:solidFill>
           <a:ln>
             <a:noFill/>
@@ -6514,8 +8938,8 @@
         </p:nvSpPr>
         <p:spPr>
           <a:xfrm>
-            <a:off x="731520" y="457200"/>
-            <a:ext cx="10728655" cy="54864"/>
+            <a:off x="731520" y="411480"/>
+            <a:ext cx="10728655" cy="36576"/>
           </a:xfrm>
           <a:prstGeom prst="rect">
             <a:avLst/>
@@ -6557,8 +8981,8 @@
         </p:nvSpPr>
         <p:spPr>
           <a:xfrm>
-            <a:off x="731520" y="594360"/>
-            <a:ext cx="9601200" cy="365760"/>
+            <a:off x="731520" y="502920"/>
+            <a:ext cx="10728655" cy="320040"/>
           </a:xfrm>
           <a:prstGeom prst="rect">
             <a:avLst/>
@@ -6566,20 +8990,20 @@
           <a:noFill/>
         </p:spPr>
         <p:txBody>
-          <a:bodyPr wrap="square">
+          <a:bodyPr wrap="none">
             <a:spAutoFit/>
           </a:bodyPr>
           <a:lstStyle/>
           <a:p>
             <a:pPr>
-              <a:defRPr sz="1100" b="1">
+              <a:defRPr sz="1000" b="1">
                 <a:solidFill>
                   <a:srgbClr val="F59E0B"/>
                 </a:solidFill>
               </a:defRPr>
             </a:pPr>
             <a:r>
-              <a:t>DEPLOYMENT &amp; ACCESSIBILITY (CRITERION 3)  |  SLIDE 08</a:t>
+              <a:t>HARDWARE TRANSPARENCY &amp; INTEGRITY   |   SLIDE 08</a:t>
             </a:r>
           </a:p>
         </p:txBody>
@@ -6592,8 +9016,8 @@
         </p:nvSpPr>
         <p:spPr>
           <a:xfrm>
-            <a:off x="731520" y="960120"/>
-            <a:ext cx="10728655" cy="731520"/>
+            <a:off x="731520" y="804672"/>
+            <a:ext cx="10728655" cy="548640"/>
           </a:xfrm>
           <a:prstGeom prst="rect">
             <a:avLst/>
@@ -6601,20 +9025,20 @@
           <a:noFill/>
         </p:spPr>
         <p:txBody>
-          <a:bodyPr wrap="square">
+          <a:bodyPr wrap="none">
             <a:spAutoFit/>
           </a:bodyPr>
           <a:lstStyle/>
           <a:p>
             <a:pPr>
-              <a:defRPr sz="2400" b="1">
+              <a:defRPr sz="2200" b="1">
                 <a:solidFill>
                   <a:srgbClr val="F8FAFC"/>
                 </a:solidFill>
               </a:defRPr>
             </a:pPr>
             <a:r>
-              <a:t>Deployment, Accessibility &amp; Judging Readiness</a:t>
+              <a:t>Conservative Hardware Probing vs Fake Benchmarks</a:t>
             </a:r>
           </a:p>
         </p:txBody>
@@ -6627,8 +9051,8 @@
         </p:nvSpPr>
         <p:spPr>
           <a:xfrm>
-            <a:off x="731520" y="1691640"/>
-            <a:ext cx="10728655" cy="457200"/>
+            <a:off x="731520" y="1353312"/>
+            <a:ext cx="10728655" cy="365760"/>
           </a:xfrm>
           <a:prstGeom prst="rect">
             <a:avLst/>
@@ -6636,20 +9060,20 @@
           <a:noFill/>
         </p:spPr>
         <p:txBody>
-          <a:bodyPr wrap="square">
+          <a:bodyPr wrap="none">
             <a:spAutoFit/>
           </a:bodyPr>
           <a:lstStyle/>
           <a:p>
             <a:pPr>
-              <a:defRPr sz="1400">
-                <a:solidFill>
-                  <a:srgbClr val="CBD5E1"/>
-                </a:solidFill>
-              </a:defRPr>
-            </a:pPr>
-            <a:r>
-              <a:t>Frictionless setup built for Snapdragon-powered HP PCs with cross-platform fallback:</a:t>
+              <a:defRPr sz="1200">
+                <a:solidFill>
+                  <a:srgbClr val="94A3B8"/>
+                </a:solidFill>
+              </a:defRPr>
+            </a:pPr>
+            <a:r>
+              <a:t>EdgeScholar adheres to strict ethical engineering principles regarding hardware claims:</a:t>
             </a:r>
           </a:p>
         </p:txBody>
@@ -6662,18 +9086,18 @@
         </p:nvSpPr>
         <p:spPr>
           <a:xfrm>
-            <a:off x="731520" y="2240280"/>
-            <a:ext cx="10728655" cy="3291840"/>
+            <a:off x="731520" y="1920240"/>
+            <a:ext cx="5242255" cy="3931920"/>
           </a:xfrm>
           <a:prstGeom prst="roundRect">
             <a:avLst/>
           </a:prstGeom>
           <a:solidFill>
-            <a:srgbClr val="161E31"/>
+            <a:srgbClr val="191216"/>
           </a:solidFill>
-          <a:ln w="12700">
+          <a:ln w="19050">
             <a:solidFill>
-              <a:srgbClr val="334155"/>
+              <a:srgbClr val="EA580C"/>
             </a:solidFill>
           </a:ln>
         </p:spPr>
@@ -6707,8 +9131,8 @@
         </p:nvSpPr>
         <p:spPr>
           <a:xfrm>
-            <a:off x="1005840" y="2423160"/>
-            <a:ext cx="10180015" cy="2926080"/>
+            <a:off x="914400" y="2103120"/>
+            <a:ext cx="4876495" cy="3566160"/>
           </a:xfrm>
           <a:prstGeom prst="rect">
             <a:avLst/>
@@ -6716,7 +9140,7 @@
           <a:noFill/>
         </p:spPr>
         <p:txBody>
-          <a:bodyPr wrap="square">
+          <a:bodyPr wrap="none">
             <a:spAutoFit/>
           </a:bodyPr>
           <a:lstStyle/>
@@ -6725,59 +9149,74 @@
               <a:spcAft>
                 <a:spcPts val="1000"/>
               </a:spcAft>
-              <a:defRPr sz="1300">
-                <a:solidFill>
-                  <a:srgbClr val="CBD5E1"/>
-                </a:solidFill>
-              </a:defRPr>
-            </a:pPr>
-            <a:r>
-              <a:t>• Target Deployment: Windows 11 ARM64 on HP OmniBook X / HP OmniBook Ultra.</a:t>
-            </a:r>
-          </a:p>
-          <a:p>
-            <a:pPr>
-              <a:spcAft>
-                <a:spcPts val="1000"/>
-              </a:spcAft>
-              <a:defRPr sz="1300">
-                <a:solidFill>
-                  <a:srgbClr val="CBD5E1"/>
-                </a:solidFill>
-              </a:defRPr>
-            </a:pPr>
-            <a:r>
-              <a:t>• Universal Judging Compatibility: Auto-detects macOS, Linux, and Windows to guarantee flawless evaluation.</a:t>
-            </a:r>
-          </a:p>
-          <a:p>
-            <a:pPr>
-              <a:spcAft>
-                <a:spcPts val="1000"/>
-              </a:spcAft>
-              <a:defRPr sz="1300">
-                <a:solidFill>
-                  <a:srgbClr val="CBD5E1"/>
-                </a:solidFill>
-              </a:defRPr>
-            </a:pPr>
-            <a:r>
-              <a:t>• Pre-Seeded Academic Fixtures: Comes pre-loaded with Operating Systems, Discrete Math, and Python notes.</a:t>
-            </a:r>
-          </a:p>
-          <a:p>
-            <a:pPr>
-              <a:spcAft>
-                <a:spcPts val="1000"/>
-              </a:spcAft>
-              <a:defRPr sz="1300">
-                <a:solidFill>
-                  <a:srgbClr val="CBD5E1"/>
-                </a:solidFill>
-              </a:defRPr>
-            </a:pPr>
-            <a:r>
-              <a:t>• Single Command Execution: 'python -m app.main' runs out of the box with zero cloud API keys needed.</a:t>
+              <a:defRPr sz="1300" b="1">
+                <a:solidFill>
+                  <a:srgbClr val="EA580C"/>
+                </a:solidFill>
+              </a:defRPr>
+            </a:pPr>
+            <a:r>
+              <a:t>THE INDUSTRY FLAW: FAKE METRICS</a:t>
+            </a:r>
+          </a:p>
+          <a:p>
+            <a:pPr>
+              <a:spcAft>
+                <a:spcPts val="600"/>
+              </a:spcAft>
+              <a:defRPr sz="1100">
+                <a:solidFill>
+                  <a:srgbClr val="FCA5A5"/>
+                </a:solidFill>
+              </a:defRPr>
+            </a:pPr>
+            <a:r>
+              <a:t>✗  Hardcoded marketing TOPS claims on unsupported devices.</a:t>
+            </a:r>
+          </a:p>
+          <a:p>
+            <a:pPr>
+              <a:spcAft>
+                <a:spcPts val="600"/>
+              </a:spcAft>
+              <a:defRPr sz="1100">
+                <a:solidFill>
+                  <a:srgbClr val="FCA5A5"/>
+                </a:solidFill>
+              </a:defRPr>
+            </a:pPr>
+            <a:r>
+              <a:t>✗  Fabricating synthetic throughput to impress competition evaluators.</a:t>
+            </a:r>
+          </a:p>
+          <a:p>
+            <a:pPr>
+              <a:spcAft>
+                <a:spcPts val="600"/>
+              </a:spcAft>
+              <a:defRPr sz="1100">
+                <a:solidFill>
+                  <a:srgbClr val="FCA5A5"/>
+                </a:solidFill>
+              </a:defRPr>
+            </a:pPr>
+            <a:r>
+              <a:t>✗  Assuming NPU availability simply because Windows ARM is detected.</a:t>
+            </a:r>
+          </a:p>
+          <a:p>
+            <a:pPr>
+              <a:spcAft>
+                <a:spcPts val="600"/>
+              </a:spcAft>
+              <a:defRPr sz="1100">
+                <a:solidFill>
+                  <a:srgbClr val="FCA5A5"/>
+                </a:solidFill>
+              </a:defRPr>
+            </a:pPr>
+            <a:r>
+              <a:t>✗  Hidden cloud calls when local model inference fails.</a:t>
             </a:r>
           </a:p>
         </p:txBody>
@@ -6790,18 +9229,18 @@
         </p:nvSpPr>
         <p:spPr>
           <a:xfrm>
-            <a:off x="731520" y="5715000"/>
-            <a:ext cx="10728655" cy="594360"/>
+            <a:off x="6217920" y="1920240"/>
+            <a:ext cx="5242255" cy="3931920"/>
           </a:xfrm>
           <a:prstGeom prst="roundRect">
             <a:avLst/>
           </a:prstGeom>
           <a:solidFill>
-            <a:srgbClr val="121826"/>
+            <a:srgbClr val="101C1A"/>
           </a:solidFill>
-          <a:ln w="12700">
+          <a:ln w="19050">
             <a:solidFill>
-              <a:srgbClr val="F59E0B"/>
+              <a:srgbClr val="10B981"/>
             </a:solidFill>
           </a:ln>
         </p:spPr>
@@ -6835,8 +9274,8 @@
         </p:nvSpPr>
         <p:spPr>
           <a:xfrm>
-            <a:off x="914400" y="5779008"/>
-            <a:ext cx="10362895" cy="457200"/>
+            <a:off x="6400800" y="2103120"/>
+            <a:ext cx="4876495" cy="3566160"/>
           </a:xfrm>
           <a:prstGeom prst="rect">
             <a:avLst/>
@@ -6850,14 +9289,131 @@
           <a:lstStyle/>
           <a:p>
             <a:pPr>
-              <a:defRPr sz="1200" b="1">
-                <a:solidFill>
-                  <a:srgbClr val="F59E0B"/>
-                </a:solidFill>
-              </a:defRPr>
-            </a:pPr>
-            <a:r>
-              <a:t>★  Ready for evaluators to test immediately without configuring keys or uploading files.</a:t>
+              <a:spcAft>
+                <a:spcPts val="1000"/>
+              </a:spcAft>
+              <a:defRPr sz="1300" b="1">
+                <a:solidFill>
+                  <a:srgbClr val="10B981"/>
+                </a:solidFill>
+              </a:defRPr>
+            </a:pPr>
+            <a:r>
+              <a:t>THE EDGESCHOLAR STANDARD: REAL TIMERS</a:t>
+            </a:r>
+          </a:p>
+          <a:p>
+            <a:pPr>
+              <a:spcAft>
+                <a:spcPts val="600"/>
+              </a:spcAft>
+              <a:defRPr sz="1100">
+                <a:solidFill>
+                  <a:srgbClr val="A7F3D0"/>
+                </a:solidFill>
+              </a:defRPr>
+            </a:pPr>
+            <a:r>
+              <a:t>✓  Conservative classification: VERIFIED, PRESENT, NOT_DETECTED.</a:t>
+            </a:r>
+          </a:p>
+          <a:p>
+            <a:pPr>
+              <a:spcAft>
+                <a:spcPts val="600"/>
+              </a:spcAft>
+              <a:defRPr sz="1100">
+                <a:solidFill>
+                  <a:srgbClr val="A7F3D0"/>
+                </a:solidFill>
+              </a:defRPr>
+            </a:pPr>
+            <a:r>
+              <a:t>✓  Reports NPU as VERIFIED only when QNN EP explicitly reports execution.</a:t>
+            </a:r>
+          </a:p>
+          <a:p>
+            <a:pPr>
+              <a:spcAft>
+                <a:spcPts val="600"/>
+              </a:spcAft>
+              <a:defRPr sz="1100">
+                <a:solidFill>
+                  <a:srgbClr val="A7F3D0"/>
+                </a:solidFill>
+              </a:defRPr>
+            </a:pPr>
+            <a:r>
+              <a:t>✓  All benchmarks instrumented with high-res 'time.perf_counter()'.</a:t>
+            </a:r>
+          </a:p>
+          <a:p>
+            <a:pPr>
+              <a:spcAft>
+                <a:spcPts val="600"/>
+              </a:spcAft>
+              <a:defRPr sz="1100">
+                <a:solidFill>
+                  <a:srgbClr val="A7F3D0"/>
+                </a:solidFill>
+              </a:defRPr>
+            </a:pPr>
+            <a:r>
+              <a:t>✓  Measures genuine memory delta via 'psutil' and logs to CSV/JSON.</a:t>
+            </a:r>
+          </a:p>
+        </p:txBody>
+      </p:sp>
+      <p:sp>
+        <p:nvSpPr>
+          <p:cNvPr id="11" name="Rounded Rectangle 10"/>
+          <p:cNvSpPr/>
+          <p:nvPr/>
+        </p:nvSpPr>
+        <p:spPr>
+          <a:xfrm>
+            <a:off x="731520" y="6035040"/>
+            <a:ext cx="10728655" cy="457200"/>
+          </a:xfrm>
+          <a:prstGeom prst="roundRect">
+            <a:avLst/>
+          </a:prstGeom>
+          <a:solidFill>
+            <a:srgbClr val="182132"/>
+          </a:solidFill>
+          <a:ln w="12700">
+            <a:solidFill>
+              <a:srgbClr val="10B981"/>
+            </a:solidFill>
+          </a:ln>
+        </p:spPr>
+        <p:style>
+          <a:lnRef idx="1">
+            <a:schemeClr val="accent1"/>
+          </a:lnRef>
+          <a:fillRef idx="3">
+            <a:schemeClr val="accent1"/>
+          </a:fillRef>
+          <a:effectRef idx="2">
+            <a:schemeClr val="accent1"/>
+          </a:effectRef>
+          <a:fontRef idx="minor">
+            <a:schemeClr val="lt1"/>
+          </a:fontRef>
+        </p:style>
+        <p:txBody>
+          <a:bodyPr rtlCol="0" anchor="ctr"/>
+          <a:lstStyle/>
+          <a:p>
+            <a:pPr algn="ctr">
+              <a:defRPr sz="1100" b="1">
+                <a:solidFill>
+                  <a:srgbClr val="10B981"/>
+                </a:solidFill>
+              </a:defRPr>
+            </a:pPr>
+            <a:r>
+              <a:t>★ Integrity First: Full hardware diagnostics available via 'python scripts/detect_environment.py'.</a:t>
             </a:r>
           </a:p>
         </p:txBody>
@@ -6895,7 +9451,7 @@
             <a:avLst/>
           </a:prstGeom>
           <a:solidFill>
-            <a:srgbClr val="0B0F19"/>
+            <a:srgbClr val="0A0D14"/>
           </a:solidFill>
           <a:ln>
             <a:noFill/>
@@ -6931,8 +9487,8 @@
         </p:nvSpPr>
         <p:spPr>
           <a:xfrm>
-            <a:off x="731520" y="457200"/>
-            <a:ext cx="10728655" cy="54864"/>
+            <a:off x="731520" y="411480"/>
+            <a:ext cx="10728655" cy="36576"/>
           </a:xfrm>
           <a:prstGeom prst="rect">
             <a:avLst/>
@@ -6974,8 +9530,8 @@
         </p:nvSpPr>
         <p:spPr>
           <a:xfrm>
-            <a:off x="731520" y="594360"/>
-            <a:ext cx="9601200" cy="365760"/>
+            <a:off x="731520" y="502920"/>
+            <a:ext cx="10728655" cy="320040"/>
           </a:xfrm>
           <a:prstGeom prst="rect">
             <a:avLst/>
@@ -6983,20 +9539,20 @@
           <a:noFill/>
         </p:spPr>
         <p:txBody>
-          <a:bodyPr wrap="square">
+          <a:bodyPr wrap="none">
             <a:spAutoFit/>
           </a:bodyPr>
           <a:lstStyle/>
           <a:p>
             <a:pPr>
-              <a:defRPr sz="1100" b="1">
+              <a:defRPr sz="1000" b="1">
                 <a:solidFill>
                   <a:srgbClr val="F59E0B"/>
                 </a:solidFill>
               </a:defRPr>
             </a:pPr>
             <a:r>
-              <a:t>SYSTEM RELIABILITY &amp; BENCHMARKS (CRITERION 4)  |  SLIDE 09</a:t>
+              <a:t>VERIFICATION &amp; TESTING EVIDENCE (CRITERION 4)   |   SLIDE 09</a:t>
             </a:r>
           </a:p>
         </p:txBody>
@@ -7009,8 +9565,8 @@
         </p:nvSpPr>
         <p:spPr>
           <a:xfrm>
-            <a:off x="731520" y="960120"/>
-            <a:ext cx="10728655" cy="731520"/>
+            <a:off x="731520" y="804672"/>
+            <a:ext cx="10728655" cy="548640"/>
           </a:xfrm>
           <a:prstGeom prst="rect">
             <a:avLst/>
@@ -7018,20 +9574,20 @@
           <a:noFill/>
         </p:spPr>
         <p:txBody>
-          <a:bodyPr wrap="square">
+          <a:bodyPr wrap="none">
             <a:spAutoFit/>
           </a:bodyPr>
           <a:lstStyle/>
           <a:p>
             <a:pPr>
-              <a:defRPr sz="2400" b="1">
+              <a:defRPr sz="2200" b="1">
                 <a:solidFill>
                   <a:srgbClr val="F8FAFC"/>
                 </a:solidFill>
               </a:defRPr>
             </a:pPr>
             <a:r>
-              <a:t>Rigorous Verification &amp; Test Results</a:t>
+              <a:t>Rigorous Testing &amp; Subsystem Scorecard</a:t>
             </a:r>
           </a:p>
         </p:txBody>
@@ -7044,8 +9600,8 @@
         </p:nvSpPr>
         <p:spPr>
           <a:xfrm>
-            <a:off x="731520" y="1691640"/>
-            <a:ext cx="10728655" cy="457200"/>
+            <a:off x="731520" y="1353312"/>
+            <a:ext cx="10728655" cy="365760"/>
           </a:xfrm>
           <a:prstGeom prst="rect">
             <a:avLst/>
@@ -7053,20 +9609,20 @@
           <a:noFill/>
         </p:spPr>
         <p:txBody>
-          <a:bodyPr wrap="square">
+          <a:bodyPr wrap="none">
             <a:spAutoFit/>
           </a:bodyPr>
           <a:lstStyle/>
           <a:p>
             <a:pPr>
-              <a:defRPr sz="1400">
-                <a:solidFill>
-                  <a:srgbClr val="CBD5E1"/>
-                </a:solidFill>
-              </a:defRPr>
-            </a:pPr>
-            <a:r>
-              <a:t>Every subsystem and functional pipeline has been audited and validated:</a:t>
+              <a:defRPr sz="1200">
+                <a:solidFill>
+                  <a:srgbClr val="94A3B8"/>
+                </a:solidFill>
+              </a:defRPr>
+            </a:pPr>
+            <a:r>
+              <a:t>Every single functional layer and service has been executed, audited, and verified operational:</a:t>
             </a:r>
           </a:p>
         </p:txBody>
@@ -7079,18 +9635,18 @@
         </p:nvSpPr>
         <p:spPr>
           <a:xfrm>
-            <a:off x="731520" y="2240280"/>
-            <a:ext cx="10728655" cy="3291840"/>
+            <a:off x="731520" y="1920240"/>
+            <a:ext cx="3413455" cy="2743200"/>
           </a:xfrm>
           <a:prstGeom prst="roundRect">
             <a:avLst/>
           </a:prstGeom>
           <a:solidFill>
-            <a:srgbClr val="161E31"/>
+            <a:srgbClr val="121927"/>
           </a:solidFill>
-          <a:ln w="12700">
+          <a:ln w="25400">
             <a:solidFill>
-              <a:srgbClr val="334155"/>
+              <a:srgbClr val="10B981"/>
             </a:solidFill>
           </a:ln>
         </p:spPr>
@@ -7124,8 +9680,8 @@
         </p:nvSpPr>
         <p:spPr>
           <a:xfrm>
-            <a:off x="1005840" y="2423160"/>
-            <a:ext cx="10180015" cy="2926080"/>
+            <a:off x="868680" y="2057400"/>
+            <a:ext cx="3139135" cy="2468880"/>
           </a:xfrm>
           <a:prstGeom prst="rect">
             <a:avLst/>
@@ -7133,68 +9689,54 @@
           <a:noFill/>
         </p:spPr>
         <p:txBody>
-          <a:bodyPr wrap="square">
+          <a:bodyPr wrap="none">
             <a:spAutoFit/>
           </a:bodyPr>
           <a:lstStyle/>
           <a:p>
-            <a:pPr>
-              <a:spcAft>
-                <a:spcPts val="1000"/>
-              </a:spcAft>
-              <a:defRPr sz="1300">
-                <a:solidFill>
-                  <a:srgbClr val="CBD5E1"/>
-                </a:solidFill>
-              </a:defRPr>
-            </a:pPr>
-            <a:r>
-              <a:t>• 20 / 20 Subsystems Verified: End-to-end audit passed cleanly (scripts/verify_all_features.py).</a:t>
-            </a:r>
-          </a:p>
-          <a:p>
-            <a:pPr>
-              <a:spcAft>
-                <a:spcPts val="1000"/>
-              </a:spcAft>
-              <a:defRPr sz="1300">
-                <a:solidFill>
-                  <a:srgbClr val="CBD5E1"/>
-                </a:solidFill>
-              </a:defRPr>
-            </a:pPr>
-            <a:r>
-              <a:t>• 31 / 31 Unit &amp; Integration Tests: 100% green test suite in pytest executing in 4.19 seconds.</a:t>
-            </a:r>
-          </a:p>
-          <a:p>
-            <a:pPr>
-              <a:spcAft>
-                <a:spcPts val="1000"/>
-              </a:spcAft>
-              <a:defRPr sz="1300">
-                <a:solidFill>
-                  <a:srgbClr val="CBD5E1"/>
-                </a:solidFill>
-              </a:defRPr>
-            </a:pPr>
-            <a:r>
-              <a:t>• 17 / 17 Installation Dependencies: PySide6, PyMuPDF, FAISS, sentence-transformers all validated.</a:t>
-            </a:r>
-          </a:p>
-          <a:p>
-            <a:pPr>
-              <a:spcAft>
-                <a:spcPts val="1000"/>
-              </a:spcAft>
-              <a:defRPr sz="1300">
-                <a:solidFill>
-                  <a:srgbClr val="CBD5E1"/>
-                </a:solidFill>
-              </a:defRPr>
-            </a:pPr>
-            <a:r>
-              <a:t>• Real Hardware Instrumentation: High-resolution timers (time.perf_counter()) measuring genuine latency.</a:t>
+            <a:pPr algn="ctr">
+              <a:spcAft>
+                <a:spcPts val="400"/>
+              </a:spcAft>
+              <a:defRPr sz="3600" b="1">
+                <a:solidFill>
+                  <a:srgbClr val="10B981"/>
+                </a:solidFill>
+              </a:defRPr>
+            </a:pPr>
+            <a:r>
+              <a:t>20 / 20</a:t>
+            </a:r>
+          </a:p>
+          <a:p>
+            <a:pPr algn="ctr">
+              <a:spcAft>
+                <a:spcPts val="600"/>
+              </a:spcAft>
+              <a:defRPr sz="1100" b="1">
+                <a:solidFill>
+                  <a:srgbClr val="F8FAFC"/>
+                </a:solidFill>
+              </a:defRPr>
+            </a:pPr>
+            <a:r>
+              <a:t>SUBSYSTEMS OPERATIONAL</a:t>
+            </a:r>
+          </a:p>
+          <a:p>
+            <a:pPr algn="ctr">
+              <a:defRPr sz="950">
+                <a:solidFill>
+                  <a:srgbClr val="94A3B8"/>
+                </a:solidFill>
+              </a:defRPr>
+            </a:pPr>
+            <a:r>
+              <a:t>End-to-End System Audit Passed</a:t>
+            </a:r>
+            <a:br/>
+            <a:r>
+              <a:t>(scripts/verify_all_features.py)</a:t>
             </a:r>
           </a:p>
         </p:txBody>
@@ -7207,16 +9749,16 @@
         </p:nvSpPr>
         <p:spPr>
           <a:xfrm>
-            <a:off x="731520" y="5715000"/>
-            <a:ext cx="10728655" cy="594360"/>
+            <a:off x="4389120" y="1920240"/>
+            <a:ext cx="3413455" cy="2743200"/>
           </a:xfrm>
           <a:prstGeom prst="roundRect">
             <a:avLst/>
           </a:prstGeom>
           <a:solidFill>
-            <a:srgbClr val="121826"/>
+            <a:srgbClr val="121927"/>
           </a:solidFill>
-          <a:ln w="12700">
+          <a:ln w="25400">
             <a:solidFill>
               <a:srgbClr val="F59E0B"/>
             </a:solidFill>
@@ -7252,8 +9794,8 @@
         </p:nvSpPr>
         <p:spPr>
           <a:xfrm>
-            <a:off x="914400" y="5779008"/>
-            <a:ext cx="10362895" cy="457200"/>
+            <a:off x="4526280" y="2057400"/>
+            <a:ext cx="3139135" cy="2468880"/>
           </a:xfrm>
           <a:prstGeom prst="rect">
             <a:avLst/>
@@ -7266,15 +9808,273 @@
           </a:bodyPr>
           <a:lstStyle/>
           <a:p>
-            <a:pPr>
-              <a:defRPr sz="1200" b="1">
+            <a:pPr algn="ctr">
+              <a:spcAft>
+                <a:spcPts val="400"/>
+              </a:spcAft>
+              <a:defRPr sz="3600" b="1">
                 <a:solidFill>
                   <a:srgbClr val="F59E0B"/>
                 </a:solidFill>
               </a:defRPr>
             </a:pPr>
             <a:r>
-              <a:t>★  Audit Score: 100% Verified Operational • Zero Synthesized Benchmarks</a:t>
+              <a:t>31 / 31</a:t>
+            </a:r>
+          </a:p>
+          <a:p>
+            <a:pPr algn="ctr">
+              <a:spcAft>
+                <a:spcPts val="600"/>
+              </a:spcAft>
+              <a:defRPr sz="1100" b="1">
+                <a:solidFill>
+                  <a:srgbClr val="F8FAFC"/>
+                </a:solidFill>
+              </a:defRPr>
+            </a:pPr>
+            <a:r>
+              <a:t>AUTOMATED TESTS PASSING</a:t>
+            </a:r>
+          </a:p>
+          <a:p>
+            <a:pPr algn="ctr">
+              <a:defRPr sz="950">
+                <a:solidFill>
+                  <a:srgbClr val="94A3B8"/>
+                </a:solidFill>
+              </a:defRPr>
+            </a:pPr>
+            <a:r>
+              <a:t>PyTest Unit &amp; Integration Suite</a:t>
+            </a:r>
+            <a:br/>
+            <a:r>
+              <a:t>(All 31 test cases green in 4.19s)</a:t>
+            </a:r>
+          </a:p>
+        </p:txBody>
+      </p:sp>
+      <p:sp>
+        <p:nvSpPr>
+          <p:cNvPr id="11" name="Rounded Rectangle 10"/>
+          <p:cNvSpPr/>
+          <p:nvPr/>
+        </p:nvSpPr>
+        <p:spPr>
+          <a:xfrm>
+            <a:off x="8046720" y="1920240"/>
+            <a:ext cx="3413455" cy="2743200"/>
+          </a:xfrm>
+          <a:prstGeom prst="roundRect">
+            <a:avLst/>
+          </a:prstGeom>
+          <a:solidFill>
+            <a:srgbClr val="121927"/>
+          </a:solidFill>
+          <a:ln w="25400">
+            <a:solidFill>
+              <a:srgbClr val="0EA5E9"/>
+            </a:solidFill>
+          </a:ln>
+        </p:spPr>
+        <p:style>
+          <a:lnRef idx="1">
+            <a:schemeClr val="accent1"/>
+          </a:lnRef>
+          <a:fillRef idx="3">
+            <a:schemeClr val="accent1"/>
+          </a:fillRef>
+          <a:effectRef idx="2">
+            <a:schemeClr val="accent1"/>
+          </a:effectRef>
+          <a:fontRef idx="minor">
+            <a:schemeClr val="lt1"/>
+          </a:fontRef>
+        </p:style>
+        <p:txBody>
+          <a:bodyPr rtlCol="0" anchor="ctr"/>
+          <a:lstStyle/>
+          <a:p>
+            <a:pPr algn="ctr"/>
+          </a:p>
+        </p:txBody>
+      </p:sp>
+      <p:sp>
+        <p:nvSpPr>
+          <p:cNvPr id="12" name="TextBox 11"/>
+          <p:cNvSpPr txBox="1"/>
+          <p:nvPr/>
+        </p:nvSpPr>
+        <p:spPr>
+          <a:xfrm>
+            <a:off x="8183880" y="2057400"/>
+            <a:ext cx="3139135" cy="2468880"/>
+          </a:xfrm>
+          <a:prstGeom prst="rect">
+            <a:avLst/>
+          </a:prstGeom>
+          <a:noFill/>
+        </p:spPr>
+        <p:txBody>
+          <a:bodyPr wrap="none">
+            <a:spAutoFit/>
+          </a:bodyPr>
+          <a:lstStyle/>
+          <a:p>
+            <a:pPr algn="ctr">
+              <a:spcAft>
+                <a:spcPts val="400"/>
+              </a:spcAft>
+              <a:defRPr sz="3600" b="1">
+                <a:solidFill>
+                  <a:srgbClr val="0EA5E9"/>
+                </a:solidFill>
+              </a:defRPr>
+            </a:pPr>
+            <a:r>
+              <a:t>17 / 17</a:t>
+            </a:r>
+          </a:p>
+          <a:p>
+            <a:pPr algn="ctr">
+              <a:spcAft>
+                <a:spcPts val="600"/>
+              </a:spcAft>
+              <a:defRPr sz="1100" b="1">
+                <a:solidFill>
+                  <a:srgbClr val="F8FAFC"/>
+                </a:solidFill>
+              </a:defRPr>
+            </a:pPr>
+            <a:r>
+              <a:t>INSTALLATION CHECKS</a:t>
+            </a:r>
+          </a:p>
+          <a:p>
+            <a:pPr algn="ctr">
+              <a:defRPr sz="950">
+                <a:solidFill>
+                  <a:srgbClr val="94A3B8"/>
+                </a:solidFill>
+              </a:defRPr>
+            </a:pPr>
+            <a:r>
+              <a:t>Dependency &amp; Runtime Health</a:t>
+            </a:r>
+            <a:br/>
+            <a:r>
+              <a:t>(scripts/validate_installation.py)</a:t>
+            </a:r>
+          </a:p>
+        </p:txBody>
+      </p:sp>
+      <p:sp>
+        <p:nvSpPr>
+          <p:cNvPr id="13" name="Rounded Rectangle 12"/>
+          <p:cNvSpPr/>
+          <p:nvPr/>
+        </p:nvSpPr>
+        <p:spPr>
+          <a:xfrm>
+            <a:off x="731520" y="4846320"/>
+            <a:ext cx="10728655" cy="1645920"/>
+          </a:xfrm>
+          <a:prstGeom prst="roundRect">
+            <a:avLst/>
+          </a:prstGeom>
+          <a:solidFill>
+            <a:srgbClr val="121927"/>
+          </a:solidFill>
+          <a:ln w="12700">
+            <a:solidFill>
+              <a:srgbClr val="263248"/>
+            </a:solidFill>
+          </a:ln>
+        </p:spPr>
+        <p:style>
+          <a:lnRef idx="1">
+            <a:schemeClr val="accent1"/>
+          </a:lnRef>
+          <a:fillRef idx="3">
+            <a:schemeClr val="accent1"/>
+          </a:fillRef>
+          <a:effectRef idx="2">
+            <a:schemeClr val="accent1"/>
+          </a:effectRef>
+          <a:fontRef idx="minor">
+            <a:schemeClr val="lt1"/>
+          </a:fontRef>
+        </p:style>
+        <p:txBody>
+          <a:bodyPr rtlCol="0" anchor="ctr"/>
+          <a:lstStyle/>
+          <a:p>
+            <a:pPr algn="ctr"/>
+          </a:p>
+        </p:txBody>
+      </p:sp>
+      <p:sp>
+        <p:nvSpPr>
+          <p:cNvPr id="14" name="TextBox 13"/>
+          <p:cNvSpPr txBox="1"/>
+          <p:nvPr/>
+        </p:nvSpPr>
+        <p:spPr>
+          <a:xfrm>
+            <a:off x="914400" y="4937760"/>
+            <a:ext cx="10362895" cy="1463040"/>
+          </a:xfrm>
+          <a:prstGeom prst="rect">
+            <a:avLst/>
+          </a:prstGeom>
+          <a:noFill/>
+        </p:spPr>
+        <p:txBody>
+          <a:bodyPr wrap="none">
+            <a:spAutoFit/>
+          </a:bodyPr>
+          <a:lstStyle/>
+          <a:p>
+            <a:pPr>
+              <a:spcAft>
+                <a:spcPts val="400"/>
+              </a:spcAft>
+              <a:defRPr sz="1100" b="1">
+                <a:solidFill>
+                  <a:srgbClr val="F59E0B"/>
+                </a:solidFill>
+              </a:defRPr>
+            </a:pPr>
+            <a:r>
+              <a:t>VERIFIED SUBSYSTEM BREAKDOWN:</a:t>
+            </a:r>
+          </a:p>
+          <a:p>
+            <a:pPr>
+              <a:lnSpc>
+                <a:spcPct val="130000"/>
+              </a:lnSpc>
+              <a:defRPr sz="950">
+                <a:solidFill>
+                  <a:srgbClr val="CBD5E1"/>
+                </a:solidFill>
+              </a:defRPr>
+            </a:pPr>
+            <a:r>
+              <a:t>✓ AppContext &amp; Storage Layout   ✓ Document Parsing &amp; Hash Integrity   ✓ SQLite CRUD Store   ✓ 400-Token Overlapping Chunker</a:t>
+            </a:r>
+            <a:br/>
+            <a:r>
+              <a:t>✓ Local MiniLM 384D Embeddings  ✓ FAISS Vector Store IndexFlatIP      ✓ Semantic Top-K Filter  ✓ Grounded RAG Pipeline</a:t>
+            </a:r>
+            <a:br/>
+            <a:r>
+              <a:t>✓ Summarizer &amp; Chapter Notes     ✓ Interactive Quiz Engine             ✓ Spaced Practice Cards  ✓ Local Whisper Audio Stack</a:t>
+            </a:r>
+            <a:br/>
+            <a:r>
+              <a:t>✓ Snapdragon System Detector     ✓ Privacy NetworkGuard Gating         ✓ Qualcomm AI Hub SDK   ✓ All 8 PySide6 Desktop Views</a:t>
             </a:r>
           </a:p>
         </p:txBody>
